--- a/strategic-management/airasia-case/SMJKT_Group 3_Aslih_Case AirAsia.pptx
+++ b/strategic-management/airasia-case/SMJKT_Group 3_Aslih_Case AirAsia.pptx
@@ -1928,7 +1928,7 @@
           <a:p>
             <a:r>
               <a:rPr lang="en-US" dirty="0"/>
-              <a:t>Poin analitis: keunggulan biaya AirAsia adalah sistem, bukan satu trik. Tiga pilar ini saling mengunci. Itulah sebabnya sulit ditiru, tetapi juga sulit dipindahkan sebagian.</a:t>
+              <a:t>Poin analitis: keunggulan biaya AirAsia adalah sistem, bukan satu trik. Tiga pilar ini saling menopang. Itulah sebabnya sulit ditiru, tetapi juga sulit dipindahkan sebagian.</a:t>
             </a:r>
             <a:endParaRPr lang="en-US" dirty="0"/>
           </a:p>
@@ -2016,7 +2016,7 @@
           <a:p>
             <a:r>
               <a:rPr lang="en-US" dirty="0"/>
-              <a:t>Ini slide inti. Kesimpulannya: yang terbawa adalah keunggulan organisasional, yang hilang adalah keunggulan operasional khas rute pendek. Maka AirAsia X harus membangun sumber biaya rendah baru, tidak cukup mewarisi.</a:t>
+              <a:t>Ini slide inti tahap ketiga. Kesimpulannya: yang terbawa adalah keunggulan organisasional, yang hilang adalah keunggulan operasional khas rute pendek. Maka AirAsia X harus membangun sumber biaya rendah baru, tidak cukup mewarisi.</a:t>
             </a:r>
             <a:endParaRPr lang="en-US" dirty="0"/>
           </a:p>
@@ -2280,7 +2280,7 @@
           <a:p>
             <a:r>
               <a:rPr lang="en-US" dirty="0"/>
-              <a:t>Sesuai panduan RPKPS, alternatif dideskripsikan ringkas tanpa argumen pro dan kontra. Penilaian dilakukan di slide berikutnya dengan kriteria yang sama untuk ketiganya. Lensa ambidexterity: March (1991), O'Reilly dan Tushman (2004). Tata kelola hibrida: Williamson (1991).</a:t>
+              <a:t>Sesuai panduan RPKPS, alternatif dideskripsikan ringkas tanpa argumen pro dan kontra. Lensa ambidexterity: March (1991), O'Reilly dan Tushman (2004). Tata kelola hibrida: Williamson (1991).</a:t>
             </a:r>
             <a:endParaRPr lang="en-US" dirty="0"/>
           </a:p>
@@ -2368,7 +2368,7 @@
           <a:p>
             <a:r>
               <a:rPr lang="en-US" dirty="0"/>
-              <a:t>Alternatif A aman tetapi mengabaikan sumber pertumbuhan. Alternatif B menangkap peluang tetapi memindahkan seluruh risiko ke neraca yang rapuh. Alternatif C mengunci kendali tanpa mengunci risiko.</a:t>
+              <a:t>Alternatif A aman tetapi mengabaikan sumber pertumbuhan. Alternatif B menangkap peluang tetapi memindahkan seluruh risiko ke neraca yang lemah. Alternatif C mengunci kendali tanpa mengunci risiko.</a:t>
             </a:r>
             <a:endParaRPr lang="en-US" dirty="0"/>
           </a:p>
@@ -2632,7 +2632,7 @@
           <a:p>
             <a:r>
               <a:rPr lang="en-US" dirty="0"/>
-              <a:t>Referensi dan batasan analisis.</a:t>
+              <a:t>Referensi lengkap: Grant (2010) Contemporary Strategy Analysis, Case 9. Thompson dan Strickland (2019) Strategic Management, Bab 3. Porter (1980) Competitive Strategy. March (1991) Organization Science 2(1). O'Reilly dan Tushman (2004) Harvard Business Review 82(4). Williamson (1991) Administrative Science Quarterly 36(2). Handoko, Indarti, dan Almahendra (2014) Manajemen dalam Berbagai Perspektif. RPKPS MAN 5422 FEB UGM (2026), Lampiran 3.</a:t>
             </a:r>
             <a:endParaRPr lang="en-US" dirty="0"/>
           </a:p>
@@ -2720,7 +2720,7 @@
           <a:p>
             <a:r>
               <a:rPr lang="en-US" dirty="0"/>
-              <a:t>Jelaskan bahwa urutan analisis mengikuti logika SCP: struktur industri menentukan perilaku perusahaan dan pada akhirnya kinerja. Analisis eksternal dulu, baru posisi perusahaan, baru pilihan. Lensa exploration dan exploitation dipakai untuk membaca hubungan AirAsia dan AirAsia X.</a:t>
+              <a:t>Jelaskan bahwa urutan analisis mengikuti logika SCP: struktur industri menentukan perilaku perusahaan dan pada akhirnya kinerja. Analisis eksternal dulu, baru posisi perusahaan, baru pilihan. Penanda tahap di atas setiap slide menunjukkan posisi kita dalam alur ini.</a:t>
             </a:r>
             <a:endParaRPr lang="en-US" dirty="0"/>
           </a:p>
@@ -2896,7 +2896,7 @@
           <a:p>
             <a:r>
               <a:rPr lang="en-US" dirty="0"/>
-              <a:t>Mengikuti panduan RPKPS: masalah dirumuskan sebagai tujuan yang terhalang. Kata kuncinya goals dan barrier. Istilah exploration dan exploitation mengacu pada March (1991): perusahaan harus menyeimbangkan pendalaman kompetensi yang ada dengan pencarian peluang baru.</a:t>
+              <a:t>Mengikuti panduan RPKPS: masalah dirumuskan sebagai tujuan yang terhalang. Kata kuncinya goals dan barrier. Istilah exploration dan exploitation mengacu pada March (1991): perusahaan perlu menyeimbangkan pendalaman kompetensi yang ada dengan pencarian peluang baru.</a:t>
             </a:r>
             <a:endParaRPr lang="en-US" dirty="0"/>
           </a:p>
@@ -4116,7 +4116,7 @@
         <p:spPr>
           <a:xfrm>
             <a:off x="548640" y="320040"/>
-            <a:ext cx="10972800" cy="274320"/>
+            <a:ext cx="11064240" cy="274320"/>
           </a:xfrm>
           <a:prstGeom prst="rect">
             <a:avLst/>
@@ -4132,7 +4132,63 @@
               <a:buNone/>
             </a:pPr>
             <a:r>
-              <a:rPr lang="en-US" sz="1100" b="1" spc="200" kern="0" dirty="0">
+              <a:rPr lang="en-US" sz="1000" spc="150" kern="0" dirty="0">
+                <a:solidFill>
+                  <a:srgbClr val="B5B5B5"/>
+                </a:solidFill>
+                <a:latin typeface="Calibri" pitchFamily="34" charset="0"/>
+                <a:ea typeface="Calibri" pitchFamily="34" charset="-122"/>
+                <a:cs typeface="Calibri" pitchFamily="34" charset="-120"/>
+              </a:rPr>
+              <a:t>1  PROBLEM</a:t>
+            </a:r>
+            <a:pPr indent="0" marL="0">
+              <a:buNone/>
+            </a:pPr>
+            <a:r>
+              <a:rPr lang="en-US" sz="1000" spc="150" kern="0" dirty="0">
+                <a:solidFill>
+                  <a:srgbClr val="B5B5B5"/>
+                </a:solidFill>
+                <a:latin typeface="Calibri" pitchFamily="34" charset="0"/>
+                <a:ea typeface="Calibri" pitchFamily="34" charset="-122"/>
+                <a:cs typeface="Calibri" pitchFamily="34" charset="-120"/>
+              </a:rPr>
+              <a:t>      </a:t>
+            </a:r>
+            <a:pPr indent="0" marL="0">
+              <a:buNone/>
+            </a:pPr>
+            <a:r>
+              <a:rPr lang="en-US" sz="1000" spc="150" kern="0" dirty="0">
+                <a:solidFill>
+                  <a:srgbClr val="B5B5B5"/>
+                </a:solidFill>
+                <a:latin typeface="Calibri" pitchFamily="34" charset="0"/>
+                <a:ea typeface="Calibri" pitchFamily="34" charset="-122"/>
+                <a:cs typeface="Calibri" pitchFamily="34" charset="-120"/>
+              </a:rPr>
+              <a:t>2  EXTERNAL ENVIRONMENT</a:t>
+            </a:r>
+            <a:pPr indent="0" marL="0">
+              <a:buNone/>
+            </a:pPr>
+            <a:r>
+              <a:rPr lang="en-US" sz="1000" spc="150" kern="0" dirty="0">
+                <a:solidFill>
+                  <a:srgbClr val="B5B5B5"/>
+                </a:solidFill>
+                <a:latin typeface="Calibri" pitchFamily="34" charset="0"/>
+                <a:ea typeface="Calibri" pitchFamily="34" charset="-122"/>
+                <a:cs typeface="Calibri" pitchFamily="34" charset="-120"/>
+              </a:rPr>
+              <a:t>      </a:t>
+            </a:r>
+            <a:pPr indent="0" marL="0">
+              <a:buNone/>
+            </a:pPr>
+            <a:r>
+              <a:rPr lang="en-US" sz="1000" b="1" spc="150" kern="0" dirty="0">
                 <a:solidFill>
                   <a:srgbClr val="C8102E"/>
                 </a:solidFill>
@@ -4140,9 +4196,37 @@
                 <a:ea typeface="Calibri" pitchFamily="34" charset="-122"/>
                 <a:cs typeface="Calibri" pitchFamily="34" charset="-120"/>
               </a:rPr>
-              <a:t>SOURCES OF COST ADVANTAGE</a:t>
-            </a:r>
-            <a:endParaRPr lang="en-US" sz="1100" dirty="0"/>
+              <a:t>3  COST POSITION</a:t>
+            </a:r>
+            <a:pPr indent="0" marL="0">
+              <a:buNone/>
+            </a:pPr>
+            <a:r>
+              <a:rPr lang="en-US" sz="1000" spc="150" kern="0" dirty="0">
+                <a:solidFill>
+                  <a:srgbClr val="B5B5B5"/>
+                </a:solidFill>
+                <a:latin typeface="Calibri" pitchFamily="34" charset="0"/>
+                <a:ea typeface="Calibri" pitchFamily="34" charset="-122"/>
+                <a:cs typeface="Calibri" pitchFamily="34" charset="-120"/>
+              </a:rPr>
+              <a:t>      </a:t>
+            </a:r>
+            <a:pPr indent="0" marL="0">
+              <a:buNone/>
+            </a:pPr>
+            <a:r>
+              <a:rPr lang="en-US" sz="1000" spc="150" kern="0" dirty="0">
+                <a:solidFill>
+                  <a:srgbClr val="B5B5B5"/>
+                </a:solidFill>
+                <a:latin typeface="Calibri" pitchFamily="34" charset="0"/>
+                <a:ea typeface="Calibri" pitchFamily="34" charset="-122"/>
+                <a:cs typeface="Calibri" pitchFamily="34" charset="-120"/>
+              </a:rPr>
+              <a:t>4  CHOICE</a:t>
+            </a:r>
+            <a:endParaRPr lang="en-US" sz="1000" dirty="0"/>
           </a:p>
         </p:txBody>
       </p:sp>
@@ -4154,8 +4238,8 @@
         </p:nvSpPr>
         <p:spPr>
           <a:xfrm>
-            <a:off x="548640" y="566928"/>
-            <a:ext cx="11064240" cy="731520"/>
+            <a:off x="548640" y="621792"/>
+            <a:ext cx="11064240" cy="640080"/>
           </a:xfrm>
           <a:prstGeom prst="rect">
             <a:avLst/>
@@ -4171,7 +4255,7 @@
               <a:buNone/>
             </a:pPr>
             <a:r>
-              <a:rPr lang="en-US" sz="2600" b="1" dirty="0">
+              <a:rPr lang="en-US" sz="3000" b="1" dirty="0">
                 <a:solidFill>
                   <a:srgbClr val="1C1C1C"/>
                 </a:solidFill>
@@ -4179,9 +4263,9 @@
                 <a:ea typeface="Cambria" pitchFamily="34" charset="-122"/>
                 <a:cs typeface="Cambria" pitchFamily="34" charset="-120"/>
               </a:rPr>
-              <a:t>McCarthy's formula: Ryanair operations, Southwest people, easyJet branding</a:t>
-            </a:r>
-            <a:endParaRPr lang="en-US" sz="2600" dirty="0"/>
+              <a:t>Sources of cost advantage</a:t>
+            </a:r>
+            <a:endParaRPr lang="en-US" sz="3000" dirty="0"/>
           </a:p>
         </p:txBody>
       </p:sp>
@@ -4193,8 +4277,8 @@
         </p:nvSpPr>
         <p:spPr>
           <a:xfrm>
-            <a:off x="548640" y="1463040"/>
-            <a:ext cx="3520440" cy="3931920"/>
+            <a:off x="548640" y="1417320"/>
+            <a:ext cx="3520440" cy="3657600"/>
           </a:xfrm>
           <a:prstGeom prst="roundRect">
             <a:avLst>
@@ -4220,7 +4304,7 @@
         </p:nvSpPr>
         <p:spPr>
           <a:xfrm>
-            <a:off x="749808" y="1572768"/>
+            <a:off x="749808" y="1508760"/>
             <a:ext cx="3108960" cy="411480"/>
           </a:xfrm>
           <a:prstGeom prst="rect">
@@ -4259,7 +4343,7 @@
         </p:nvSpPr>
         <p:spPr>
           <a:xfrm>
-            <a:off x="749808" y="2121408"/>
+            <a:off x="749808" y="2029968"/>
             <a:ext cx="329184" cy="329184"/>
           </a:xfrm>
           <a:prstGeom prst="ellipse">
@@ -4284,7 +4368,7 @@
         </p:nvSpPr>
         <p:spPr>
           <a:xfrm>
-            <a:off x="749808" y="2121408"/>
+            <a:off x="749808" y="2029968"/>
             <a:ext cx="329184" cy="329184"/>
           </a:xfrm>
           <a:prstGeom prst="rect">
@@ -4323,8 +4407,8 @@
         </p:nvSpPr>
         <p:spPr>
           <a:xfrm>
-            <a:off x="1188720" y="2103120"/>
-            <a:ext cx="2697480" cy="1051560"/>
+            <a:off x="1188720" y="2011680"/>
+            <a:ext cx="2697480" cy="960120"/>
           </a:xfrm>
           <a:prstGeom prst="rect">
             <a:avLst/>
@@ -4379,7 +4463,7 @@
         </p:nvSpPr>
         <p:spPr>
           <a:xfrm>
-            <a:off x="749808" y="3218688"/>
+            <a:off x="749808" y="3035808"/>
             <a:ext cx="329184" cy="329184"/>
           </a:xfrm>
           <a:prstGeom prst="ellipse">
@@ -4404,7 +4488,7 @@
         </p:nvSpPr>
         <p:spPr>
           <a:xfrm>
-            <a:off x="749808" y="3218688"/>
+            <a:off x="749808" y="3035808"/>
             <a:ext cx="329184" cy="329184"/>
           </a:xfrm>
           <a:prstGeom prst="rect">
@@ -4443,8 +4527,8 @@
         </p:nvSpPr>
         <p:spPr>
           <a:xfrm>
-            <a:off x="1188720" y="3200400"/>
-            <a:ext cx="2697480" cy="1051560"/>
+            <a:off x="1188720" y="3017520"/>
+            <a:ext cx="2697480" cy="960120"/>
           </a:xfrm>
           <a:prstGeom prst="rect">
             <a:avLst/>
@@ -4499,7 +4583,7 @@
         </p:nvSpPr>
         <p:spPr>
           <a:xfrm>
-            <a:off x="749808" y="4315968"/>
+            <a:off x="749808" y="4041648"/>
             <a:ext cx="329184" cy="329184"/>
           </a:xfrm>
           <a:prstGeom prst="ellipse">
@@ -4524,7 +4608,7 @@
         </p:nvSpPr>
         <p:spPr>
           <a:xfrm>
-            <a:off x="749808" y="4315968"/>
+            <a:off x="749808" y="4041648"/>
             <a:ext cx="329184" cy="329184"/>
           </a:xfrm>
           <a:prstGeom prst="rect">
@@ -4563,8 +4647,8 @@
         </p:nvSpPr>
         <p:spPr>
           <a:xfrm>
-            <a:off x="1188720" y="4297680"/>
-            <a:ext cx="2697480" cy="1051560"/>
+            <a:off x="1188720" y="4023360"/>
+            <a:ext cx="2697480" cy="960120"/>
           </a:xfrm>
           <a:prstGeom prst="rect">
             <a:avLst/>
@@ -4619,8 +4703,8 @@
         </p:nvSpPr>
         <p:spPr>
           <a:xfrm>
-            <a:off x="4251960" y="1463040"/>
-            <a:ext cx="3520440" cy="3931920"/>
+            <a:off x="4251960" y="1417320"/>
+            <a:ext cx="3520440" cy="3657600"/>
           </a:xfrm>
           <a:prstGeom prst="roundRect">
             <a:avLst>
@@ -4646,7 +4730,7 @@
         </p:nvSpPr>
         <p:spPr>
           <a:xfrm>
-            <a:off x="4453128" y="1572768"/>
+            <a:off x="4453128" y="1508760"/>
             <a:ext cx="3108960" cy="411480"/>
           </a:xfrm>
           <a:prstGeom prst="rect">
@@ -4685,7 +4769,7 @@
         </p:nvSpPr>
         <p:spPr>
           <a:xfrm>
-            <a:off x="4453128" y="2121408"/>
+            <a:off x="4453128" y="2029968"/>
             <a:ext cx="329184" cy="329184"/>
           </a:xfrm>
           <a:prstGeom prst="ellipse">
@@ -4710,7 +4794,7 @@
         </p:nvSpPr>
         <p:spPr>
           <a:xfrm>
-            <a:off x="4453128" y="2121408"/>
+            <a:off x="4453128" y="2029968"/>
             <a:ext cx="329184" cy="329184"/>
           </a:xfrm>
           <a:prstGeom prst="rect">
@@ -4749,8 +4833,8 @@
         </p:nvSpPr>
         <p:spPr>
           <a:xfrm>
-            <a:off x="4892040" y="2103120"/>
-            <a:ext cx="2697480" cy="1051560"/>
+            <a:off x="4892040" y="2011680"/>
+            <a:ext cx="2697480" cy="960120"/>
           </a:xfrm>
           <a:prstGeom prst="rect">
             <a:avLst/>
@@ -4791,7 +4875,7 @@
                 <a:ea typeface="Calibri" pitchFamily="34" charset="-122"/>
                 <a:cs typeface="Calibri" pitchFamily="34" charset="-120"/>
               </a:rPr>
-              <a:t>Fleksibilitas tugas hingga tingkat administrasi; retensi sangat tinggi menekan biaya pelatihan ulang.</a:t>
+              <a:t>Fleksibilitas tugas hingga tingkat administrasi; retensi tinggi menekan biaya pelatihan ulang.</a:t>
             </a:r>
             <a:endParaRPr lang="en-US" sz="1100" dirty="0"/>
           </a:p>
@@ -4805,7 +4889,7 @@
         </p:nvSpPr>
         <p:spPr>
           <a:xfrm>
-            <a:off x="4453128" y="3218688"/>
+            <a:off x="4453128" y="3035808"/>
             <a:ext cx="329184" cy="329184"/>
           </a:xfrm>
           <a:prstGeom prst="ellipse">
@@ -4830,7 +4914,7 @@
         </p:nvSpPr>
         <p:spPr>
           <a:xfrm>
-            <a:off x="4453128" y="3218688"/>
+            <a:off x="4453128" y="3035808"/>
             <a:ext cx="329184" cy="329184"/>
           </a:xfrm>
           <a:prstGeom prst="rect">
@@ -4869,8 +4953,8 @@
         </p:nvSpPr>
         <p:spPr>
           <a:xfrm>
-            <a:off x="4892040" y="3200400"/>
-            <a:ext cx="2697480" cy="1051560"/>
+            <a:off x="4892040" y="3017520"/>
+            <a:ext cx="2697480" cy="960120"/>
           </a:xfrm>
           <a:prstGeom prst="rect">
             <a:avLst/>
@@ -4925,7 +5009,7 @@
         </p:nvSpPr>
         <p:spPr>
           <a:xfrm>
-            <a:off x="4453128" y="4315968"/>
+            <a:off x="4453128" y="4041648"/>
             <a:ext cx="329184" cy="329184"/>
           </a:xfrm>
           <a:prstGeom prst="ellipse">
@@ -4950,7 +5034,7 @@
         </p:nvSpPr>
         <p:spPr>
           <a:xfrm>
-            <a:off x="4453128" y="4315968"/>
+            <a:off x="4453128" y="4041648"/>
             <a:ext cx="329184" cy="329184"/>
           </a:xfrm>
           <a:prstGeom prst="rect">
@@ -4989,8 +5073,8 @@
         </p:nvSpPr>
         <p:spPr>
           <a:xfrm>
-            <a:off x="4892040" y="4297680"/>
-            <a:ext cx="2697480" cy="1051560"/>
+            <a:off x="4892040" y="4023360"/>
+            <a:ext cx="2697480" cy="960120"/>
           </a:xfrm>
           <a:prstGeom prst="rect">
             <a:avLst/>
@@ -5031,7 +5115,7 @@
                 <a:ea typeface="Calibri" pitchFamily="34" charset="-122"/>
                 <a:cs typeface="Calibri" pitchFamily="34" charset="-120"/>
               </a:rPr>
-              <a:t>Fernandes rutin bekerja sebagai porter dan awak kabin; departemen budaya menjaga semangat.</a:t>
+              <a:t>Fernandes rutin bekerja sebagai porter dan awak kabin; departemen budaya menjaga semangat kerja.</a:t>
             </a:r>
             <a:endParaRPr lang="en-US" sz="1100" dirty="0"/>
           </a:p>
@@ -5045,8 +5129,8 @@
         </p:nvSpPr>
         <p:spPr>
           <a:xfrm>
-            <a:off x="7955280" y="1463040"/>
-            <a:ext cx="3520440" cy="3931920"/>
+            <a:off x="7955280" y="1417320"/>
+            <a:ext cx="3520440" cy="3657600"/>
           </a:xfrm>
           <a:prstGeom prst="roundRect">
             <a:avLst>
@@ -5072,7 +5156,7 @@
         </p:nvSpPr>
         <p:spPr>
           <a:xfrm>
-            <a:off x="8156448" y="1572768"/>
+            <a:off x="8156448" y="1508760"/>
             <a:ext cx="3108960" cy="411480"/>
           </a:xfrm>
           <a:prstGeom prst="rect">
@@ -5111,7 +5195,7 @@
         </p:nvSpPr>
         <p:spPr>
           <a:xfrm>
-            <a:off x="8156448" y="2121408"/>
+            <a:off x="8156448" y="2029968"/>
             <a:ext cx="329184" cy="329184"/>
           </a:xfrm>
           <a:prstGeom prst="ellipse">
@@ -5136,7 +5220,7 @@
         </p:nvSpPr>
         <p:spPr>
           <a:xfrm>
-            <a:off x="8156448" y="2121408"/>
+            <a:off x="8156448" y="2029968"/>
             <a:ext cx="329184" cy="329184"/>
           </a:xfrm>
           <a:prstGeom prst="rect">
@@ -5175,8 +5259,8 @@
         </p:nvSpPr>
         <p:spPr>
           <a:xfrm>
-            <a:off x="8595360" y="2103120"/>
-            <a:ext cx="2697480" cy="1051560"/>
+            <a:off x="8595360" y="2011680"/>
+            <a:ext cx="2697480" cy="960120"/>
           </a:xfrm>
           <a:prstGeom prst="rect">
             <a:avLst/>
@@ -5231,7 +5315,7 @@
         </p:nvSpPr>
         <p:spPr>
           <a:xfrm>
-            <a:off x="8156448" y="3218688"/>
+            <a:off x="8156448" y="3035808"/>
             <a:ext cx="329184" cy="329184"/>
           </a:xfrm>
           <a:prstGeom prst="ellipse">
@@ -5256,7 +5340,7 @@
         </p:nvSpPr>
         <p:spPr>
           <a:xfrm>
-            <a:off x="8156448" y="3218688"/>
+            <a:off x="8156448" y="3035808"/>
             <a:ext cx="329184" cy="329184"/>
           </a:xfrm>
           <a:prstGeom prst="rect">
@@ -5295,8 +5379,8 @@
         </p:nvSpPr>
         <p:spPr>
           <a:xfrm>
-            <a:off x="8595360" y="3200400"/>
-            <a:ext cx="2697480" cy="1051560"/>
+            <a:off x="8595360" y="3017520"/>
+            <a:ext cx="2697480" cy="960120"/>
           </a:xfrm>
           <a:prstGeom prst="rect">
             <a:avLst/>
@@ -5351,7 +5435,7 @@
         </p:nvSpPr>
         <p:spPr>
           <a:xfrm>
-            <a:off x="8156448" y="4315968"/>
+            <a:off x="8156448" y="4041648"/>
             <a:ext cx="329184" cy="329184"/>
           </a:xfrm>
           <a:prstGeom prst="ellipse">
@@ -5376,7 +5460,7 @@
         </p:nvSpPr>
         <p:spPr>
           <a:xfrm>
-            <a:off x="8156448" y="4315968"/>
+            <a:off x="8156448" y="4041648"/>
             <a:ext cx="329184" cy="329184"/>
           </a:xfrm>
           <a:prstGeom prst="rect">
@@ -5415,8 +5499,8 @@
         </p:nvSpPr>
         <p:spPr>
           <a:xfrm>
-            <a:off x="8595360" y="4297680"/>
-            <a:ext cx="2697480" cy="1051560"/>
+            <a:off x="8595360" y="4023360"/>
+            <a:ext cx="2697480" cy="960120"/>
           </a:xfrm>
           <a:prstGeom prst="rect">
             <a:avLst/>
@@ -5471,20 +5555,20 @@
         </p:nvSpPr>
         <p:spPr>
           <a:xfrm>
-            <a:off x="548640" y="5577840"/>
-            <a:ext cx="11064240" cy="731520"/>
+            <a:off x="548640" y="5212080"/>
+            <a:ext cx="11064240" cy="685800"/>
           </a:xfrm>
           <a:prstGeom prst="roundRect">
             <a:avLst>
-              <a:gd name="adj" fmla="val 10000"/>
+              <a:gd name="adj" fmla="val 10667"/>
             </a:avLst>
           </a:prstGeom>
           <a:solidFill>
-            <a:srgbClr val="1C1C1C"/>
+            <a:srgbClr val="F4F4F4"/>
           </a:solidFill>
           <a:ln w="12700">
             <a:solidFill>
-              <a:srgbClr val="1C1C1C"/>
+              <a:srgbClr val="F4F4F4"/>
             </a:solidFill>
             <a:prstDash val="solid"/>
           </a:ln>
@@ -5498,8 +5582,8 @@
         </p:nvSpPr>
         <p:spPr>
           <a:xfrm>
-            <a:off x="777240" y="5632704"/>
-            <a:ext cx="10607040" cy="621792"/>
+            <a:off x="777240" y="5266944"/>
+            <a:ext cx="10607040" cy="576072"/>
           </a:xfrm>
           <a:prstGeom prst="rect">
             <a:avLst/>
@@ -5515,31 +5599,31 @@
               <a:buNone/>
             </a:pPr>
             <a:r>
-              <a:rPr lang="en-US" sz="1150" b="1" dirty="0">
-                <a:solidFill>
-                  <a:srgbClr val="F1C7CF"/>
-                </a:solidFill>
-                <a:latin typeface="Calibri" pitchFamily="34" charset="0"/>
-                <a:ea typeface="Calibri" pitchFamily="34" charset="-122"/>
-                <a:cs typeface="Calibri" pitchFamily="34" charset="-120"/>
-              </a:rPr>
-              <a:t>Ibarat sebuah pesawat, </a:t>
-            </a:r>
-            <a:pPr indent="0" marL="0">
-              <a:buNone/>
-            </a:pPr>
-            <a:r>
-              <a:rPr lang="en-US" sz="1150" dirty="0">
-                <a:solidFill>
-                  <a:srgbClr val="FFFFFF"/>
-                </a:solidFill>
-                <a:latin typeface="Calibri" pitchFamily="34" charset="0"/>
-                <a:ea typeface="Calibri" pitchFamily="34" charset="-122"/>
-                <a:cs typeface="Calibri" pitchFamily="34" charset="-120"/>
-              </a:rPr>
-              <a:t>operasi adalah mesinnya, SDM adalah awaknya, dan merek adalah sayapnya. Ketiganya saling mengunci (mutually reinforcing): mencabut satu bagian membuat sistem tidak lagi terbang seefisien semula. Itulah sebabnya keunggulan biaya AirAsia sulit ditiru, tetapi juga sulit dipindahkan sebagian.</a:t>
-            </a:r>
-            <a:endParaRPr lang="en-US" sz="1150" dirty="0"/>
+              <a:rPr lang="en-US" sz="1100" b="1" dirty="0">
+                <a:solidFill>
+                  <a:srgbClr val="C8102E"/>
+                </a:solidFill>
+                <a:latin typeface="Calibri" pitchFamily="34" charset="0"/>
+                <a:ea typeface="Calibri" pitchFamily="34" charset="-122"/>
+                <a:cs typeface="Calibri" pitchFamily="34" charset="-120"/>
+              </a:rPr>
+              <a:t>Catatan. </a:t>
+            </a:r>
+            <a:pPr indent="0" marL="0">
+              <a:buNone/>
+            </a:pPr>
+            <a:r>
+              <a:rPr lang="en-US" sz="1100" dirty="0">
+                <a:solidFill>
+                  <a:srgbClr val="1C1C1C"/>
+                </a:solidFill>
+                <a:latin typeface="Calibri" pitchFamily="34" charset="0"/>
+                <a:ea typeface="Calibri" pitchFamily="34" charset="-122"/>
+                <a:cs typeface="Calibri" pitchFamily="34" charset="-120"/>
+              </a:rPr>
+              <a:t>Ketiga pilar ini saling menopang (mutually reinforcing). Keunggulan biaya AirAsia adalah sebuah sistem, bukan satu kebijakan tunggal. Karena itu ia sulit ditiru pesaing, tetapi juga tidak mudah dipindahkan sebagian.</a:t>
+            </a:r>
+            <a:endParaRPr lang="en-US" sz="1100" dirty="0"/>
           </a:p>
         </p:txBody>
       </p:sp>
@@ -5551,6 +5635,59 @@
         </p:nvSpPr>
         <p:spPr>
           <a:xfrm>
+            <a:off x="548640" y="6016752"/>
+            <a:ext cx="11064240" cy="365760"/>
+          </a:xfrm>
+          <a:prstGeom prst="rect">
+            <a:avLst/>
+          </a:prstGeom>
+          <a:noFill/>
+          <a:ln/>
+        </p:spPr>
+        <p:txBody>
+          <a:bodyPr wrap="square" lIns="0" tIns="0" rIns="0" bIns="0" rtlCol="0" anchor="ctr"/>
+          <a:lstStyle/>
+          <a:p>
+            <a:pPr indent="0" marL="0">
+              <a:buNone/>
+            </a:pPr>
+            <a:r>
+              <a:rPr lang="en-US" sz="1050" b="1" dirty="0">
+                <a:solidFill>
+                  <a:srgbClr val="C8102E"/>
+                </a:solidFill>
+                <a:latin typeface="Calibri" pitchFamily="34" charset="0"/>
+                <a:ea typeface="Calibri" pitchFamily="34" charset="-122"/>
+                <a:cs typeface="Calibri" pitchFamily="34" charset="-120"/>
+              </a:rPr>
+              <a:t>Kaitan.  </a:t>
+            </a:r>
+            <a:pPr indent="0" marL="0">
+              <a:buNone/>
+            </a:pPr>
+            <a:r>
+              <a:rPr lang="en-US" sz="1050" i="1" dirty="0">
+                <a:solidFill>
+                  <a:srgbClr val="6E6E6E"/>
+                </a:solidFill>
+                <a:latin typeface="Calibri" pitchFamily="34" charset="0"/>
+                <a:ea typeface="Calibri" pitchFamily="34" charset="-122"/>
+                <a:cs typeface="Calibri" pitchFamily="34" charset="-120"/>
+              </a:rPr>
+              <a:t>Sekarang kita punya daftar sumber keunggulan biaya. Slide berikutnya menguji satu per satu: mana yang ikut ke rute jauh dan mana yang tertinggal.</a:t>
+            </a:r>
+            <a:endParaRPr lang="en-US" sz="1050" dirty="0"/>
+          </a:p>
+        </p:txBody>
+      </p:sp>
+      <p:sp>
+        <p:nvSpPr>
+          <p:cNvPr id="40" name="Text 38"/>
+          <p:cNvSpPr txBox="1"/>
+          <p:nvPr/>
+        </p:nvSpPr>
+        <p:spPr>
+          <a:xfrm>
             <a:off x="548640" y="6446520"/>
             <a:ext cx="7315200" cy="274320"/>
           </a:xfrm>
@@ -5584,7 +5721,7 @@
       </p:sp>
       <p:sp>
         <p:nvSpPr>
-          <p:cNvPr id="40" name="Text 38"/>
+          <p:cNvPr id="41" name="Text 39"/>
           <p:cNvSpPr txBox="1"/>
           <p:nvPr/>
         </p:nvSpPr>
@@ -5662,7 +5799,7 @@
         <p:spPr>
           <a:xfrm>
             <a:off x="548640" y="320040"/>
-            <a:ext cx="10972800" cy="274320"/>
+            <a:ext cx="11064240" cy="274320"/>
           </a:xfrm>
           <a:prstGeom prst="rect">
             <a:avLst/>
@@ -5678,7 +5815,63 @@
               <a:buNone/>
             </a:pPr>
             <a:r>
-              <a:rPr lang="en-US" sz="1100" b="1" spc="200" kern="0" dirty="0">
+              <a:rPr lang="en-US" sz="1000" spc="150" kern="0" dirty="0">
+                <a:solidFill>
+                  <a:srgbClr val="B5B5B5"/>
+                </a:solidFill>
+                <a:latin typeface="Calibri" pitchFamily="34" charset="0"/>
+                <a:ea typeface="Calibri" pitchFamily="34" charset="-122"/>
+                <a:cs typeface="Calibri" pitchFamily="34" charset="-120"/>
+              </a:rPr>
+              <a:t>1  PROBLEM</a:t>
+            </a:r>
+            <a:pPr indent="0" marL="0">
+              <a:buNone/>
+            </a:pPr>
+            <a:r>
+              <a:rPr lang="en-US" sz="1000" spc="150" kern="0" dirty="0">
+                <a:solidFill>
+                  <a:srgbClr val="B5B5B5"/>
+                </a:solidFill>
+                <a:latin typeface="Calibri" pitchFamily="34" charset="0"/>
+                <a:ea typeface="Calibri" pitchFamily="34" charset="-122"/>
+                <a:cs typeface="Calibri" pitchFamily="34" charset="-120"/>
+              </a:rPr>
+              <a:t>      </a:t>
+            </a:r>
+            <a:pPr indent="0" marL="0">
+              <a:buNone/>
+            </a:pPr>
+            <a:r>
+              <a:rPr lang="en-US" sz="1000" spc="150" kern="0" dirty="0">
+                <a:solidFill>
+                  <a:srgbClr val="B5B5B5"/>
+                </a:solidFill>
+                <a:latin typeface="Calibri" pitchFamily="34" charset="0"/>
+                <a:ea typeface="Calibri" pitchFamily="34" charset="-122"/>
+                <a:cs typeface="Calibri" pitchFamily="34" charset="-120"/>
+              </a:rPr>
+              <a:t>2  EXTERNAL ENVIRONMENT</a:t>
+            </a:r>
+            <a:pPr indent="0" marL="0">
+              <a:buNone/>
+            </a:pPr>
+            <a:r>
+              <a:rPr lang="en-US" sz="1000" spc="150" kern="0" dirty="0">
+                <a:solidFill>
+                  <a:srgbClr val="B5B5B5"/>
+                </a:solidFill>
+                <a:latin typeface="Calibri" pitchFamily="34" charset="0"/>
+                <a:ea typeface="Calibri" pitchFamily="34" charset="-122"/>
+                <a:cs typeface="Calibri" pitchFamily="34" charset="-120"/>
+              </a:rPr>
+              <a:t>      </a:t>
+            </a:r>
+            <a:pPr indent="0" marL="0">
+              <a:buNone/>
+            </a:pPr>
+            <a:r>
+              <a:rPr lang="en-US" sz="1000" b="1" spc="150" kern="0" dirty="0">
                 <a:solidFill>
                   <a:srgbClr val="C8102E"/>
                 </a:solidFill>
@@ -5686,9 +5879,37 @@
                 <a:ea typeface="Calibri" pitchFamily="34" charset="-122"/>
                 <a:cs typeface="Calibri" pitchFamily="34" charset="-120"/>
               </a:rPr>
-              <a:t>TRANSFERABILITY TEST</a:t>
-            </a:r>
-            <a:endParaRPr lang="en-US" sz="1100" dirty="0"/>
+              <a:t>3  COST POSITION</a:t>
+            </a:r>
+            <a:pPr indent="0" marL="0">
+              <a:buNone/>
+            </a:pPr>
+            <a:r>
+              <a:rPr lang="en-US" sz="1000" spc="150" kern="0" dirty="0">
+                <a:solidFill>
+                  <a:srgbClr val="B5B5B5"/>
+                </a:solidFill>
+                <a:latin typeface="Calibri" pitchFamily="34" charset="0"/>
+                <a:ea typeface="Calibri" pitchFamily="34" charset="-122"/>
+                <a:cs typeface="Calibri" pitchFamily="34" charset="-120"/>
+              </a:rPr>
+              <a:t>      </a:t>
+            </a:r>
+            <a:pPr indent="0" marL="0">
+              <a:buNone/>
+            </a:pPr>
+            <a:r>
+              <a:rPr lang="en-US" sz="1000" spc="150" kern="0" dirty="0">
+                <a:solidFill>
+                  <a:srgbClr val="B5B5B5"/>
+                </a:solidFill>
+                <a:latin typeface="Calibri" pitchFamily="34" charset="0"/>
+                <a:ea typeface="Calibri" pitchFamily="34" charset="-122"/>
+                <a:cs typeface="Calibri" pitchFamily="34" charset="-120"/>
+              </a:rPr>
+              <a:t>4  CHOICE</a:t>
+            </a:r>
+            <a:endParaRPr lang="en-US" sz="1000" dirty="0"/>
           </a:p>
         </p:txBody>
       </p:sp>
@@ -5700,8 +5921,8 @@
         </p:nvSpPr>
         <p:spPr>
           <a:xfrm>
-            <a:off x="548640" y="566928"/>
-            <a:ext cx="11064240" cy="731520"/>
+            <a:off x="548640" y="621792"/>
+            <a:ext cx="11064240" cy="640080"/>
           </a:xfrm>
           <a:prstGeom prst="rect">
             <a:avLst/>
@@ -5717,7 +5938,7 @@
               <a:buNone/>
             </a:pPr>
             <a:r>
-              <a:rPr lang="en-US" sz="2600" b="1" dirty="0">
+              <a:rPr lang="en-US" sz="3000" b="1" dirty="0">
                 <a:solidFill>
                   <a:srgbClr val="1C1C1C"/>
                 </a:solidFill>
@@ -5725,9 +5946,9 @@
                 <a:ea typeface="Cambria" pitchFamily="34" charset="-122"/>
                 <a:cs typeface="Cambria" pitchFamily="34" charset="-120"/>
               </a:rPr>
-              <a:t>Some sources of cost advantage travel to long haul, others are lost on the way</a:t>
-            </a:r>
-            <a:endParaRPr lang="en-US" sz="2600" dirty="0"/>
+              <a:t>Transferability test</a:t>
+            </a:r>
+            <a:endParaRPr lang="en-US" sz="3000" dirty="0"/>
           </a:p>
         </p:txBody>
       </p:sp>
@@ -5746,7 +5967,7 @@
           </p:nvPr>
         </p:nvGraphicFramePr>
         <p:xfrm>
-          <a:off x="548640" y="1463040"/>
+          <a:off x="548640" y="1417320"/>
           <a:ext cx="11064240" cy="914400"/>
         </p:xfrm>
         <a:graphic>
@@ -5758,7 +5979,7 @@
                 <a:gridCol w="1554480"/>
                 <a:gridCol w="6583680"/>
               </a:tblGrid>
-              <a:tr h="384048">
+              <a:tr h="374904">
                 <a:tc>
                   <a:txBody>
                     <a:bodyPr/>
@@ -5964,7 +6185,7 @@
                   </a:tcPr>
                 </a:tc>
               </a:tr>
-              <a:tr h="384048">
+              <a:tr h="374904">
                 <a:tc>
                   <a:txBody>
                     <a:bodyPr/>
@@ -6170,7 +6391,7 @@
                   </a:tcPr>
                 </a:tc>
               </a:tr>
-              <a:tr h="384048">
+              <a:tr h="374904">
                 <a:tc>
                   <a:txBody>
                     <a:bodyPr/>
@@ -6376,7 +6597,7 @@
                   </a:tcPr>
                 </a:tc>
               </a:tr>
-              <a:tr h="384048">
+              <a:tr h="374904">
                 <a:tc>
                   <a:txBody>
                     <a:bodyPr/>
@@ -6582,7 +6803,7 @@
                   </a:tcPr>
                 </a:tc>
               </a:tr>
-              <a:tr h="384048">
+              <a:tr h="374904">
                 <a:tc>
                   <a:txBody>
                     <a:bodyPr/>
@@ -6788,7 +7009,7 @@
                   </a:tcPr>
                 </a:tc>
               </a:tr>
-              <a:tr h="384048">
+              <a:tr h="374904">
                 <a:tc>
                   <a:txBody>
                     <a:bodyPr/>
@@ -6994,7 +7215,7 @@
                   </a:tcPr>
                 </a:tc>
               </a:tr>
-              <a:tr h="384048">
+              <a:tr h="374904">
                 <a:tc>
                   <a:txBody>
                     <a:bodyPr/>
@@ -7200,7 +7421,7 @@
                   </a:tcPr>
                 </a:tc>
               </a:tr>
-              <a:tr h="384048">
+              <a:tr h="374904">
                 <a:tc>
                   <a:txBody>
                     <a:bodyPr/>
@@ -7406,7 +7627,7 @@
                   </a:tcPr>
                 </a:tc>
               </a:tr>
-              <a:tr h="384048">
+              <a:tr h="374904">
                 <a:tc>
                   <a:txBody>
                     <a:bodyPr/>
@@ -7612,7 +7833,7 @@
                   </a:tcPr>
                 </a:tc>
               </a:tr>
-              <a:tr h="384048">
+              <a:tr h="374904">
                 <a:tc>
                   <a:txBody>
                     <a:bodyPr/>
@@ -7766,7 +7987,7 @@
                           <a:ea typeface="Calibri" pitchFamily="34" charset="-122"/>
                           <a:cs typeface="Calibri" pitchFamily="34" charset="-120"/>
                         </a:rPr>
-                        <a:t>AirAsia X terpaksa menyediakan kursi premium, kursi bernomor, dan makanan pesan di muka.</a:t>
+                        <a:t>AirAsia X perlu menyediakan kursi premium, kursi bernomor, dan makanan pesan di muka.</a:t>
                       </a:r>
                       <a:endParaRPr lang="en-US" sz="1050" dirty="0">
                         <a:latin typeface="Calibri" charset="0"/>
@@ -7818,7 +8039,7 @@
                   </a:tcPr>
                 </a:tc>
               </a:tr>
-              <a:tr h="384048">
+              <a:tr h="374904">
                 <a:tc>
                   <a:txBody>
                     <a:bodyPr/>
@@ -8036,8 +8257,8 @@
         </p:nvSpPr>
         <p:spPr>
           <a:xfrm>
-            <a:off x="548640" y="5806440"/>
-            <a:ext cx="11064240" cy="502920"/>
+            <a:off x="548640" y="5577840"/>
+            <a:ext cx="11064240" cy="411480"/>
           </a:xfrm>
           <a:prstGeom prst="rect">
             <a:avLst/>
@@ -8053,7 +8274,7 @@
               <a:buNone/>
             </a:pPr>
             <a:r>
-              <a:rPr lang="en-US" sz="1050" dirty="0">
+              <a:rPr lang="en-US" sz="1000" dirty="0">
                 <a:solidFill>
                   <a:srgbClr val="6E6E6E"/>
                 </a:solidFill>
@@ -8061,9 +8282,9 @@
                 <a:ea typeface="Calibri" pitchFamily="34" charset="-122"/>
                 <a:cs typeface="Calibri" pitchFamily="34" charset="-120"/>
               </a:rPr>
-              <a:t>Penilaian disusun dari Tabel 9.2 dan 9.4 kasus. Yang terbawa adalah keunggulan yang bersifat organisasional (merek, sistem, SDM, budaya); yang hilang adalah keunggulan yang bersifat operasional khas rute pendek, dan itulah inti model LCC klasik.</a:t>
-            </a:r>
-            <a:endParaRPr lang="en-US" sz="1050" dirty="0"/>
+              <a:t>Sumber: Tabel 9.2 dan 9.4 kasus. Yang terbawa adalah keunggulan organisasional (merek, sistem, SDM, budaya); yang hilang adalah keunggulan operasional khas rute pendek, dan itulah inti model LCC klasik.</a:t>
+            </a:r>
+            <a:endParaRPr lang="en-US" sz="1000" dirty="0"/>
           </a:p>
         </p:txBody>
       </p:sp>
@@ -8075,6 +8296,59 @@
         </p:nvSpPr>
         <p:spPr>
           <a:xfrm>
+            <a:off x="548640" y="6016752"/>
+            <a:ext cx="11064240" cy="365760"/>
+          </a:xfrm>
+          <a:prstGeom prst="rect">
+            <a:avLst/>
+          </a:prstGeom>
+          <a:noFill/>
+          <a:ln/>
+        </p:spPr>
+        <p:txBody>
+          <a:bodyPr wrap="square" lIns="0" tIns="0" rIns="0" bIns="0" rtlCol="0" anchor="ctr"/>
+          <a:lstStyle/>
+          <a:p>
+            <a:pPr indent="0" marL="0">
+              <a:buNone/>
+            </a:pPr>
+            <a:r>
+              <a:rPr lang="en-US" sz="1050" b="1" dirty="0">
+                <a:solidFill>
+                  <a:srgbClr val="C8102E"/>
+                </a:solidFill>
+                <a:latin typeface="Calibri" pitchFamily="34" charset="0"/>
+                <a:ea typeface="Calibri" pitchFamily="34" charset="-122"/>
+                <a:cs typeface="Calibri" pitchFamily="34" charset="-120"/>
+              </a:rPr>
+              <a:t>Kaitan.  </a:t>
+            </a:r>
+            <a:pPr indent="0" marL="0">
+              <a:buNone/>
+            </a:pPr>
+            <a:r>
+              <a:rPr lang="en-US" sz="1050" i="1" dirty="0">
+                <a:solidFill>
+                  <a:srgbClr val="6E6E6E"/>
+                </a:solidFill>
+                <a:latin typeface="Calibri" pitchFamily="34" charset="0"/>
+                <a:ea typeface="Calibri" pitchFamily="34" charset="-122"/>
+                <a:cs typeface="Calibri" pitchFamily="34" charset="-120"/>
+              </a:rPr>
+              <a:t>Uji ini bersifat kualitatif. Slide berikutnya memeriksa apakah angka nyata di rute KL London mendukung kesimpulan yang sama.</a:t>
+            </a:r>
+            <a:endParaRPr lang="en-US" sz="1050" dirty="0"/>
+          </a:p>
+        </p:txBody>
+      </p:sp>
+      <p:sp>
+        <p:nvSpPr>
+          <p:cNvPr id="7" name="Text 4"/>
+          <p:cNvSpPr txBox="1"/>
+          <p:nvPr/>
+        </p:nvSpPr>
+        <p:spPr>
+          <a:xfrm>
             <a:off x="548640" y="6446520"/>
             <a:ext cx="7315200" cy="274320"/>
           </a:xfrm>
@@ -8108,7 +8382,7 @@
       </p:sp>
       <p:sp>
         <p:nvSpPr>
-          <p:cNvPr id="7" name="Text 4"/>
+          <p:cNvPr id="8" name="Text 5"/>
           <p:cNvSpPr txBox="1"/>
           <p:nvPr/>
         </p:nvSpPr>
@@ -8186,7 +8460,7 @@
         <p:spPr>
           <a:xfrm>
             <a:off x="548640" y="320040"/>
-            <a:ext cx="10972800" cy="274320"/>
+            <a:ext cx="11064240" cy="274320"/>
           </a:xfrm>
           <a:prstGeom prst="rect">
             <a:avLst/>
@@ -8202,7 +8476,63 @@
               <a:buNone/>
             </a:pPr>
             <a:r>
-              <a:rPr lang="en-US" sz="1100" b="1" spc="200" kern="0" dirty="0">
+              <a:rPr lang="en-US" sz="1000" spc="150" kern="0" dirty="0">
+                <a:solidFill>
+                  <a:srgbClr val="B5B5B5"/>
+                </a:solidFill>
+                <a:latin typeface="Calibri" pitchFamily="34" charset="0"/>
+                <a:ea typeface="Calibri" pitchFamily="34" charset="-122"/>
+                <a:cs typeface="Calibri" pitchFamily="34" charset="-120"/>
+              </a:rPr>
+              <a:t>1  PROBLEM</a:t>
+            </a:r>
+            <a:pPr indent="0" marL="0">
+              <a:buNone/>
+            </a:pPr>
+            <a:r>
+              <a:rPr lang="en-US" sz="1000" spc="150" kern="0" dirty="0">
+                <a:solidFill>
+                  <a:srgbClr val="B5B5B5"/>
+                </a:solidFill>
+                <a:latin typeface="Calibri" pitchFamily="34" charset="0"/>
+                <a:ea typeface="Calibri" pitchFamily="34" charset="-122"/>
+                <a:cs typeface="Calibri" pitchFamily="34" charset="-120"/>
+              </a:rPr>
+              <a:t>      </a:t>
+            </a:r>
+            <a:pPr indent="0" marL="0">
+              <a:buNone/>
+            </a:pPr>
+            <a:r>
+              <a:rPr lang="en-US" sz="1000" spc="150" kern="0" dirty="0">
+                <a:solidFill>
+                  <a:srgbClr val="B5B5B5"/>
+                </a:solidFill>
+                <a:latin typeface="Calibri" pitchFamily="34" charset="0"/>
+                <a:ea typeface="Calibri" pitchFamily="34" charset="-122"/>
+                <a:cs typeface="Calibri" pitchFamily="34" charset="-120"/>
+              </a:rPr>
+              <a:t>2  EXTERNAL ENVIRONMENT</a:t>
+            </a:r>
+            <a:pPr indent="0" marL="0">
+              <a:buNone/>
+            </a:pPr>
+            <a:r>
+              <a:rPr lang="en-US" sz="1000" spc="150" kern="0" dirty="0">
+                <a:solidFill>
+                  <a:srgbClr val="B5B5B5"/>
+                </a:solidFill>
+                <a:latin typeface="Calibri" pitchFamily="34" charset="0"/>
+                <a:ea typeface="Calibri" pitchFamily="34" charset="-122"/>
+                <a:cs typeface="Calibri" pitchFamily="34" charset="-120"/>
+              </a:rPr>
+              <a:t>      </a:t>
+            </a:r>
+            <a:pPr indent="0" marL="0">
+              <a:buNone/>
+            </a:pPr>
+            <a:r>
+              <a:rPr lang="en-US" sz="1000" b="1" spc="150" kern="0" dirty="0">
                 <a:solidFill>
                   <a:srgbClr val="C8102E"/>
                 </a:solidFill>
@@ -8210,9 +8540,37 @@
                 <a:ea typeface="Calibri" pitchFamily="34" charset="-122"/>
                 <a:cs typeface="Calibri" pitchFamily="34" charset="-120"/>
               </a:rPr>
-              <a:t>EARLY EVIDENCE ON THE KL TO LONDON ROUTE</a:t>
-            </a:r>
-            <a:endParaRPr lang="en-US" sz="1100" dirty="0"/>
+              <a:t>3  COST POSITION</a:t>
+            </a:r>
+            <a:pPr indent="0" marL="0">
+              <a:buNone/>
+            </a:pPr>
+            <a:r>
+              <a:rPr lang="en-US" sz="1000" spc="150" kern="0" dirty="0">
+                <a:solidFill>
+                  <a:srgbClr val="B5B5B5"/>
+                </a:solidFill>
+                <a:latin typeface="Calibri" pitchFamily="34" charset="0"/>
+                <a:ea typeface="Calibri" pitchFamily="34" charset="-122"/>
+                <a:cs typeface="Calibri" pitchFamily="34" charset="-120"/>
+              </a:rPr>
+              <a:t>      </a:t>
+            </a:r>
+            <a:pPr indent="0" marL="0">
+              <a:buNone/>
+            </a:pPr>
+            <a:r>
+              <a:rPr lang="en-US" sz="1000" spc="150" kern="0" dirty="0">
+                <a:solidFill>
+                  <a:srgbClr val="B5B5B5"/>
+                </a:solidFill>
+                <a:latin typeface="Calibri" pitchFamily="34" charset="0"/>
+                <a:ea typeface="Calibri" pitchFamily="34" charset="-122"/>
+                <a:cs typeface="Calibri" pitchFamily="34" charset="-120"/>
+              </a:rPr>
+              <a:t>4  CHOICE</a:t>
+            </a:r>
+            <a:endParaRPr lang="en-US" sz="1000" dirty="0"/>
           </a:p>
         </p:txBody>
       </p:sp>
@@ -8224,8 +8582,8 @@
         </p:nvSpPr>
         <p:spPr>
           <a:xfrm>
-            <a:off x="548640" y="566928"/>
-            <a:ext cx="11064240" cy="731520"/>
+            <a:off x="548640" y="621792"/>
+            <a:ext cx="11064240" cy="640080"/>
           </a:xfrm>
           <a:prstGeom prst="rect">
             <a:avLst/>
@@ -8241,7 +8599,7 @@
               <a:buNone/>
             </a:pPr>
             <a:r>
-              <a:rPr lang="en-US" sz="2600" b="1" dirty="0">
+              <a:rPr lang="en-US" sz="3000" b="1" dirty="0">
                 <a:solidFill>
                   <a:srgbClr val="1C1C1C"/>
                 </a:solidFill>
@@ -8249,9 +8607,9 @@
                 <a:ea typeface="Cambria" pitchFamily="34" charset="-122"/>
                 <a:cs typeface="Cambria" pitchFamily="34" charset="-120"/>
               </a:rPr>
-              <a:t>AirAsia X's cost per passenger is about a third lower, and it shows in the fare</a:t>
-            </a:r>
-            <a:endParaRPr lang="en-US" sz="2600" dirty="0"/>
+              <a:t>Evidence from the KL to London route</a:t>
+            </a:r>
+            <a:endParaRPr lang="en-US" sz="3000" dirty="0"/>
           </a:p>
         </p:txBody>
       </p:sp>
@@ -8262,8 +8620,8 @@
           <p:nvPr/>
         </p:nvGraphicFramePr>
         <p:xfrm>
-          <a:off x="548640" y="1463040"/>
-          <a:ext cx="5943600" cy="3291840"/>
+          <a:off x="548640" y="1417320"/>
+          <a:ext cx="5943600" cy="3200400"/>
         </p:xfrm>
         <a:graphic xmlns:a="http://schemas.openxmlformats.org/drawingml/2006/main">
           <a:graphicData uri="http://schemas.openxmlformats.org/drawingml/2006/chart">
@@ -8279,7 +8637,7 @@
         </p:nvSpPr>
         <p:spPr>
           <a:xfrm>
-            <a:off x="548640" y="4754880"/>
+            <a:off x="548640" y="4617720"/>
             <a:ext cx="5943600" cy="365760"/>
           </a:xfrm>
           <a:prstGeom prst="rect">
@@ -8317,8 +8675,8 @@
           <p:nvPr/>
         </p:nvGraphicFramePr>
         <p:xfrm>
-          <a:off x="6675120" y="1463040"/>
-          <a:ext cx="4937760" cy="2468880"/>
+          <a:off x="6675120" y="1417320"/>
+          <a:ext cx="4937760" cy="2423160"/>
         </p:xfrm>
         <a:graphic xmlns:a="http://schemas.openxmlformats.org/drawingml/2006/main">
           <a:graphicData uri="http://schemas.openxmlformats.org/drawingml/2006/chart">
@@ -8334,12 +8692,12 @@
         </p:nvSpPr>
         <p:spPr>
           <a:xfrm>
-            <a:off x="6675120" y="4069080"/>
-            <a:ext cx="2423160" cy="1463040"/>
+            <a:off x="6675120" y="3931920"/>
+            <a:ext cx="2423160" cy="1051560"/>
           </a:xfrm>
           <a:prstGeom prst="roundRect">
             <a:avLst>
-              <a:gd name="adj" fmla="val 5000"/>
+              <a:gd name="adj" fmla="val 6957"/>
             </a:avLst>
           </a:prstGeom>
           <a:solidFill>
@@ -8361,8 +8719,8 @@
         </p:nvSpPr>
         <p:spPr>
           <a:xfrm>
-            <a:off x="6812280" y="4133088"/>
-            <a:ext cx="2194560" cy="457200"/>
+            <a:off x="6812280" y="3959352"/>
+            <a:ext cx="2194560" cy="384048"/>
           </a:xfrm>
           <a:prstGeom prst="rect">
             <a:avLst/>
@@ -8378,7 +8736,7 @@
               <a:buNone/>
             </a:pPr>
             <a:r>
-              <a:rPr lang="en-US" sz="2000" b="1" dirty="0">
+              <a:rPr lang="en-US" sz="1800" b="1" dirty="0">
                 <a:solidFill>
                   <a:srgbClr val="C8102E"/>
                 </a:solidFill>
@@ -8388,7 +8746,7 @@
               </a:rPr>
               <a:t>36,5%</a:t>
             </a:r>
-            <a:endParaRPr lang="en-US" sz="2000" dirty="0"/>
+            <a:endParaRPr lang="en-US" sz="1800" dirty="0"/>
           </a:p>
         </p:txBody>
       </p:sp>
@@ -8400,8 +8758,8 @@
         </p:nvSpPr>
         <p:spPr>
           <a:xfrm>
-            <a:off x="6812280" y="4590288"/>
-            <a:ext cx="2194560" cy="914400"/>
+            <a:off x="6812280" y="4343400"/>
+            <a:ext cx="2194560" cy="621792"/>
           </a:xfrm>
           <a:prstGeom prst="rect">
             <a:avLst/>
@@ -8417,7 +8775,7 @@
               <a:buNone/>
             </a:pPr>
             <a:r>
-              <a:rPr lang="en-US" sz="950" dirty="0">
+              <a:rPr lang="en-US" sz="900" dirty="0">
                 <a:solidFill>
                   <a:srgbClr val="1C1C1C"/>
                 </a:solidFill>
@@ -8427,7 +8785,7 @@
               </a:rPr>
               <a:t>lebih murah: tarif pulang pergi KL London US$433,96 vs rata-rata tarif terendah pesaing US$683,68 (Tabel 9.3)</a:t>
             </a:r>
-            <a:endParaRPr lang="en-US" sz="950" dirty="0"/>
+            <a:endParaRPr lang="en-US" sz="900" dirty="0"/>
           </a:p>
         </p:txBody>
       </p:sp>
@@ -8439,12 +8797,12 @@
         </p:nvSpPr>
         <p:spPr>
           <a:xfrm>
-            <a:off x="9189720" y="4069080"/>
-            <a:ext cx="2423160" cy="1463040"/>
+            <a:off x="9189720" y="3931920"/>
+            <a:ext cx="2423160" cy="1051560"/>
           </a:xfrm>
           <a:prstGeom prst="roundRect">
             <a:avLst>
-              <a:gd name="adj" fmla="val 5000"/>
+              <a:gd name="adj" fmla="val 6957"/>
             </a:avLst>
           </a:prstGeom>
           <a:solidFill>
@@ -8466,8 +8824,8 @@
         </p:nvSpPr>
         <p:spPr>
           <a:xfrm>
-            <a:off x="9326880" y="4133088"/>
-            <a:ext cx="2194560" cy="457200"/>
+            <a:off x="9326880" y="3959352"/>
+            <a:ext cx="2194560" cy="384048"/>
           </a:xfrm>
           <a:prstGeom prst="rect">
             <a:avLst/>
@@ -8483,7 +8841,7 @@
               <a:buNone/>
             </a:pPr>
             <a:r>
-              <a:rPr lang="en-US" sz="2000" b="1" dirty="0">
+              <a:rPr lang="en-US" sz="1800" b="1" dirty="0">
                 <a:solidFill>
                   <a:srgbClr val="C8102E"/>
                 </a:solidFill>
@@ -8493,7 +8851,7 @@
               </a:rPr>
               <a:t>Lebih dari 90%</a:t>
             </a:r>
-            <a:endParaRPr lang="en-US" sz="2000" dirty="0"/>
+            <a:endParaRPr lang="en-US" sz="1800" dirty="0"/>
           </a:p>
         </p:txBody>
       </p:sp>
@@ -8505,8 +8863,8 @@
         </p:nvSpPr>
         <p:spPr>
           <a:xfrm>
-            <a:off x="9326880" y="4590288"/>
-            <a:ext cx="2194560" cy="914400"/>
+            <a:off x="9326880" y="4343400"/>
+            <a:ext cx="2194560" cy="621792"/>
           </a:xfrm>
           <a:prstGeom prst="rect">
             <a:avLst/>
@@ -8522,7 +8880,7 @@
               <a:buNone/>
             </a:pPr>
             <a:r>
-              <a:rPr lang="en-US" sz="950" dirty="0">
+              <a:rPr lang="en-US" sz="900" dirty="0">
                 <a:solidFill>
                   <a:srgbClr val="1C1C1C"/>
                 </a:solidFill>
@@ -8530,9 +8888,9 @@
                 <a:ea typeface="Calibri" pitchFamily="34" charset="-122"/>
                 <a:cs typeface="Calibri" pitchFamily="34" charset="-120"/>
               </a:rPr>
-              <a:t>load factor yang dilaporkan AirAsia X di rute KL London, jauh di atas rata-rata industri</a:t>
-            </a:r>
-            <a:endParaRPr lang="en-US" sz="950" dirty="0"/>
+              <a:t>load factor yang dilaporkan AirAsia X di rute KL London, di atas rata-rata industri</a:t>
+            </a:r>
+            <a:endParaRPr lang="en-US" sz="900" dirty="0"/>
           </a:p>
         </p:txBody>
       </p:sp>
@@ -8544,12 +8902,12 @@
         </p:nvSpPr>
         <p:spPr>
           <a:xfrm>
-            <a:off x="548640" y="5212080"/>
-            <a:ext cx="11064240" cy="1051560"/>
+            <a:off x="548640" y="5074920"/>
+            <a:ext cx="11064240" cy="868680"/>
           </a:xfrm>
           <a:prstGeom prst="roundRect">
             <a:avLst>
-              <a:gd name="adj" fmla="val 6957"/>
+              <a:gd name="adj" fmla="val 8421"/>
             </a:avLst>
           </a:prstGeom>
           <a:solidFill>
@@ -8571,8 +8929,8 @@
         </p:nvSpPr>
         <p:spPr>
           <a:xfrm>
-            <a:off x="777240" y="5266944"/>
-            <a:ext cx="10607040" cy="941832"/>
+            <a:off x="777240" y="5129784"/>
+            <a:ext cx="10607040" cy="758952"/>
           </a:xfrm>
           <a:prstGeom prst="rect">
             <a:avLst/>
@@ -8588,7 +8946,7 @@
               <a:buNone/>
             </a:pPr>
             <a:r>
-              <a:rPr lang="en-US" sz="1150" b="1" dirty="0">
+              <a:rPr lang="en-US" sz="1050" b="1" dirty="0">
                 <a:solidFill>
                   <a:srgbClr val="C8102E"/>
                 </a:solidFill>
@@ -8602,7 +8960,7 @@
               <a:buNone/>
             </a:pPr>
             <a:r>
-              <a:rPr lang="en-US" sz="1150" dirty="0">
+              <a:rPr lang="en-US" sz="1050" dirty="0">
                 <a:solidFill>
                   <a:srgbClr val="1C1C1C"/>
                 </a:solidFill>
@@ -8610,9 +8968,9 @@
                 <a:ea typeface="Calibri" pitchFamily="34" charset="-122"/>
                 <a:cs typeface="Calibri" pitchFamily="34" charset="-120"/>
               </a:rPr>
-              <a:t>Selisih biaya terlihat besar, tetapi tabel mengecualikan pos yang justru membengkak di rute jauh: gaji kru yang bermalam, perawatan pesawat berbadan lebar, dan katering. AirAsia X juga hanya membawa 286 penumpang per penerbangan dibanding 337 sampai 360 pada pesaing. Keunggulan biaya per penumpang bersifat nyata, namun lebih tipis daripada yang tampak.</a:t>
-            </a:r>
-            <a:endParaRPr lang="en-US" sz="1150" dirty="0"/>
+              <a:t>Selisih biaya terlihat besar, tetapi tabel mengecualikan pos yang justru membesar di rute jauh: gaji kru yang bermalam, perawatan pesawat berbadan lebar, dan katering. AirAsia X juga hanya membawa 286 penumpang per penerbangan dibanding 337 sampai 360 pada pesaing. Keunggulan biaya per penumpang nyata, namun lebih tipis daripada yang tampak.</a:t>
+            </a:r>
+            <a:endParaRPr lang="en-US" sz="1050" dirty="0"/>
           </a:p>
         </p:txBody>
       </p:sp>
@@ -8624,6 +8982,59 @@
         </p:nvSpPr>
         <p:spPr>
           <a:xfrm>
+            <a:off x="548640" y="6016752"/>
+            <a:ext cx="11064240" cy="365760"/>
+          </a:xfrm>
+          <a:prstGeom prst="rect">
+            <a:avLst/>
+          </a:prstGeom>
+          <a:noFill/>
+          <a:ln/>
+        </p:spPr>
+        <p:txBody>
+          <a:bodyPr wrap="square" lIns="0" tIns="0" rIns="0" bIns="0" rtlCol="0" anchor="ctr"/>
+          <a:lstStyle/>
+          <a:p>
+            <a:pPr indent="0" marL="0">
+              <a:buNone/>
+            </a:pPr>
+            <a:r>
+              <a:rPr lang="en-US" sz="1050" b="1" dirty="0">
+                <a:solidFill>
+                  <a:srgbClr val="C8102E"/>
+                </a:solidFill>
+                <a:latin typeface="Calibri" pitchFamily="34" charset="0"/>
+                <a:ea typeface="Calibri" pitchFamily="34" charset="-122"/>
+                <a:cs typeface="Calibri" pitchFamily="34" charset="-120"/>
+              </a:rPr>
+              <a:t>Kaitan.  </a:t>
+            </a:r>
+            <a:pPr indent="0" marL="0">
+              <a:buNone/>
+            </a:pPr>
+            <a:r>
+              <a:rPr lang="en-US" sz="1050" i="1" dirty="0">
+                <a:solidFill>
+                  <a:srgbClr val="6E6E6E"/>
+                </a:solidFill>
+                <a:latin typeface="Calibri" pitchFamily="34" charset="0"/>
+                <a:ea typeface="Calibri" pitchFamily="34" charset="-122"/>
+                <a:cs typeface="Calibri" pitchFamily="34" charset="-120"/>
+              </a:rPr>
+              <a:t>Tahap ketiga selesai: keunggulan biaya sebagian terbawa, dan buktinya positif tetapi tipis. Tahap keempat merumuskan isu yang harus dijawab sebelum memilih.</a:t>
+            </a:r>
+            <a:endParaRPr lang="en-US" sz="1050" dirty="0"/>
+          </a:p>
+        </p:txBody>
+      </p:sp>
+      <p:sp>
+        <p:nvSpPr>
+          <p:cNvPr id="16" name="Text 12"/>
+          <p:cNvSpPr txBox="1"/>
+          <p:nvPr/>
+        </p:nvSpPr>
+        <p:spPr>
+          <a:xfrm>
             <a:off x="548640" y="6446520"/>
             <a:ext cx="7315200" cy="274320"/>
           </a:xfrm>
@@ -8657,7 +9068,7 @@
       </p:sp>
       <p:sp>
         <p:nvSpPr>
-          <p:cNvPr id="16" name="Text 12"/>
+          <p:cNvPr id="17" name="Text 13"/>
           <p:cNvSpPr txBox="1"/>
           <p:nvPr/>
         </p:nvSpPr>
@@ -8735,7 +9146,7 @@
         <p:spPr>
           <a:xfrm>
             <a:off x="548640" y="320040"/>
-            <a:ext cx="10972800" cy="274320"/>
+            <a:ext cx="11064240" cy="274320"/>
           </a:xfrm>
           <a:prstGeom prst="rect">
             <a:avLst/>
@@ -8751,7 +9162,91 @@
               <a:buNone/>
             </a:pPr>
             <a:r>
-              <a:rPr lang="en-US" sz="1100" b="1" spc="200" kern="0" dirty="0">
+              <a:rPr lang="en-US" sz="1000" spc="150" kern="0" dirty="0">
+                <a:solidFill>
+                  <a:srgbClr val="B5B5B5"/>
+                </a:solidFill>
+                <a:latin typeface="Calibri" pitchFamily="34" charset="0"/>
+                <a:ea typeface="Calibri" pitchFamily="34" charset="-122"/>
+                <a:cs typeface="Calibri" pitchFamily="34" charset="-120"/>
+              </a:rPr>
+              <a:t>1  PROBLEM</a:t>
+            </a:r>
+            <a:pPr indent="0" marL="0">
+              <a:buNone/>
+            </a:pPr>
+            <a:r>
+              <a:rPr lang="en-US" sz="1000" spc="150" kern="0" dirty="0">
+                <a:solidFill>
+                  <a:srgbClr val="B5B5B5"/>
+                </a:solidFill>
+                <a:latin typeface="Calibri" pitchFamily="34" charset="0"/>
+                <a:ea typeface="Calibri" pitchFamily="34" charset="-122"/>
+                <a:cs typeface="Calibri" pitchFamily="34" charset="-120"/>
+              </a:rPr>
+              <a:t>      </a:t>
+            </a:r>
+            <a:pPr indent="0" marL="0">
+              <a:buNone/>
+            </a:pPr>
+            <a:r>
+              <a:rPr lang="en-US" sz="1000" spc="150" kern="0" dirty="0">
+                <a:solidFill>
+                  <a:srgbClr val="B5B5B5"/>
+                </a:solidFill>
+                <a:latin typeface="Calibri" pitchFamily="34" charset="0"/>
+                <a:ea typeface="Calibri" pitchFamily="34" charset="-122"/>
+                <a:cs typeface="Calibri" pitchFamily="34" charset="-120"/>
+              </a:rPr>
+              <a:t>2  EXTERNAL ENVIRONMENT</a:t>
+            </a:r>
+            <a:pPr indent="0" marL="0">
+              <a:buNone/>
+            </a:pPr>
+            <a:r>
+              <a:rPr lang="en-US" sz="1000" spc="150" kern="0" dirty="0">
+                <a:solidFill>
+                  <a:srgbClr val="B5B5B5"/>
+                </a:solidFill>
+                <a:latin typeface="Calibri" pitchFamily="34" charset="0"/>
+                <a:ea typeface="Calibri" pitchFamily="34" charset="-122"/>
+                <a:cs typeface="Calibri" pitchFamily="34" charset="-120"/>
+              </a:rPr>
+              <a:t>      </a:t>
+            </a:r>
+            <a:pPr indent="0" marL="0">
+              <a:buNone/>
+            </a:pPr>
+            <a:r>
+              <a:rPr lang="en-US" sz="1000" spc="150" kern="0" dirty="0">
+                <a:solidFill>
+                  <a:srgbClr val="B5B5B5"/>
+                </a:solidFill>
+                <a:latin typeface="Calibri" pitchFamily="34" charset="0"/>
+                <a:ea typeface="Calibri" pitchFamily="34" charset="-122"/>
+                <a:cs typeface="Calibri" pitchFamily="34" charset="-120"/>
+              </a:rPr>
+              <a:t>3  COST POSITION</a:t>
+            </a:r>
+            <a:pPr indent="0" marL="0">
+              <a:buNone/>
+            </a:pPr>
+            <a:r>
+              <a:rPr lang="en-US" sz="1000" spc="150" kern="0" dirty="0">
+                <a:solidFill>
+                  <a:srgbClr val="B5B5B5"/>
+                </a:solidFill>
+                <a:latin typeface="Calibri" pitchFamily="34" charset="0"/>
+                <a:ea typeface="Calibri" pitchFamily="34" charset="-122"/>
+                <a:cs typeface="Calibri" pitchFamily="34" charset="-120"/>
+              </a:rPr>
+              <a:t>      </a:t>
+            </a:r>
+            <a:pPr indent="0" marL="0">
+              <a:buNone/>
+            </a:pPr>
+            <a:r>
+              <a:rPr lang="en-US" sz="1000" b="1" spc="150" kern="0" dirty="0">
                 <a:solidFill>
                   <a:srgbClr val="C8102E"/>
                 </a:solidFill>
@@ -8759,9 +9254,9 @@
                 <a:ea typeface="Calibri" pitchFamily="34" charset="-122"/>
                 <a:cs typeface="Calibri" pitchFamily="34" charset="-120"/>
               </a:rPr>
-              <a:t>KEY ISSUES</a:t>
-            </a:r>
-            <a:endParaRPr lang="en-US" sz="1100" dirty="0"/>
+              <a:t>4  CHOICE</a:t>
+            </a:r>
+            <a:endParaRPr lang="en-US" sz="1000" dirty="0"/>
           </a:p>
         </p:txBody>
       </p:sp>
@@ -8773,8 +9268,8 @@
         </p:nvSpPr>
         <p:spPr>
           <a:xfrm>
-            <a:off x="548640" y="566928"/>
-            <a:ext cx="11064240" cy="731520"/>
+            <a:off x="548640" y="621792"/>
+            <a:ext cx="11064240" cy="640080"/>
           </a:xfrm>
           <a:prstGeom prst="rect">
             <a:avLst/>
@@ -8790,7 +9285,7 @@
               <a:buNone/>
             </a:pPr>
             <a:r>
-              <a:rPr lang="en-US" sz="2600" b="1" dirty="0">
+              <a:rPr lang="en-US" sz="3000" b="1" dirty="0">
                 <a:solidFill>
                   <a:srgbClr val="1C1C1C"/>
                 </a:solidFill>
@@ -8798,9 +9293,9 @@
                 <a:ea typeface="Cambria" pitchFamily="34" charset="-122"/>
                 <a:cs typeface="Cambria" pitchFamily="34" charset="-120"/>
               </a:rPr>
-              <a:t>Five questions that decide the choice among alternatives</a:t>
-            </a:r>
-            <a:endParaRPr lang="en-US" sz="2600" dirty="0"/>
+              <a:t>Key issues</a:t>
+            </a:r>
+            <a:endParaRPr lang="en-US" sz="3000" dirty="0"/>
           </a:p>
         </p:txBody>
       </p:sp>
@@ -8812,12 +9307,12 @@
         </p:nvSpPr>
         <p:spPr>
           <a:xfrm>
-            <a:off x="548640" y="1463040"/>
-            <a:ext cx="5440680" cy="1463040"/>
+            <a:off x="548640" y="1417320"/>
+            <a:ext cx="5440680" cy="1389888"/>
           </a:xfrm>
           <a:prstGeom prst="roundRect">
             <a:avLst>
-              <a:gd name="adj" fmla="val 5000"/>
+              <a:gd name="adj" fmla="val 5263"/>
             </a:avLst>
           </a:prstGeom>
           <a:solidFill>
@@ -8839,7 +9334,7 @@
         </p:nvSpPr>
         <p:spPr>
           <a:xfrm>
-            <a:off x="713232" y="1627632"/>
+            <a:off x="713232" y="1563624"/>
             <a:ext cx="384048" cy="384048"/>
           </a:xfrm>
           <a:prstGeom prst="ellipse">
@@ -8864,7 +9359,7 @@
         </p:nvSpPr>
         <p:spPr>
           <a:xfrm>
-            <a:off x="713232" y="1627632"/>
+            <a:off x="713232" y="1563624"/>
             <a:ext cx="384048" cy="384048"/>
           </a:xfrm>
           <a:prstGeom prst="rect">
@@ -8903,8 +9398,8 @@
         </p:nvSpPr>
         <p:spPr>
           <a:xfrm>
-            <a:off x="1207008" y="1554480"/>
-            <a:ext cx="4617720" cy="1280160"/>
+            <a:off x="1207008" y="1490472"/>
+            <a:ext cx="4617720" cy="1243584"/>
           </a:xfrm>
           <a:prstGeom prst="rect">
             <a:avLst/>
@@ -8959,12 +9454,12 @@
         </p:nvSpPr>
         <p:spPr>
           <a:xfrm>
-            <a:off x="548640" y="3063240"/>
-            <a:ext cx="5440680" cy="1463040"/>
+            <a:off x="548640" y="2926080"/>
+            <a:ext cx="5440680" cy="1389888"/>
           </a:xfrm>
           <a:prstGeom prst="roundRect">
             <a:avLst>
-              <a:gd name="adj" fmla="val 5000"/>
+              <a:gd name="adj" fmla="val 5263"/>
             </a:avLst>
           </a:prstGeom>
           <a:solidFill>
@@ -8986,7 +9481,7 @@
         </p:nvSpPr>
         <p:spPr>
           <a:xfrm>
-            <a:off x="713232" y="3227832"/>
+            <a:off x="713232" y="3072384"/>
             <a:ext cx="384048" cy="384048"/>
           </a:xfrm>
           <a:prstGeom prst="ellipse">
@@ -9011,7 +9506,7 @@
         </p:nvSpPr>
         <p:spPr>
           <a:xfrm>
-            <a:off x="713232" y="3227832"/>
+            <a:off x="713232" y="3072384"/>
             <a:ext cx="384048" cy="384048"/>
           </a:xfrm>
           <a:prstGeom prst="rect">
@@ -9050,8 +9545,8 @@
         </p:nvSpPr>
         <p:spPr>
           <a:xfrm>
-            <a:off x="1207008" y="3154680"/>
-            <a:ext cx="4617720" cy="1280160"/>
+            <a:off x="1207008" y="2999232"/>
+            <a:ext cx="4617720" cy="1243584"/>
           </a:xfrm>
           <a:prstGeom prst="rect">
             <a:avLst/>
@@ -9106,12 +9601,12 @@
         </p:nvSpPr>
         <p:spPr>
           <a:xfrm>
-            <a:off x="548640" y="4663440"/>
-            <a:ext cx="5440680" cy="1463040"/>
+            <a:off x="548640" y="4434840"/>
+            <a:ext cx="5440680" cy="1389888"/>
           </a:xfrm>
           <a:prstGeom prst="roundRect">
             <a:avLst>
-              <a:gd name="adj" fmla="val 5000"/>
+              <a:gd name="adj" fmla="val 5263"/>
             </a:avLst>
           </a:prstGeom>
           <a:solidFill>
@@ -9133,7 +9628,7 @@
         </p:nvSpPr>
         <p:spPr>
           <a:xfrm>
-            <a:off x="713232" y="4828032"/>
+            <a:off x="713232" y="4581144"/>
             <a:ext cx="384048" cy="384048"/>
           </a:xfrm>
           <a:prstGeom prst="ellipse">
@@ -9158,7 +9653,7 @@
         </p:nvSpPr>
         <p:spPr>
           <a:xfrm>
-            <a:off x="713232" y="4828032"/>
+            <a:off x="713232" y="4581144"/>
             <a:ext cx="384048" cy="384048"/>
           </a:xfrm>
           <a:prstGeom prst="rect">
@@ -9197,8 +9692,8 @@
         </p:nvSpPr>
         <p:spPr>
           <a:xfrm>
-            <a:off x="1207008" y="4754880"/>
-            <a:ext cx="4617720" cy="1280160"/>
+            <a:off x="1207008" y="4507992"/>
+            <a:ext cx="4617720" cy="1243584"/>
           </a:xfrm>
           <a:prstGeom prst="rect">
             <a:avLst/>
@@ -9253,12 +9748,12 @@
         </p:nvSpPr>
         <p:spPr>
           <a:xfrm>
-            <a:off x="6217920" y="1463040"/>
-            <a:ext cx="5440680" cy="1463040"/>
+            <a:off x="6217920" y="1417320"/>
+            <a:ext cx="5440680" cy="1389888"/>
           </a:xfrm>
           <a:prstGeom prst="roundRect">
             <a:avLst>
-              <a:gd name="adj" fmla="val 5000"/>
+              <a:gd name="adj" fmla="val 5263"/>
             </a:avLst>
           </a:prstGeom>
           <a:solidFill>
@@ -9280,7 +9775,7 @@
         </p:nvSpPr>
         <p:spPr>
           <a:xfrm>
-            <a:off x="6382512" y="1627632"/>
+            <a:off x="6382512" y="1563624"/>
             <a:ext cx="384048" cy="384048"/>
           </a:xfrm>
           <a:prstGeom prst="ellipse">
@@ -9305,7 +9800,7 @@
         </p:nvSpPr>
         <p:spPr>
           <a:xfrm>
-            <a:off x="6382512" y="1627632"/>
+            <a:off x="6382512" y="1563624"/>
             <a:ext cx="384048" cy="384048"/>
           </a:xfrm>
           <a:prstGeom prst="rect">
@@ -9344,8 +9839,8 @@
         </p:nvSpPr>
         <p:spPr>
           <a:xfrm>
-            <a:off x="6876288" y="1554480"/>
-            <a:ext cx="4617720" cy="1280160"/>
+            <a:off x="6876288" y="1490472"/>
+            <a:ext cx="4617720" cy="1243584"/>
           </a:xfrm>
           <a:prstGeom prst="rect">
             <a:avLst/>
@@ -9369,7 +9864,7 @@
                 <a:ea typeface="Calibri" pitchFamily="34" charset="-122"/>
                 <a:cs typeface="Calibri" pitchFamily="34" charset="-120"/>
               </a:rPr>
-              <a:t>Dapatkah eksploitasi dan eksplorasi hidup dalam satu organisasi tanpa saling mengganggu?</a:t>
+              <a:t>Dapatkah eksploitasi dan eksplorasi berjalan dalam satu organisasi tanpa saling mengganggu?</a:t>
             </a:r>
             <a:endParaRPr lang="en-US" sz="1150" dirty="0"/>
           </a:p>
@@ -9386,7 +9881,7 @@
                 <a:ea typeface="Calibri" pitchFamily="34" charset="-122"/>
                 <a:cs typeface="Calibri" pitchFamily="34" charset="-120"/>
               </a:rPr>
-              <a:t>Dua armada, dua pola kru, dua tingkat layanan. Literatur ambidexterity (O'Reilly dan Tushman) menyebut dua jalan: dipisahkan secara struktural atau dipadukan dalam satu konteks. Berbagi merek, IT, dan administrasi memberi efisiensi yang tidak dimiliki start-up mandiri, tetapi juga membawa kompleksitas.</a:t>
+              <a:t>Dua armada, dua pola kru, dua tingkat layanan. Literatur ambidexterity (O'Reilly dan Tushman) menyebut dua jalan: dipisahkan secara struktural atau dipadukan dalam satu konteks. Berbagi merek, IT, dan administrasi memberi efisiensi, tetapi juga membawa kompleksitas.</a:t>
             </a:r>
             <a:endParaRPr lang="en-US" sz="1150" dirty="0"/>
           </a:p>
@@ -9400,12 +9895,12 @@
         </p:nvSpPr>
         <p:spPr>
           <a:xfrm>
-            <a:off x="6217920" y="3063240"/>
-            <a:ext cx="5440680" cy="1463040"/>
+            <a:off x="6217920" y="2926080"/>
+            <a:ext cx="5440680" cy="1389888"/>
           </a:xfrm>
           <a:prstGeom prst="roundRect">
             <a:avLst>
-              <a:gd name="adj" fmla="val 5000"/>
+              <a:gd name="adj" fmla="val 5263"/>
             </a:avLst>
           </a:prstGeom>
           <a:solidFill>
@@ -9427,7 +9922,7 @@
         </p:nvSpPr>
         <p:spPr>
           <a:xfrm>
-            <a:off x="6382512" y="3227832"/>
+            <a:off x="6382512" y="3072384"/>
             <a:ext cx="384048" cy="384048"/>
           </a:xfrm>
           <a:prstGeom prst="ellipse">
@@ -9452,7 +9947,7 @@
         </p:nvSpPr>
         <p:spPr>
           <a:xfrm>
-            <a:off x="6382512" y="3227832"/>
+            <a:off x="6382512" y="3072384"/>
             <a:ext cx="384048" cy="384048"/>
           </a:xfrm>
           <a:prstGeom prst="rect">
@@ -9491,8 +9986,8 @@
         </p:nvSpPr>
         <p:spPr>
           <a:xfrm>
-            <a:off x="6876288" y="3154680"/>
-            <a:ext cx="4617720" cy="1280160"/>
+            <a:off x="6876288" y="2999232"/>
+            <a:ext cx="4617720" cy="1243584"/>
           </a:xfrm>
           <a:prstGeom prst="rect">
             <a:avLst/>
@@ -9547,12 +10042,12 @@
         </p:nvSpPr>
         <p:spPr>
           <a:xfrm>
-            <a:off x="6217920" y="4663440"/>
-            <a:ext cx="5440680" cy="1463040"/>
+            <a:off x="6217920" y="4434840"/>
+            <a:ext cx="5440680" cy="1389888"/>
           </a:xfrm>
           <a:prstGeom prst="roundRect">
             <a:avLst>
-              <a:gd name="adj" fmla="val 5000"/>
+              <a:gd name="adj" fmla="val 5263"/>
             </a:avLst>
           </a:prstGeom>
           <a:solidFill>
@@ -9574,8 +10069,8 @@
         </p:nvSpPr>
         <p:spPr>
           <a:xfrm>
-            <a:off x="6400800" y="4754880"/>
-            <a:ext cx="5074920" cy="1280160"/>
+            <a:off x="6400800" y="4507992"/>
+            <a:ext cx="5074920" cy="1243584"/>
           </a:xfrm>
           <a:prstGeom prst="rect">
             <a:avLst/>
@@ -9608,7 +10103,7 @@
               <a:buNone/>
             </a:pPr>
             <a:r>
-              <a:rPr lang="en-US" sz="1150" dirty="0">
+              <a:rPr lang="en-US" sz="1100" dirty="0">
                 <a:solidFill>
                   <a:srgbClr val="FFFFFF"/>
                 </a:solidFill>
@@ -9616,7 +10111,7 @@
                 <a:ea typeface="Calibri" pitchFamily="34" charset="-122"/>
                 <a:cs typeface="Calibri" pitchFamily="34" charset="-120"/>
               </a:rPr>
-              <a:t>Isu 1 dan 2 adalah soal lingkungan eksternal; isu 3 sampai 5 soal kesiapan internal dan tata kelola. Alternatif yang baik harus menjawab keduanya, bukan hanya salah satu.</a:t>
+              <a:t>Isu 1 dan 2 berasal dari tahap lingkungan eksternal; isu 3 berasal dari tahap posisi biaya; isu 4 dan 5 soal organisasi dan tata kelola. Alternatif yang baik harus menjawab semuanya, bukan hanya sebagian.</a:t>
             </a:r>
             <a:endParaRPr lang="en-US" sz="1200" dirty="0"/>
           </a:p>
@@ -9630,6 +10125,59 @@
         </p:nvSpPr>
         <p:spPr>
           <a:xfrm>
+            <a:off x="548640" y="6016752"/>
+            <a:ext cx="11064240" cy="365760"/>
+          </a:xfrm>
+          <a:prstGeom prst="rect">
+            <a:avLst/>
+          </a:prstGeom>
+          <a:noFill/>
+          <a:ln/>
+        </p:spPr>
+        <p:txBody>
+          <a:bodyPr wrap="square" lIns="0" tIns="0" rIns="0" bIns="0" rtlCol="0" anchor="ctr"/>
+          <a:lstStyle/>
+          <a:p>
+            <a:pPr indent="0" marL="0">
+              <a:buNone/>
+            </a:pPr>
+            <a:r>
+              <a:rPr lang="en-US" sz="1050" b="1" dirty="0">
+                <a:solidFill>
+                  <a:srgbClr val="C8102E"/>
+                </a:solidFill>
+                <a:latin typeface="Calibri" pitchFamily="34" charset="0"/>
+                <a:ea typeface="Calibri" pitchFamily="34" charset="-122"/>
+                <a:cs typeface="Calibri" pitchFamily="34" charset="-120"/>
+              </a:rPr>
+              <a:t>Kaitan.  </a:t>
+            </a:r>
+            <a:pPr indent="0" marL="0">
+              <a:buNone/>
+            </a:pPr>
+            <a:r>
+              <a:rPr lang="en-US" sz="1050" i="1" dirty="0">
+                <a:solidFill>
+                  <a:srgbClr val="6E6E6E"/>
+                </a:solidFill>
+                <a:latin typeface="Calibri" pitchFamily="34" charset="0"/>
+                <a:ea typeface="Calibri" pitchFamily="34" charset="-122"/>
+                <a:cs typeface="Calibri" pitchFamily="34" charset="-120"/>
+              </a:rPr>
+              <a:t>Lima pertanyaan ini menjadi kriteria penilaian. Slide berikutnya menyajikan tiga alternatif yang akan diuji terhadapnya.</a:t>
+            </a:r>
+            <a:endParaRPr lang="en-US" sz="1050" dirty="0"/>
+          </a:p>
+        </p:txBody>
+      </p:sp>
+      <p:sp>
+        <p:nvSpPr>
+          <p:cNvPr id="27" name="Text 25"/>
+          <p:cNvSpPr txBox="1"/>
+          <p:nvPr/>
+        </p:nvSpPr>
+        <p:spPr>
+          <a:xfrm>
             <a:off x="548640" y="6446520"/>
             <a:ext cx="7315200" cy="274320"/>
           </a:xfrm>
@@ -9663,7 +10211,7 @@
       </p:sp>
       <p:sp>
         <p:nvSpPr>
-          <p:cNvPr id="27" name="Text 25"/>
+          <p:cNvPr id="28" name="Text 26"/>
           <p:cNvSpPr txBox="1"/>
           <p:nvPr/>
         </p:nvSpPr>
@@ -9741,7 +10289,7 @@
         <p:spPr>
           <a:xfrm>
             <a:off x="548640" y="320040"/>
-            <a:ext cx="10972800" cy="274320"/>
+            <a:ext cx="11064240" cy="274320"/>
           </a:xfrm>
           <a:prstGeom prst="rect">
             <a:avLst/>
@@ -9757,7 +10305,91 @@
               <a:buNone/>
             </a:pPr>
             <a:r>
-              <a:rPr lang="en-US" sz="1100" b="1" spc="200" kern="0" dirty="0">
+              <a:rPr lang="en-US" sz="1000" spc="150" kern="0" dirty="0">
+                <a:solidFill>
+                  <a:srgbClr val="B5B5B5"/>
+                </a:solidFill>
+                <a:latin typeface="Calibri" pitchFamily="34" charset="0"/>
+                <a:ea typeface="Calibri" pitchFamily="34" charset="-122"/>
+                <a:cs typeface="Calibri" pitchFamily="34" charset="-120"/>
+              </a:rPr>
+              <a:t>1  PROBLEM</a:t>
+            </a:r>
+            <a:pPr indent="0" marL="0">
+              <a:buNone/>
+            </a:pPr>
+            <a:r>
+              <a:rPr lang="en-US" sz="1000" spc="150" kern="0" dirty="0">
+                <a:solidFill>
+                  <a:srgbClr val="B5B5B5"/>
+                </a:solidFill>
+                <a:latin typeface="Calibri" pitchFamily="34" charset="0"/>
+                <a:ea typeface="Calibri" pitchFamily="34" charset="-122"/>
+                <a:cs typeface="Calibri" pitchFamily="34" charset="-120"/>
+              </a:rPr>
+              <a:t>      </a:t>
+            </a:r>
+            <a:pPr indent="0" marL="0">
+              <a:buNone/>
+            </a:pPr>
+            <a:r>
+              <a:rPr lang="en-US" sz="1000" spc="150" kern="0" dirty="0">
+                <a:solidFill>
+                  <a:srgbClr val="B5B5B5"/>
+                </a:solidFill>
+                <a:latin typeface="Calibri" pitchFamily="34" charset="0"/>
+                <a:ea typeface="Calibri" pitchFamily="34" charset="-122"/>
+                <a:cs typeface="Calibri" pitchFamily="34" charset="-120"/>
+              </a:rPr>
+              <a:t>2  EXTERNAL ENVIRONMENT</a:t>
+            </a:r>
+            <a:pPr indent="0" marL="0">
+              <a:buNone/>
+            </a:pPr>
+            <a:r>
+              <a:rPr lang="en-US" sz="1000" spc="150" kern="0" dirty="0">
+                <a:solidFill>
+                  <a:srgbClr val="B5B5B5"/>
+                </a:solidFill>
+                <a:latin typeface="Calibri" pitchFamily="34" charset="0"/>
+                <a:ea typeface="Calibri" pitchFamily="34" charset="-122"/>
+                <a:cs typeface="Calibri" pitchFamily="34" charset="-120"/>
+              </a:rPr>
+              <a:t>      </a:t>
+            </a:r>
+            <a:pPr indent="0" marL="0">
+              <a:buNone/>
+            </a:pPr>
+            <a:r>
+              <a:rPr lang="en-US" sz="1000" spc="150" kern="0" dirty="0">
+                <a:solidFill>
+                  <a:srgbClr val="B5B5B5"/>
+                </a:solidFill>
+                <a:latin typeface="Calibri" pitchFamily="34" charset="0"/>
+                <a:ea typeface="Calibri" pitchFamily="34" charset="-122"/>
+                <a:cs typeface="Calibri" pitchFamily="34" charset="-120"/>
+              </a:rPr>
+              <a:t>3  COST POSITION</a:t>
+            </a:r>
+            <a:pPr indent="0" marL="0">
+              <a:buNone/>
+            </a:pPr>
+            <a:r>
+              <a:rPr lang="en-US" sz="1000" spc="150" kern="0" dirty="0">
+                <a:solidFill>
+                  <a:srgbClr val="B5B5B5"/>
+                </a:solidFill>
+                <a:latin typeface="Calibri" pitchFamily="34" charset="0"/>
+                <a:ea typeface="Calibri" pitchFamily="34" charset="-122"/>
+                <a:cs typeface="Calibri" pitchFamily="34" charset="-120"/>
+              </a:rPr>
+              <a:t>      </a:t>
+            </a:r>
+            <a:pPr indent="0" marL="0">
+              <a:buNone/>
+            </a:pPr>
+            <a:r>
+              <a:rPr lang="en-US" sz="1000" b="1" spc="150" kern="0" dirty="0">
                 <a:solidFill>
                   <a:srgbClr val="C8102E"/>
                 </a:solidFill>
@@ -9765,9 +10397,9 @@
                 <a:ea typeface="Calibri" pitchFamily="34" charset="-122"/>
                 <a:cs typeface="Calibri" pitchFamily="34" charset="-120"/>
               </a:rPr>
-              <a:t>STRATEGIC ALTERNATIVES</a:t>
-            </a:r>
-            <a:endParaRPr lang="en-US" sz="1100" dirty="0"/>
+              <a:t>4  CHOICE</a:t>
+            </a:r>
+            <a:endParaRPr lang="en-US" sz="1000" dirty="0"/>
           </a:p>
         </p:txBody>
       </p:sp>
@@ -9779,8 +10411,8 @@
         </p:nvSpPr>
         <p:spPr>
           <a:xfrm>
-            <a:off x="548640" y="566928"/>
-            <a:ext cx="11064240" cy="731520"/>
+            <a:off x="548640" y="621792"/>
+            <a:ext cx="11064240" cy="640080"/>
           </a:xfrm>
           <a:prstGeom prst="rect">
             <a:avLst/>
@@ -9796,7 +10428,7 @@
               <a:buNone/>
             </a:pPr>
             <a:r>
-              <a:rPr lang="en-US" sz="2600" b="1" dirty="0">
+              <a:rPr lang="en-US" sz="3000" b="1" dirty="0">
                 <a:solidFill>
                   <a:srgbClr val="1C1C1C"/>
                 </a:solidFill>
@@ -9804,9 +10436,9 @@
                 <a:ea typeface="Cambria" pitchFamily="34" charset="-122"/>
                 <a:cs typeface="Cambria" pitchFamily="34" charset="-120"/>
               </a:rPr>
-              <a:t>Three options open to AirAsia's management in mid 2009</a:t>
-            </a:r>
-            <a:endParaRPr lang="en-US" sz="2600" dirty="0"/>
+              <a:t>Strategic alternatives</a:t>
+            </a:r>
+            <a:endParaRPr lang="en-US" sz="3000" dirty="0"/>
           </a:p>
         </p:txBody>
       </p:sp>
@@ -9818,8 +10450,8 @@
         </p:nvSpPr>
         <p:spPr>
           <a:xfrm>
-            <a:off x="548640" y="1463040"/>
-            <a:ext cx="3520440" cy="4800600"/>
+            <a:off x="548640" y="1417320"/>
+            <a:ext cx="3520440" cy="4480560"/>
           </a:xfrm>
           <a:prstGeom prst="roundRect">
             <a:avLst>
@@ -9845,7 +10477,7 @@
         </p:nvSpPr>
         <p:spPr>
           <a:xfrm>
-            <a:off x="749808" y="1627632"/>
+            <a:off x="749808" y="1572768"/>
             <a:ext cx="548640" cy="548640"/>
           </a:xfrm>
           <a:prstGeom prst="ellipse">
@@ -9870,7 +10502,7 @@
         </p:nvSpPr>
         <p:spPr>
           <a:xfrm>
-            <a:off x="749808" y="1627632"/>
+            <a:off x="749808" y="1572768"/>
             <a:ext cx="548640" cy="548640"/>
           </a:xfrm>
           <a:prstGeom prst="rect">
@@ -9909,7 +10541,7 @@
         </p:nvSpPr>
         <p:spPr>
           <a:xfrm>
-            <a:off x="1417320" y="1554480"/>
+            <a:off x="1417320" y="1481328"/>
             <a:ext cx="2514600" cy="777240"/>
           </a:xfrm>
           <a:prstGeom prst="rect">
@@ -9965,8 +10597,8 @@
         </p:nvSpPr>
         <p:spPr>
           <a:xfrm>
-            <a:off x="777240" y="2514600"/>
-            <a:ext cx="3108960" cy="2651760"/>
+            <a:off x="777240" y="2423160"/>
+            <a:ext cx="3108960" cy="2286000"/>
           </a:xfrm>
           <a:prstGeom prst="rect">
             <a:avLst/>
@@ -10050,7 +10682,7 @@
         </p:nvSpPr>
         <p:spPr>
           <a:xfrm>
-            <a:off x="731520" y="5166360"/>
+            <a:off x="731520" y="4800600"/>
             <a:ext cx="3154680" cy="960120"/>
           </a:xfrm>
           <a:prstGeom prst="roundRect">
@@ -10077,7 +10709,7 @@
         </p:nvSpPr>
         <p:spPr>
           <a:xfrm>
-            <a:off x="868680" y="5212080"/>
+            <a:off x="868680" y="4846320"/>
             <a:ext cx="2880360" cy="868680"/>
           </a:xfrm>
           <a:prstGeom prst="rect">
@@ -10116,8 +10748,8 @@
         </p:nvSpPr>
         <p:spPr>
           <a:xfrm>
-            <a:off x="4251960" y="1463040"/>
-            <a:ext cx="3520440" cy="4800600"/>
+            <a:off x="4251960" y="1417320"/>
+            <a:ext cx="3520440" cy="4480560"/>
           </a:xfrm>
           <a:prstGeom prst="roundRect">
             <a:avLst>
@@ -10143,7 +10775,7 @@
         </p:nvSpPr>
         <p:spPr>
           <a:xfrm>
-            <a:off x="4453128" y="1627632"/>
+            <a:off x="4453128" y="1572768"/>
             <a:ext cx="548640" cy="548640"/>
           </a:xfrm>
           <a:prstGeom prst="ellipse">
@@ -10168,7 +10800,7 @@
         </p:nvSpPr>
         <p:spPr>
           <a:xfrm>
-            <a:off x="4453128" y="1627632"/>
+            <a:off x="4453128" y="1572768"/>
             <a:ext cx="548640" cy="548640"/>
           </a:xfrm>
           <a:prstGeom prst="rect">
@@ -10207,7 +10839,7 @@
         </p:nvSpPr>
         <p:spPr>
           <a:xfrm>
-            <a:off x="5120640" y="1554480"/>
+            <a:off x="5120640" y="1481328"/>
             <a:ext cx="2514600" cy="777240"/>
           </a:xfrm>
           <a:prstGeom prst="rect">
@@ -10263,8 +10895,8 @@
         </p:nvSpPr>
         <p:spPr>
           <a:xfrm>
-            <a:off x="4480560" y="2514600"/>
-            <a:ext cx="3108960" cy="2651760"/>
+            <a:off x="4480560" y="2423160"/>
+            <a:ext cx="3108960" cy="2286000"/>
           </a:xfrm>
           <a:prstGeom prst="rect">
             <a:avLst/>
@@ -10334,7 +10966,7 @@
                 <a:ea typeface="Calibri" pitchFamily="34" charset="-122"/>
                 <a:cs typeface="Calibri" pitchFamily="34" charset="-120"/>
               </a:rPr>
-              <a:t>Ekspansi agresif: Abu Dhabi sebagai hub kedua, India, Seoul, Sydney, New York sesuai rencana.</a:t>
+              <a:t>Ekspansi sesuai rencana: Abu Dhabi sebagai hub kedua, India, Seoul, Sydney, New York.</a:t>
             </a:r>
             <a:endParaRPr lang="en-US" sz="1100" dirty="0"/>
           </a:p>
@@ -10348,7 +10980,7 @@
         </p:nvSpPr>
         <p:spPr>
           <a:xfrm>
-            <a:off x="4434840" y="5166360"/>
+            <a:off x="4434840" y="4800600"/>
             <a:ext cx="3154680" cy="960120"/>
           </a:xfrm>
           <a:prstGeom prst="roundRect">
@@ -10375,7 +11007,7 @@
         </p:nvSpPr>
         <p:spPr>
           <a:xfrm>
-            <a:off x="4572000" y="5212080"/>
+            <a:off x="4572000" y="4846320"/>
             <a:ext cx="2880360" cy="868680"/>
           </a:xfrm>
           <a:prstGeom prst="rect">
@@ -10414,8 +11046,8 @@
         </p:nvSpPr>
         <p:spPr>
           <a:xfrm>
-            <a:off x="7955280" y="1463040"/>
-            <a:ext cx="3520440" cy="4800600"/>
+            <a:off x="7955280" y="1417320"/>
+            <a:ext cx="3520440" cy="4480560"/>
           </a:xfrm>
           <a:prstGeom prst="roundRect">
             <a:avLst>
@@ -10441,7 +11073,7 @@
         </p:nvSpPr>
         <p:spPr>
           <a:xfrm>
-            <a:off x="8156448" y="1627632"/>
+            <a:off x="8156448" y="1572768"/>
             <a:ext cx="548640" cy="548640"/>
           </a:xfrm>
           <a:prstGeom prst="ellipse">
@@ -10466,7 +11098,7 @@
         </p:nvSpPr>
         <p:spPr>
           <a:xfrm>
-            <a:off x="8156448" y="1627632"/>
+            <a:off x="8156448" y="1572768"/>
             <a:ext cx="548640" cy="548640"/>
           </a:xfrm>
           <a:prstGeom prst="rect">
@@ -10505,7 +11137,7 @@
         </p:nvSpPr>
         <p:spPr>
           <a:xfrm>
-            <a:off x="8823960" y="1554480"/>
+            <a:off x="8823960" y="1481328"/>
             <a:ext cx="2514600" cy="777240"/>
           </a:xfrm>
           <a:prstGeom prst="rect">
@@ -10561,8 +11193,8 @@
         </p:nvSpPr>
         <p:spPr>
           <a:xfrm>
-            <a:off x="8183880" y="2514600"/>
-            <a:ext cx="3108960" cy="2651760"/>
+            <a:off x="8183880" y="2423160"/>
+            <a:ext cx="3108960" cy="2286000"/>
           </a:xfrm>
           <a:prstGeom prst="rect">
             <a:avLst/>
@@ -10646,7 +11278,7 @@
         </p:nvSpPr>
         <p:spPr>
           <a:xfrm>
-            <a:off x="8138160" y="5166360"/>
+            <a:off x="8138160" y="4800600"/>
             <a:ext cx="3154680" cy="960120"/>
           </a:xfrm>
           <a:prstGeom prst="roundRect">
@@ -10673,7 +11305,7 @@
         </p:nvSpPr>
         <p:spPr>
           <a:xfrm>
-            <a:off x="8275320" y="5212080"/>
+            <a:off x="8275320" y="4846320"/>
             <a:ext cx="2880360" cy="868680"/>
           </a:xfrm>
           <a:prstGeom prst="rect">
@@ -10712,6 +11344,59 @@
         </p:nvSpPr>
         <p:spPr>
           <a:xfrm>
+            <a:off x="548640" y="6016752"/>
+            <a:ext cx="11064240" cy="365760"/>
+          </a:xfrm>
+          <a:prstGeom prst="rect">
+            <a:avLst/>
+          </a:prstGeom>
+          <a:noFill/>
+          <a:ln/>
+        </p:spPr>
+        <p:txBody>
+          <a:bodyPr wrap="square" lIns="0" tIns="0" rIns="0" bIns="0" rtlCol="0" anchor="ctr"/>
+          <a:lstStyle/>
+          <a:p>
+            <a:pPr indent="0" marL="0">
+              <a:buNone/>
+            </a:pPr>
+            <a:r>
+              <a:rPr lang="en-US" sz="1050" b="1" dirty="0">
+                <a:solidFill>
+                  <a:srgbClr val="C8102E"/>
+                </a:solidFill>
+                <a:latin typeface="Calibri" pitchFamily="34" charset="0"/>
+                <a:ea typeface="Calibri" pitchFamily="34" charset="-122"/>
+                <a:cs typeface="Calibri" pitchFamily="34" charset="-120"/>
+              </a:rPr>
+              <a:t>Kaitan.  </a:t>
+            </a:r>
+            <a:pPr indent="0" marL="0">
+              <a:buNone/>
+            </a:pPr>
+            <a:r>
+              <a:rPr lang="en-US" sz="1050" i="1" dirty="0">
+                <a:solidFill>
+                  <a:srgbClr val="6E6E6E"/>
+                </a:solidFill>
+                <a:latin typeface="Calibri" pitchFamily="34" charset="0"/>
+                <a:ea typeface="Calibri" pitchFamily="34" charset="-122"/>
+                <a:cs typeface="Calibri" pitchFamily="34" charset="-120"/>
+              </a:rPr>
+              <a:t>Ketiga alternatif dideskripsikan tanpa argumen pro dan kontra, sesuai panduan RPKPS. Penilaiannya ada di slide berikutnya dengan lima kriteria dari isu kunci.</a:t>
+            </a:r>
+            <a:endParaRPr lang="en-US" sz="1050" dirty="0"/>
+          </a:p>
+        </p:txBody>
+      </p:sp>
+      <p:sp>
+        <p:nvSpPr>
+          <p:cNvPr id="26" name="Text 24"/>
+          <p:cNvSpPr txBox="1"/>
+          <p:nvPr/>
+        </p:nvSpPr>
+        <p:spPr>
+          <a:xfrm>
             <a:off x="548640" y="6446520"/>
             <a:ext cx="7315200" cy="274320"/>
           </a:xfrm>
@@ -10745,7 +11430,7 @@
       </p:sp>
       <p:sp>
         <p:nvSpPr>
-          <p:cNvPr id="26" name="Text 24"/>
+          <p:cNvPr id="27" name="Text 25"/>
           <p:cNvSpPr txBox="1"/>
           <p:nvPr/>
         </p:nvSpPr>
@@ -10823,7 +11508,7 @@
         <p:spPr>
           <a:xfrm>
             <a:off x="548640" y="320040"/>
-            <a:ext cx="10972800" cy="274320"/>
+            <a:ext cx="11064240" cy="274320"/>
           </a:xfrm>
           <a:prstGeom prst="rect">
             <a:avLst/>
@@ -10839,7 +11524,91 @@
               <a:buNone/>
             </a:pPr>
             <a:r>
-              <a:rPr lang="en-US" sz="1100" b="1" spc="200" kern="0" dirty="0">
+              <a:rPr lang="en-US" sz="1000" spc="150" kern="0" dirty="0">
+                <a:solidFill>
+                  <a:srgbClr val="B5B5B5"/>
+                </a:solidFill>
+                <a:latin typeface="Calibri" pitchFamily="34" charset="0"/>
+                <a:ea typeface="Calibri" pitchFamily="34" charset="-122"/>
+                <a:cs typeface="Calibri" pitchFamily="34" charset="-120"/>
+              </a:rPr>
+              <a:t>1  PROBLEM</a:t>
+            </a:r>
+            <a:pPr indent="0" marL="0">
+              <a:buNone/>
+            </a:pPr>
+            <a:r>
+              <a:rPr lang="en-US" sz="1000" spc="150" kern="0" dirty="0">
+                <a:solidFill>
+                  <a:srgbClr val="B5B5B5"/>
+                </a:solidFill>
+                <a:latin typeface="Calibri" pitchFamily="34" charset="0"/>
+                <a:ea typeface="Calibri" pitchFamily="34" charset="-122"/>
+                <a:cs typeface="Calibri" pitchFamily="34" charset="-120"/>
+              </a:rPr>
+              <a:t>      </a:t>
+            </a:r>
+            <a:pPr indent="0" marL="0">
+              <a:buNone/>
+            </a:pPr>
+            <a:r>
+              <a:rPr lang="en-US" sz="1000" spc="150" kern="0" dirty="0">
+                <a:solidFill>
+                  <a:srgbClr val="B5B5B5"/>
+                </a:solidFill>
+                <a:latin typeface="Calibri" pitchFamily="34" charset="0"/>
+                <a:ea typeface="Calibri" pitchFamily="34" charset="-122"/>
+                <a:cs typeface="Calibri" pitchFamily="34" charset="-120"/>
+              </a:rPr>
+              <a:t>2  EXTERNAL ENVIRONMENT</a:t>
+            </a:r>
+            <a:pPr indent="0" marL="0">
+              <a:buNone/>
+            </a:pPr>
+            <a:r>
+              <a:rPr lang="en-US" sz="1000" spc="150" kern="0" dirty="0">
+                <a:solidFill>
+                  <a:srgbClr val="B5B5B5"/>
+                </a:solidFill>
+                <a:latin typeface="Calibri" pitchFamily="34" charset="0"/>
+                <a:ea typeface="Calibri" pitchFamily="34" charset="-122"/>
+                <a:cs typeface="Calibri" pitchFamily="34" charset="-120"/>
+              </a:rPr>
+              <a:t>      </a:t>
+            </a:r>
+            <a:pPr indent="0" marL="0">
+              <a:buNone/>
+            </a:pPr>
+            <a:r>
+              <a:rPr lang="en-US" sz="1000" spc="150" kern="0" dirty="0">
+                <a:solidFill>
+                  <a:srgbClr val="B5B5B5"/>
+                </a:solidFill>
+                <a:latin typeface="Calibri" pitchFamily="34" charset="0"/>
+                <a:ea typeface="Calibri" pitchFamily="34" charset="-122"/>
+                <a:cs typeface="Calibri" pitchFamily="34" charset="-120"/>
+              </a:rPr>
+              <a:t>3  COST POSITION</a:t>
+            </a:r>
+            <a:pPr indent="0" marL="0">
+              <a:buNone/>
+            </a:pPr>
+            <a:r>
+              <a:rPr lang="en-US" sz="1000" spc="150" kern="0" dirty="0">
+                <a:solidFill>
+                  <a:srgbClr val="B5B5B5"/>
+                </a:solidFill>
+                <a:latin typeface="Calibri" pitchFamily="34" charset="0"/>
+                <a:ea typeface="Calibri" pitchFamily="34" charset="-122"/>
+                <a:cs typeface="Calibri" pitchFamily="34" charset="-120"/>
+              </a:rPr>
+              <a:t>      </a:t>
+            </a:r>
+            <a:pPr indent="0" marL="0">
+              <a:buNone/>
+            </a:pPr>
+            <a:r>
+              <a:rPr lang="en-US" sz="1000" b="1" spc="150" kern="0" dirty="0">
                 <a:solidFill>
                   <a:srgbClr val="C8102E"/>
                 </a:solidFill>
@@ -10847,9 +11616,9 @@
                 <a:ea typeface="Calibri" pitchFamily="34" charset="-122"/>
                 <a:cs typeface="Calibri" pitchFamily="34" charset="-120"/>
               </a:rPr>
-              <a:t>EVALUATION OF ALTERNATIVES</a:t>
-            </a:r>
-            <a:endParaRPr lang="en-US" sz="1100" dirty="0"/>
+              <a:t>4  CHOICE</a:t>
+            </a:r>
+            <a:endParaRPr lang="en-US" sz="1000" dirty="0"/>
           </a:p>
         </p:txBody>
       </p:sp>
@@ -10861,8 +11630,8 @@
         </p:nvSpPr>
         <p:spPr>
           <a:xfrm>
-            <a:off x="548640" y="566928"/>
-            <a:ext cx="11064240" cy="731520"/>
+            <a:off x="548640" y="621792"/>
+            <a:ext cx="11064240" cy="640080"/>
           </a:xfrm>
           <a:prstGeom prst="rect">
             <a:avLst/>
@@ -10878,7 +11647,7 @@
               <a:buNone/>
             </a:pPr>
             <a:r>
-              <a:rPr lang="en-US" sz="2600" b="1" dirty="0">
+              <a:rPr lang="en-US" sz="3000" b="1" dirty="0">
                 <a:solidFill>
                   <a:srgbClr val="1C1C1C"/>
                 </a:solidFill>
@@ -10886,9 +11655,9 @@
                 <a:ea typeface="Cambria" pitchFamily="34" charset="-122"/>
                 <a:cs typeface="Cambria" pitchFamily="34" charset="-120"/>
               </a:rPr>
-              <a:t>Tested against the five issues: alternative C balances opportunity and risk best</a:t>
-            </a:r>
-            <a:endParaRPr lang="en-US" sz="2600" dirty="0"/>
+              <a:t>Evaluating the alternatives</a:t>
+            </a:r>
+            <a:endParaRPr lang="en-US" sz="3000" dirty="0"/>
           </a:p>
         </p:txBody>
       </p:sp>
@@ -10907,7 +11676,7 @@
           </p:nvPr>
         </p:nvGraphicFramePr>
         <p:xfrm>
-          <a:off x="548640" y="1463040"/>
+          <a:off x="548640" y="1417320"/>
           <a:ext cx="11064240" cy="914400"/>
         </p:xfrm>
         <a:graphic>
@@ -11194,7 +11963,7 @@
                   </a:tcPr>
                 </a:tc>
               </a:tr>
-              <a:tr h="777240">
+              <a:tr h="749808">
                 <a:tc>
                   <a:txBody>
                     <a:bodyPr/>
@@ -11212,7 +11981,7 @@
                           <a:ea typeface="Calibri" pitchFamily="34" charset="-122"/>
                           <a:cs typeface="Calibri" pitchFamily="34" charset="-120"/>
                         </a:rPr>
-                        <a:t>Menangkap peluang pasar jarak jauh</a:t>
+                        <a:t>1. Menangkap peluang pasar jarak jauh</a:t>
                       </a:r>
                       <a:endParaRPr lang="en-US" sz="1050" dirty="0">
                         <a:latin typeface="Calibri" charset="0"/>
@@ -11531,7 +12300,7 @@
                   </a:tcPr>
                 </a:tc>
               </a:tr>
-              <a:tr h="777240">
+              <a:tr h="749808">
                 <a:tc>
                   <a:txBody>
                     <a:bodyPr/>
@@ -11549,7 +12318,7 @@
                           <a:ea typeface="Calibri" pitchFamily="34" charset="-122"/>
                           <a:cs typeface="Calibri" pitchFamily="34" charset="-120"/>
                         </a:rPr>
-                        <a:t>Daya tahan terhadap balasan network carriers</a:t>
+                        <a:t>2. Daya tahan terhadap balasan network carriers</a:t>
                       </a:r>
                       <a:endParaRPr lang="en-US" sz="1050" dirty="0">
                         <a:latin typeface="Calibri" charset="0"/>
@@ -11868,7 +12637,7 @@
                   </a:tcPr>
                 </a:tc>
               </a:tr>
-              <a:tr h="777240">
+              <a:tr h="749808">
                 <a:tc>
                   <a:txBody>
                     <a:bodyPr/>
@@ -11886,7 +12655,7 @@
                           <a:ea typeface="Calibri" pitchFamily="34" charset="-122"/>
                           <a:cs typeface="Calibri" pitchFamily="34" charset="-120"/>
                         </a:rPr>
-                        <a:t>Keamanan finansial (utang, kas, pesanan A350)</a:t>
+                        <a:t>3. Keamanan finansial (utang, kas, pesanan A350)</a:t>
                       </a:r>
                       <a:endParaRPr lang="en-US" sz="1050" dirty="0">
                         <a:latin typeface="Calibri" charset="0"/>
@@ -12205,7 +12974,7 @@
                   </a:tcPr>
                 </a:tc>
               </a:tr>
-              <a:tr h="777240">
+              <a:tr h="749808">
                 <a:tc>
                   <a:txBody>
                     <a:bodyPr/>
@@ -12223,7 +12992,7 @@
                           <a:ea typeface="Calibri" pitchFamily="34" charset="-122"/>
                           <a:cs typeface="Calibri" pitchFamily="34" charset="-120"/>
                         </a:rPr>
-                        <a:t>Keseimbangan eksploitasi dan eksplorasi</a:t>
+                        <a:t>4. Keseimbangan eksploitasi dan eksplorasi</a:t>
                       </a:r>
                       <a:endParaRPr lang="en-US" sz="1050" dirty="0">
                         <a:latin typeface="Calibri" charset="0"/>
@@ -12542,7 +13311,7 @@
                   </a:tcPr>
                 </a:tc>
               </a:tr>
-              <a:tr h="777240">
+              <a:tr h="749808">
                 <a:tc>
                   <a:txBody>
                     <a:bodyPr/>
@@ -12560,7 +13329,7 @@
                           <a:ea typeface="Calibri" pitchFamily="34" charset="-122"/>
                           <a:cs typeface="Calibri" pitchFamily="34" charset="-120"/>
                         </a:rPr>
-                        <a:t>Keselarasan tata kelola dan pemegang saham</a:t>
+                        <a:t>5. Keselarasan tata kelola dan pemegang saham</a:t>
                       </a:r>
                       <a:endParaRPr lang="en-US" sz="1050" dirty="0">
                         <a:latin typeface="Calibri" charset="0"/>
@@ -12649,7 +13418,7 @@
                           <a:ea typeface="Calibri" pitchFamily="34" charset="-122"/>
                           <a:cs typeface="Calibri" pitchFamily="34" charset="-120"/>
                         </a:rPr>
-                        <a:t>Konflik kepentingan Fernandes tetap ada meski tersembunyi.</a:t>
+                        <a:t>Konflik kepentingan pendiri tetap ada meski tidak terlihat.</a:t>
                       </a:r>
                       <a:endParaRPr lang="en-US" sz="1200" dirty="0">
                         <a:latin typeface="Calibri" charset="0"/>
@@ -12738,7 +13507,7 @@
                           <a:ea typeface="Calibri" pitchFamily="34" charset="-122"/>
                           <a:cs typeface="Calibri" pitchFamily="34" charset="-120"/>
                         </a:rPr>
-                        <a:t>Transparan, tetapi minoritas AirAsia menanggung kerugian AirAsia X.</a:t>
+                        <a:t>Transparan, tetapi pemegang saham AirAsia menanggung kerugian AirAsia X.</a:t>
                       </a:r>
                       <a:endParaRPr lang="en-US" sz="1200" dirty="0">
                         <a:latin typeface="Calibri" charset="0"/>
@@ -12891,7 +13660,7 @@
         </p:nvSpPr>
         <p:spPr>
           <a:xfrm>
-            <a:off x="548640" y="5897880"/>
+            <a:off x="548640" y="5623560"/>
             <a:ext cx="11064240" cy="365760"/>
           </a:xfrm>
           <a:prstGeom prst="rect">
@@ -12930,6 +13699,59 @@
         </p:nvSpPr>
         <p:spPr>
           <a:xfrm>
+            <a:off x="548640" y="6016752"/>
+            <a:ext cx="11064240" cy="365760"/>
+          </a:xfrm>
+          <a:prstGeom prst="rect">
+            <a:avLst/>
+          </a:prstGeom>
+          <a:noFill/>
+          <a:ln/>
+        </p:spPr>
+        <p:txBody>
+          <a:bodyPr wrap="square" lIns="0" tIns="0" rIns="0" bIns="0" rtlCol="0" anchor="ctr"/>
+          <a:lstStyle/>
+          <a:p>
+            <a:pPr indent="0" marL="0">
+              <a:buNone/>
+            </a:pPr>
+            <a:r>
+              <a:rPr lang="en-US" sz="1050" b="1" dirty="0">
+                <a:solidFill>
+                  <a:srgbClr val="C8102E"/>
+                </a:solidFill>
+                <a:latin typeface="Calibri" pitchFamily="34" charset="0"/>
+                <a:ea typeface="Calibri" pitchFamily="34" charset="-122"/>
+                <a:cs typeface="Calibri" pitchFamily="34" charset="-120"/>
+              </a:rPr>
+              <a:t>Kaitan.  </a:t>
+            </a:r>
+            <a:pPr indent="0" marL="0">
+              <a:buNone/>
+            </a:pPr>
+            <a:r>
+              <a:rPr lang="en-US" sz="1050" i="1" dirty="0">
+                <a:solidFill>
+                  <a:srgbClr val="6E6E6E"/>
+                </a:solidFill>
+                <a:latin typeface="Calibri" pitchFamily="34" charset="0"/>
+                <a:ea typeface="Calibri" pitchFamily="34" charset="-122"/>
+                <a:cs typeface="Calibri" pitchFamily="34" charset="-120"/>
+              </a:rPr>
+              <a:t>Alternatif C paling seimbang: tidak ada kriteria yang lemah. Slide berikutnya menerjemahkannya menjadi rekomendasi dan rencana implementasi.</a:t>
+            </a:r>
+            <a:endParaRPr lang="en-US" sz="1050" dirty="0"/>
+          </a:p>
+        </p:txBody>
+      </p:sp>
+      <p:sp>
+        <p:nvSpPr>
+          <p:cNvPr id="7" name="Text 4"/>
+          <p:cNvSpPr txBox="1"/>
+          <p:nvPr/>
+        </p:nvSpPr>
+        <p:spPr>
+          <a:xfrm>
             <a:off x="548640" y="6446520"/>
             <a:ext cx="7315200" cy="274320"/>
           </a:xfrm>
@@ -12963,7 +13785,7 @@
       </p:sp>
       <p:sp>
         <p:nvSpPr>
-          <p:cNvPr id="7" name="Text 4"/>
+          <p:cNvPr id="8" name="Text 5"/>
           <p:cNvSpPr txBox="1"/>
           <p:nvPr/>
         </p:nvSpPr>
@@ -13041,7 +13863,7 @@
         <p:spPr>
           <a:xfrm>
             <a:off x="548640" y="320040"/>
-            <a:ext cx="10972800" cy="274320"/>
+            <a:ext cx="11064240" cy="274320"/>
           </a:xfrm>
           <a:prstGeom prst="rect">
             <a:avLst/>
@@ -13057,7 +13879,91 @@
               <a:buNone/>
             </a:pPr>
             <a:r>
-              <a:rPr lang="en-US" sz="1100" b="1" spc="200" kern="0" dirty="0">
+              <a:rPr lang="en-US" sz="1000" spc="150" kern="0" dirty="0">
+                <a:solidFill>
+                  <a:srgbClr val="B5B5B5"/>
+                </a:solidFill>
+                <a:latin typeface="Calibri" pitchFamily="34" charset="0"/>
+                <a:ea typeface="Calibri" pitchFamily="34" charset="-122"/>
+                <a:cs typeface="Calibri" pitchFamily="34" charset="-120"/>
+              </a:rPr>
+              <a:t>1  PROBLEM</a:t>
+            </a:r>
+            <a:pPr indent="0" marL="0">
+              <a:buNone/>
+            </a:pPr>
+            <a:r>
+              <a:rPr lang="en-US" sz="1000" spc="150" kern="0" dirty="0">
+                <a:solidFill>
+                  <a:srgbClr val="B5B5B5"/>
+                </a:solidFill>
+                <a:latin typeface="Calibri" pitchFamily="34" charset="0"/>
+                <a:ea typeface="Calibri" pitchFamily="34" charset="-122"/>
+                <a:cs typeface="Calibri" pitchFamily="34" charset="-120"/>
+              </a:rPr>
+              <a:t>      </a:t>
+            </a:r>
+            <a:pPr indent="0" marL="0">
+              <a:buNone/>
+            </a:pPr>
+            <a:r>
+              <a:rPr lang="en-US" sz="1000" spc="150" kern="0" dirty="0">
+                <a:solidFill>
+                  <a:srgbClr val="B5B5B5"/>
+                </a:solidFill>
+                <a:latin typeface="Calibri" pitchFamily="34" charset="0"/>
+                <a:ea typeface="Calibri" pitchFamily="34" charset="-122"/>
+                <a:cs typeface="Calibri" pitchFamily="34" charset="-120"/>
+              </a:rPr>
+              <a:t>2  EXTERNAL ENVIRONMENT</a:t>
+            </a:r>
+            <a:pPr indent="0" marL="0">
+              <a:buNone/>
+            </a:pPr>
+            <a:r>
+              <a:rPr lang="en-US" sz="1000" spc="150" kern="0" dirty="0">
+                <a:solidFill>
+                  <a:srgbClr val="B5B5B5"/>
+                </a:solidFill>
+                <a:latin typeface="Calibri" pitchFamily="34" charset="0"/>
+                <a:ea typeface="Calibri" pitchFamily="34" charset="-122"/>
+                <a:cs typeface="Calibri" pitchFamily="34" charset="-120"/>
+              </a:rPr>
+              <a:t>      </a:t>
+            </a:r>
+            <a:pPr indent="0" marL="0">
+              <a:buNone/>
+            </a:pPr>
+            <a:r>
+              <a:rPr lang="en-US" sz="1000" spc="150" kern="0" dirty="0">
+                <a:solidFill>
+                  <a:srgbClr val="B5B5B5"/>
+                </a:solidFill>
+                <a:latin typeface="Calibri" pitchFamily="34" charset="0"/>
+                <a:ea typeface="Calibri" pitchFamily="34" charset="-122"/>
+                <a:cs typeface="Calibri" pitchFamily="34" charset="-120"/>
+              </a:rPr>
+              <a:t>3  COST POSITION</a:t>
+            </a:r>
+            <a:pPr indent="0" marL="0">
+              <a:buNone/>
+            </a:pPr>
+            <a:r>
+              <a:rPr lang="en-US" sz="1000" spc="150" kern="0" dirty="0">
+                <a:solidFill>
+                  <a:srgbClr val="B5B5B5"/>
+                </a:solidFill>
+                <a:latin typeface="Calibri" pitchFamily="34" charset="0"/>
+                <a:ea typeface="Calibri" pitchFamily="34" charset="-122"/>
+                <a:cs typeface="Calibri" pitchFamily="34" charset="-120"/>
+              </a:rPr>
+              <a:t>      </a:t>
+            </a:r>
+            <a:pPr indent="0" marL="0">
+              <a:buNone/>
+            </a:pPr>
+            <a:r>
+              <a:rPr lang="en-US" sz="1000" b="1" spc="150" kern="0" dirty="0">
                 <a:solidFill>
                   <a:srgbClr val="C8102E"/>
                 </a:solidFill>
@@ -13065,9 +13971,9 @@
                 <a:ea typeface="Calibri" pitchFamily="34" charset="-122"/>
                 <a:cs typeface="Calibri" pitchFamily="34" charset="-120"/>
               </a:rPr>
-              <a:t>RECOMMENDATION AND IMPLEMENTATION PLAN</a:t>
-            </a:r>
-            <a:endParaRPr lang="en-US" sz="1100" dirty="0"/>
+              <a:t>4  CHOICE</a:t>
+            </a:r>
+            <a:endParaRPr lang="en-US" sz="1000" dirty="0"/>
           </a:p>
         </p:txBody>
       </p:sp>
@@ -13079,8 +13985,8 @@
         </p:nvSpPr>
         <p:spPr>
           <a:xfrm>
-            <a:off x="548640" y="566928"/>
-            <a:ext cx="11064240" cy="731520"/>
+            <a:off x="548640" y="621792"/>
+            <a:ext cx="11064240" cy="640080"/>
           </a:xfrm>
           <a:prstGeom prst="rect">
             <a:avLst/>
@@ -13096,7 +14002,7 @@
               <a:buNone/>
             </a:pPr>
             <a:r>
-              <a:rPr lang="en-US" sz="2600" b="1" dirty="0">
+              <a:rPr lang="en-US" sz="3000" b="1" dirty="0">
                 <a:solidFill>
                   <a:srgbClr val="1C1C1C"/>
                 </a:solidFill>
@@ -13104,9 +14010,9 @@
                 <a:ea typeface="Cambria" pitchFamily="34" charset="-122"/>
                 <a:cs typeface="Cambria" pitchFamily="34" charset="-120"/>
               </a:rPr>
-              <a:t>Staged integration: control AirAsia X, limit the routes, prove it first, then merge</a:t>
-            </a:r>
-            <a:endParaRPr lang="en-US" sz="2600" dirty="0"/>
+              <a:t>Recommendation and implementation plan</a:t>
+            </a:r>
+            <a:endParaRPr lang="en-US" sz="3000" dirty="0"/>
           </a:p>
         </p:txBody>
       </p:sp>
@@ -13118,12 +14024,12 @@
         </p:nvSpPr>
         <p:spPr>
           <a:xfrm>
-            <a:off x="548640" y="1463040"/>
-            <a:ext cx="11064240" cy="960120"/>
+            <a:off x="548640" y="1417320"/>
+            <a:ext cx="11064240" cy="822960"/>
           </a:xfrm>
           <a:prstGeom prst="roundRect">
             <a:avLst>
-              <a:gd name="adj" fmla="val 7619"/>
+              <a:gd name="adj" fmla="val 8889"/>
             </a:avLst>
           </a:prstGeom>
           <a:solidFill>
@@ -13145,8 +14051,8 @@
         </p:nvSpPr>
         <p:spPr>
           <a:xfrm>
-            <a:off x="777240" y="1508760"/>
-            <a:ext cx="10607040" cy="868680"/>
+            <a:off x="777240" y="1463040"/>
+            <a:ext cx="10607040" cy="731520"/>
           </a:xfrm>
           <a:prstGeom prst="rect">
             <a:avLst/>
@@ -13162,7 +14068,7 @@
               <a:buNone/>
             </a:pPr>
             <a:r>
-              <a:rPr lang="en-US" sz="1300" dirty="0">
+              <a:rPr lang="en-US" sz="1250" dirty="0">
                 <a:solidFill>
                   <a:srgbClr val="FFFFFF"/>
                 </a:solidFill>
@@ -13170,9 +14076,9 @@
                 <a:ea typeface="Calibri" pitchFamily="34" charset="-122"/>
                 <a:cs typeface="Calibri" pitchFamily="34" charset="-120"/>
               </a:rPr>
-              <a:t>Eksekusi opsi kepemilikan 30 persen pada AirAsia X, ambil kendali operasional dan komersial, batasi jaringan pada rute 4 sampai 8 jam sampai armada A350 tersedia, dan tetapkan merger penuh sebagai keputusan berbasis bukti kinerja (evidence based), bukan keyakinan pendiri.</a:t>
-            </a:r>
-            <a:endParaRPr lang="en-US" sz="1300" dirty="0"/>
+              <a:t>Eksekusi opsi kepemilikan 30 persen pada AirAsia X, ambil kendali operasional dan komersial, batasi jaringan pada rute 4 sampai 8 jam sampai armada A350 tersedia, dan tetapkan merger penuh sebagai keputusan berbasis bukti kinerja (evidence based).</a:t>
+            </a:r>
+            <a:endParaRPr lang="en-US" sz="1250" dirty="0"/>
           </a:p>
         </p:txBody>
       </p:sp>
@@ -13191,7 +14097,7 @@
           </p:nvPr>
         </p:nvGraphicFramePr>
         <p:xfrm>
-          <a:off x="548640" y="2606040"/>
+          <a:off x="548640" y="2377440"/>
           <a:ext cx="11064240" cy="914400"/>
         </p:xfrm>
         <a:graphic>
@@ -13205,7 +14111,7 @@
                 <a:gridCol w="1554480"/>
                 <a:gridCol w="3108960"/>
               </a:tblGrid>
-              <a:tr h="320040">
+              <a:tr h="301752">
                 <a:tc>
                   <a:txBody>
                     <a:bodyPr/>
@@ -13547,7 +14453,7 @@
                   </a:tcPr>
                 </a:tc>
               </a:tr>
-              <a:tr h="548640">
+              <a:tr h="530352">
                 <a:tc>
                   <a:txBody>
                     <a:bodyPr/>
@@ -13889,7 +14795,7 @@
                   </a:tcPr>
                 </a:tc>
               </a:tr>
-              <a:tr h="548640">
+              <a:tr h="530352">
                 <a:tc>
                   <a:txBody>
                     <a:bodyPr/>
@@ -14231,7 +15137,7 @@
                   </a:tcPr>
                 </a:tc>
               </a:tr>
-              <a:tr h="548640">
+              <a:tr h="530352">
                 <a:tc>
                   <a:txBody>
                     <a:bodyPr/>
@@ -14573,7 +15479,7 @@
                   </a:tcPr>
                 </a:tc>
               </a:tr>
-              <a:tr h="548640">
+              <a:tr h="530352">
                 <a:tc>
                   <a:txBody>
                     <a:bodyPr/>
@@ -14591,7 +15497,7 @@
                           <a:ea typeface="Calibri" pitchFamily="34" charset="-122"/>
                           <a:cs typeface="Calibri" pitchFamily="34" charset="-120"/>
                         </a:rPr>
-                        <a:t>Kebijakan lindung nilai bahan bakar berbasis aturan, bukan keputusan pribadi</a:t>
+                        <a:t>Kebijakan lindung nilai bahan bakar berbasis aturan</a:t>
                       </a:r>
                       <a:endParaRPr lang="en-US" sz="900" dirty="0">
                         <a:latin typeface="Calibri" charset="0"/>
@@ -14915,7 +15821,7 @@
                   </a:tcPr>
                 </a:tc>
               </a:tr>
-              <a:tr h="548640">
+              <a:tr h="530352">
                 <a:tc>
                   <a:txBody>
                     <a:bodyPr/>
@@ -15257,7 +16163,7 @@
                   </a:tcPr>
                 </a:tc>
               </a:tr>
-              <a:tr h="548640">
+              <a:tr h="530352">
                 <a:tc>
                   <a:txBody>
                     <a:bodyPr/>
@@ -15547,7 +16453,7 @@
                           <a:ea typeface="Calibri" pitchFamily="34" charset="-122"/>
                           <a:cs typeface="Calibri" pitchFamily="34" charset="-120"/>
                         </a:rPr>
-                        <a:t>Tekanan pendiri untuk mempercepat; mitigasi dengan kriteria yang dipublikasikan ke pemegang saham</a:t>
+                        <a:t>Tekanan untuk mempercepat; mitigasi dengan kriteria yang dipublikasikan ke pemegang saham</a:t>
                       </a:r>
                       <a:endParaRPr lang="en-US" sz="900" dirty="0">
                         <a:latin typeface="Calibri" charset="0"/>
@@ -15611,6 +16517,59 @@
         </p:nvSpPr>
         <p:spPr>
           <a:xfrm>
+            <a:off x="548640" y="6016752"/>
+            <a:ext cx="11064240" cy="365760"/>
+          </a:xfrm>
+          <a:prstGeom prst="rect">
+            <a:avLst/>
+          </a:prstGeom>
+          <a:noFill/>
+          <a:ln/>
+        </p:spPr>
+        <p:txBody>
+          <a:bodyPr wrap="square" lIns="0" tIns="0" rIns="0" bIns="0" rtlCol="0" anchor="ctr"/>
+          <a:lstStyle/>
+          <a:p>
+            <a:pPr indent="0" marL="0">
+              <a:buNone/>
+            </a:pPr>
+            <a:r>
+              <a:rPr lang="en-US" sz="1050" b="1" dirty="0">
+                <a:solidFill>
+                  <a:srgbClr val="C8102E"/>
+                </a:solidFill>
+                <a:latin typeface="Calibri" pitchFamily="34" charset="0"/>
+                <a:ea typeface="Calibri" pitchFamily="34" charset="-122"/>
+                <a:cs typeface="Calibri" pitchFamily="34" charset="-120"/>
+              </a:rPr>
+              <a:t>Kaitan.  </a:t>
+            </a:r>
+            <a:pPr indent="0" marL="0">
+              <a:buNone/>
+            </a:pPr>
+            <a:r>
+              <a:rPr lang="en-US" sz="1050" i="1" dirty="0">
+                <a:solidFill>
+                  <a:srgbClr val="6E6E6E"/>
+                </a:solidFill>
+                <a:latin typeface="Calibri" pitchFamily="34" charset="0"/>
+                <a:ea typeface="Calibri" pitchFamily="34" charset="-122"/>
+                <a:cs typeface="Calibri" pitchFamily="34" charset="-120"/>
+              </a:rPr>
+              <a:t>Rekomendasi ini menjawab pertanyaan strategis di slide 4. Slide berikutnya menarik pelajarannya kembali ke Bab 3.</a:t>
+            </a:r>
+            <a:endParaRPr lang="en-US" sz="1050" dirty="0"/>
+          </a:p>
+        </p:txBody>
+      </p:sp>
+      <p:sp>
+        <p:nvSpPr>
+          <p:cNvPr id="8" name="Text 5"/>
+          <p:cNvSpPr txBox="1"/>
+          <p:nvPr/>
+        </p:nvSpPr>
+        <p:spPr>
+          <a:xfrm>
             <a:off x="548640" y="6446520"/>
             <a:ext cx="7315200" cy="274320"/>
           </a:xfrm>
@@ -15644,7 +16603,7 @@
       </p:sp>
       <p:sp>
         <p:nvSpPr>
-          <p:cNvPr id="8" name="Text 5"/>
+          <p:cNvPr id="9" name="Text 6"/>
           <p:cNvSpPr txBox="1"/>
           <p:nvPr/>
         </p:nvSpPr>
@@ -15763,7 +16722,7 @@
               <a:buNone/>
             </a:pPr>
             <a:r>
-              <a:rPr lang="en-US" sz="1200" b="1" spc="200" kern="0" dirty="0">
+              <a:rPr lang="en-US" sz="1000" b="1" spc="200" kern="0" dirty="0">
                 <a:solidFill>
                   <a:srgbClr val="F1C7CF"/>
                 </a:solidFill>
@@ -15771,9 +16730,9 @@
                 <a:ea typeface="Calibri" pitchFamily="34" charset="-122"/>
                 <a:cs typeface="Calibri" pitchFamily="34" charset="-120"/>
               </a:rPr>
-              <a:t>LESSONS FOR CHAPTER 3</a:t>
-            </a:r>
-            <a:endParaRPr lang="en-US" sz="1200" dirty="0"/>
+              <a:t>STEP 4  CHOICE</a:t>
+            </a:r>
+            <a:endParaRPr lang="en-US" sz="1000" dirty="0"/>
           </a:p>
         </p:txBody>
       </p:sp>
@@ -15785,8 +16744,8 @@
         </p:nvSpPr>
         <p:spPr>
           <a:xfrm>
-            <a:off x="640080" y="822960"/>
-            <a:ext cx="10515600" cy="822960"/>
+            <a:off x="640080" y="777240"/>
+            <a:ext cx="10515600" cy="731520"/>
           </a:xfrm>
           <a:prstGeom prst="rect">
             <a:avLst/>
@@ -15810,7 +16769,7 @@
                 <a:ea typeface="Cambria" pitchFamily="34" charset="-122"/>
                 <a:cs typeface="Cambria" pitchFamily="34" charset="-120"/>
               </a:rPr>
-              <a:t>Same industry, different advantage</a:t>
+              <a:t>Lessons for Chapter 3</a:t>
             </a:r>
             <a:endParaRPr lang="en-US" sz="3200" dirty="0"/>
           </a:p>
@@ -15824,7 +16783,7 @@
         </p:nvSpPr>
         <p:spPr>
           <a:xfrm>
-            <a:off x="640080" y="1874520"/>
+            <a:off x="640080" y="1828800"/>
             <a:ext cx="384048" cy="384048"/>
           </a:xfrm>
           <a:prstGeom prst="ellipse">
@@ -15849,7 +16808,7 @@
         </p:nvSpPr>
         <p:spPr>
           <a:xfrm>
-            <a:off x="640080" y="1874520"/>
+            <a:off x="640080" y="1828800"/>
             <a:ext cx="384048" cy="384048"/>
           </a:xfrm>
           <a:prstGeom prst="rect">
@@ -15888,8 +16847,8 @@
         </p:nvSpPr>
         <p:spPr>
           <a:xfrm>
-            <a:off x="1188720" y="1828800"/>
-            <a:ext cx="4846320" cy="1463040"/>
+            <a:off x="1188720" y="1783080"/>
+            <a:ext cx="4846320" cy="1417320"/>
           </a:xfrm>
           <a:prstGeom prst="rect">
             <a:avLst/>
@@ -15944,7 +16903,7 @@
         </p:nvSpPr>
         <p:spPr>
           <a:xfrm>
-            <a:off x="6217920" y="1874520"/>
+            <a:off x="6217920" y="1828800"/>
             <a:ext cx="384048" cy="384048"/>
           </a:xfrm>
           <a:prstGeom prst="ellipse">
@@ -15969,7 +16928,7 @@
         </p:nvSpPr>
         <p:spPr>
           <a:xfrm>
-            <a:off x="6217920" y="1874520"/>
+            <a:off x="6217920" y="1828800"/>
             <a:ext cx="384048" cy="384048"/>
           </a:xfrm>
           <a:prstGeom prst="rect">
@@ -16008,8 +16967,8 @@
         </p:nvSpPr>
         <p:spPr>
           <a:xfrm>
-            <a:off x="6766560" y="1828800"/>
-            <a:ext cx="4846320" cy="1463040"/>
+            <a:off x="6766560" y="1783080"/>
+            <a:ext cx="4846320" cy="1417320"/>
           </a:xfrm>
           <a:prstGeom prst="rect">
             <a:avLst/>
@@ -16033,7 +16992,7 @@
                 <a:ea typeface="Calibri" pitchFamily="34" charset="-122"/>
                 <a:cs typeface="Calibri" pitchFamily="34" charset="-120"/>
               </a:rPr>
-              <a:t>Keunggulan biaya adalah sistem yang saling mengunci.</a:t>
+              <a:t>Keunggulan biaya adalah sistem yang saling menopang.</a:t>
             </a:r>
             <a:endParaRPr lang="en-US" sz="1300" dirty="0"/>
           </a:p>
@@ -16064,7 +17023,7 @@
         </p:nvSpPr>
         <p:spPr>
           <a:xfrm>
-            <a:off x="640080" y="3474720"/>
+            <a:off x="640080" y="3383280"/>
             <a:ext cx="384048" cy="384048"/>
           </a:xfrm>
           <a:prstGeom prst="ellipse">
@@ -16089,7 +17048,7 @@
         </p:nvSpPr>
         <p:spPr>
           <a:xfrm>
-            <a:off x="640080" y="3474720"/>
+            <a:off x="640080" y="3383280"/>
             <a:ext cx="384048" cy="384048"/>
           </a:xfrm>
           <a:prstGeom prst="rect">
@@ -16128,8 +17087,8 @@
         </p:nvSpPr>
         <p:spPr>
           <a:xfrm>
-            <a:off x="1188720" y="3429000"/>
-            <a:ext cx="4846320" cy="1463040"/>
+            <a:off x="1188720" y="3337560"/>
+            <a:ext cx="4846320" cy="1417320"/>
           </a:xfrm>
           <a:prstGeom prst="rect">
             <a:avLst/>
@@ -16170,7 +17129,7 @@
                 <a:ea typeface="Calibri" pitchFamily="34" charset="-122"/>
                 <a:cs typeface="Calibri" pitchFamily="34" charset="-120"/>
               </a:rPr>
-              <a:t>Peta kelompok strategis memperingatkan: di rute jauh, lawan AirAsia X mampu mensubsidi harga ekonomi.</a:t>
+              <a:t>Peta kelompok strategis menunjukkan bahwa di rute jauh, lawan AirAsia X mampu mensubsidi harga ekonomi.</a:t>
             </a:r>
             <a:endParaRPr lang="en-US" sz="1300" dirty="0"/>
           </a:p>
@@ -16184,7 +17143,7 @@
         </p:nvSpPr>
         <p:spPr>
           <a:xfrm>
-            <a:off x="6217920" y="3474720"/>
+            <a:off x="6217920" y="3383280"/>
             <a:ext cx="384048" cy="384048"/>
           </a:xfrm>
           <a:prstGeom prst="ellipse">
@@ -16209,7 +17168,7 @@
         </p:nvSpPr>
         <p:spPr>
           <a:xfrm>
-            <a:off x="6217920" y="3474720"/>
+            <a:off x="6217920" y="3383280"/>
             <a:ext cx="384048" cy="384048"/>
           </a:xfrm>
           <a:prstGeom prst="rect">
@@ -16248,8 +17207,8 @@
         </p:nvSpPr>
         <p:spPr>
           <a:xfrm>
-            <a:off x="6766560" y="3429000"/>
-            <a:ext cx="4846320" cy="1463040"/>
+            <a:off x="6766560" y="3337560"/>
+            <a:ext cx="4846320" cy="1417320"/>
           </a:xfrm>
           <a:prstGeom prst="rect">
             <a:avLst/>
@@ -16273,7 +17232,7 @@
                 <a:ea typeface="Calibri" pitchFamily="34" charset="-122"/>
                 <a:cs typeface="Calibri" pitchFamily="34" charset="-120"/>
               </a:rPr>
-              <a:t>Eksplorasi butuh rumah sendiri, tetapi tetap satu atap dengan eksploitasi.</a:t>
+              <a:t>Eksplorasi sebaiknya dijalankan dalam unit terpisah yang tetap dikendalikan induk.</a:t>
             </a:r>
             <a:endParaRPr lang="en-US" sz="1300" dirty="0"/>
           </a:p>
@@ -16290,7 +17249,7 @@
                 <a:ea typeface="Calibri" pitchFamily="34" charset="-122"/>
                 <a:cs typeface="Calibri" pitchFamily="34" charset="-120"/>
               </a:rPr>
-              <a:t>Lingkungan yang bergejolak dan neraca yang rapuh membuat integrasi bertahap lebih bijak daripada lompatan penuh.</a:t>
+              <a:t>Lingkungan yang berubah cepat dan neraca yang lemah membuat integrasi bertahap lebih aman daripada merger penuh.</a:t>
             </a:r>
             <a:endParaRPr lang="en-US" sz="1300" dirty="0"/>
           </a:p>
@@ -16329,7 +17288,7 @@
                 <a:ea typeface="Calibri" pitchFamily="34" charset="-122"/>
                 <a:cs typeface="Calibri" pitchFamily="34" charset="-120"/>
               </a:rPr>
-              <a:t>Apabila dirangkum dalam satu kata, kasus AirAsia adalah tentang transferabilitas: bukan semata seberapa murah, tetapi seberapa jauh kemurahan itu dapat dibawa.</a:t>
+              <a:t>Apabila dirangkum dalam satu kata, kasus AirAsia adalah tentang transferabilitas: bukan hanya seberapa rendah biayanya, tetapi seberapa jauh biaya rendah itu dapat dibawa.</a:t>
             </a:r>
             <a:endParaRPr lang="en-US" sz="1250" dirty="0"/>
           </a:p>
@@ -16507,7 +17466,7 @@
     <p:bg>
       <p:bgPr>
         <a:solidFill>
-          <a:srgbClr val="FFFFFF"/>
+          <a:srgbClr val="8E0B20"/>
         </a:solidFill>
       </p:bgPr>
     </p:bg>
@@ -16527,14 +17486,39 @@
       </p:grpSpPr>
       <p:sp>
         <p:nvSpPr>
-          <p:cNvPr id="2" name="Text 0"/>
+          <p:cNvPr id="2" name="Shape 0"/>
+          <p:cNvSpPr/>
+          <p:nvPr/>
+        </p:nvSpPr>
+        <p:spPr>
+          <a:xfrm>
+            <a:off x="8412480" y="-1463040"/>
+            <a:ext cx="5669280" cy="5669280"/>
+          </a:xfrm>
+          <a:prstGeom prst="ellipse">
+            <a:avLst/>
+          </a:prstGeom>
+          <a:solidFill>
+            <a:srgbClr val="C8102E"/>
+          </a:solidFill>
+          <a:ln w="12700">
+            <a:solidFill>
+              <a:srgbClr val="C8102E"/>
+            </a:solidFill>
+            <a:prstDash val="solid"/>
+          </a:ln>
+        </p:spPr>
+      </p:sp>
+      <p:sp>
+        <p:nvSpPr>
+          <p:cNvPr id="3" name="Text 1"/>
           <p:cNvSpPr txBox="1"/>
           <p:nvPr/>
         </p:nvSpPr>
         <p:spPr>
           <a:xfrm>
-            <a:off x="548640" y="320040"/>
-            <a:ext cx="10972800" cy="274320"/>
+            <a:off x="640080" y="2103120"/>
+            <a:ext cx="8229600" cy="1097280"/>
           </a:xfrm>
           <a:prstGeom prst="rect">
             <a:avLst/>
@@ -16550,56 +17534,17 @@
               <a:buNone/>
             </a:pPr>
             <a:r>
-              <a:rPr lang="en-US" sz="1100" b="1" spc="200" kern="0" dirty="0">
-                <a:solidFill>
-                  <a:srgbClr val="C8102E"/>
-                </a:solidFill>
-                <a:latin typeface="Calibri" pitchFamily="34" charset="0"/>
-                <a:ea typeface="Calibri" pitchFamily="34" charset="-122"/>
-                <a:cs typeface="Calibri" pitchFamily="34" charset="-120"/>
-              </a:rPr>
-              <a:t>REFERENCES</a:t>
-            </a:r>
-            <a:endParaRPr lang="en-US" sz="1100" dirty="0"/>
-          </a:p>
-        </p:txBody>
-      </p:sp>
-      <p:sp>
-        <p:nvSpPr>
-          <p:cNvPr id="3" name="Text 1"/>
-          <p:cNvSpPr txBox="1"/>
-          <p:nvPr/>
-        </p:nvSpPr>
-        <p:spPr>
-          <a:xfrm>
-            <a:off x="548640" y="566928"/>
-            <a:ext cx="11064240" cy="731520"/>
-          </a:xfrm>
-          <a:prstGeom prst="rect">
-            <a:avLst/>
-          </a:prstGeom>
-          <a:noFill/>
-          <a:ln/>
-        </p:spPr>
-        <p:txBody>
-          <a:bodyPr wrap="square" lIns="0" tIns="0" rIns="0" bIns="0" rtlCol="0" anchor="ctr"/>
-          <a:lstStyle/>
-          <a:p>
-            <a:pPr indent="0" marL="0">
-              <a:buNone/>
-            </a:pPr>
-            <a:r>
-              <a:rPr lang="en-US" sz="2600" b="1" dirty="0">
-                <a:solidFill>
-                  <a:srgbClr val="1C1C1C"/>
+              <a:rPr lang="en-US" sz="6000" b="1" dirty="0">
+                <a:solidFill>
+                  <a:srgbClr val="FFFFFF"/>
                 </a:solidFill>
                 <a:latin typeface="Cambria" pitchFamily="34" charset="0"/>
                 <a:ea typeface="Cambria" pitchFamily="34" charset="-122"/>
                 <a:cs typeface="Cambria" pitchFamily="34" charset="-120"/>
               </a:rPr>
-              <a:t>Data sources and frameworks</a:t>
-            </a:r>
-            <a:endParaRPr lang="en-US" sz="2600" dirty="0"/>
+              <a:t>Thank you</a:t>
+            </a:r>
+            <a:endParaRPr lang="en-US" sz="6000" dirty="0"/>
           </a:p>
         </p:txBody>
       </p:sp>
@@ -16611,8 +17556,8 @@
         </p:nvSpPr>
         <p:spPr>
           <a:xfrm>
-            <a:off x="548640" y="1463040"/>
-            <a:ext cx="11064240" cy="4206240"/>
+            <a:off x="640080" y="3200400"/>
+            <a:ext cx="8229600" cy="548640"/>
           </a:xfrm>
           <a:prstGeom prst="rect">
             <a:avLst/>
@@ -16621,196 +17566,24 @@
           <a:ln/>
         </p:spPr>
         <p:txBody>
-          <a:bodyPr wrap="square" lIns="0" tIns="0" rIns="0" bIns="0" rtlCol="0" anchor="t"/>
-          <a:lstStyle/>
-          <a:p>
-            <a:pPr marL="342900" indent="-342900">
-              <a:spcAft>
-                <a:spcPts val="500"/>
-              </a:spcAft>
-              <a:buSzPct val="100000"/>
-              <a:buChar char="•"/>
-            </a:pPr>
-            <a:r>
-              <a:rPr lang="en-US" sz="1200" dirty="0">
-                <a:solidFill>
-                  <a:srgbClr val="1C1C1C"/>
-                </a:solidFill>
-                <a:latin typeface="Calibri" pitchFamily="34" charset="0"/>
-                <a:ea typeface="Calibri" pitchFamily="34" charset="-122"/>
-                <a:cs typeface="Calibri" pitchFamily="34" charset="-120"/>
-              </a:rPr>
-              <a:t>Grant, R. M. (2010). AirAsia: The World's Lowest Cost Airline. Dalam Contemporary Strategy Analysis: Concepts, Techniques, Applications (Case 9). Blackwell. Seluruh angka dalam presentasi ini bersumber dari Tabel 9.1 sampai 9.5 kasus tersebut.</a:t>
-            </a:r>
-            <a:endParaRPr lang="en-US" sz="1200" dirty="0"/>
-          </a:p>
-          <a:p>
-            <a:pPr marL="342900" indent="-342900">
-              <a:spcAft>
-                <a:spcPts val="500"/>
-              </a:spcAft>
-              <a:buSzPct val="100000"/>
-              <a:buChar char="•"/>
-            </a:pPr>
-            <a:r>
-              <a:rPr lang="en-US" sz="1200" dirty="0">
-                <a:solidFill>
-                  <a:srgbClr val="1C1C1C"/>
-                </a:solidFill>
-                <a:latin typeface="Calibri" pitchFamily="34" charset="0"/>
-                <a:ea typeface="Calibri" pitchFamily="34" charset="-122"/>
-                <a:cs typeface="Calibri" pitchFamily="34" charset="-120"/>
-              </a:rPr>
-              <a:t>Thompson, A. A., dan Strickland, A. J. (2019). Strategic Management: Concepts and Cases (edisi ke-22), Bab 3: Evaluating a Company's External Environment. McGraw-Hill.</a:t>
-            </a:r>
-            <a:endParaRPr lang="en-US" sz="1200" dirty="0"/>
-          </a:p>
-          <a:p>
-            <a:pPr marL="342900" indent="-342900">
-              <a:spcAft>
-                <a:spcPts val="500"/>
-              </a:spcAft>
-              <a:buSzPct val="100000"/>
-              <a:buChar char="•"/>
-            </a:pPr>
-            <a:r>
-              <a:rPr lang="en-US" sz="1200" dirty="0">
-                <a:solidFill>
-                  <a:srgbClr val="1C1C1C"/>
-                </a:solidFill>
-                <a:latin typeface="Calibri" pitchFamily="34" charset="0"/>
-                <a:ea typeface="Calibri" pitchFamily="34" charset="-122"/>
-                <a:cs typeface="Calibri" pitchFamily="34" charset="-120"/>
-              </a:rPr>
-              <a:t>Porter, M. E. (1980). Competitive Strategy: Techniques for Analyzing Industries and Competitors. The Free Press.</a:t>
-            </a:r>
-            <a:endParaRPr lang="en-US" sz="1200" dirty="0"/>
-          </a:p>
-          <a:p>
-            <a:pPr marL="342900" indent="-342900">
-              <a:spcAft>
-                <a:spcPts val="500"/>
-              </a:spcAft>
-              <a:buSzPct val="100000"/>
-              <a:buChar char="•"/>
-            </a:pPr>
-            <a:r>
-              <a:rPr lang="en-US" sz="1200" dirty="0">
-                <a:solidFill>
-                  <a:srgbClr val="1C1C1C"/>
-                </a:solidFill>
-                <a:latin typeface="Calibri" pitchFamily="34" charset="0"/>
-                <a:ea typeface="Calibri" pitchFamily="34" charset="-122"/>
-                <a:cs typeface="Calibri" pitchFamily="34" charset="-120"/>
-              </a:rPr>
-              <a:t>March, J. G. (1991). Exploration and Exploitation in Organizational Learning. Organization Science, 2(1), 71 sampai 87.</a:t>
-            </a:r>
-            <a:endParaRPr lang="en-US" sz="1200" dirty="0"/>
-          </a:p>
-          <a:p>
-            <a:pPr marL="342900" indent="-342900">
-              <a:spcAft>
-                <a:spcPts val="500"/>
-              </a:spcAft>
-              <a:buSzPct val="100000"/>
-              <a:buChar char="•"/>
-            </a:pPr>
-            <a:r>
-              <a:rPr lang="en-US" sz="1200" dirty="0">
-                <a:solidFill>
-                  <a:srgbClr val="1C1C1C"/>
-                </a:solidFill>
-                <a:latin typeface="Calibri" pitchFamily="34" charset="0"/>
-                <a:ea typeface="Calibri" pitchFamily="34" charset="-122"/>
-                <a:cs typeface="Calibri" pitchFamily="34" charset="-120"/>
-              </a:rPr>
-              <a:t>O'Reilly, C. A., dan Tushman, M. L. (2004). The Ambidextrous Organization. Harvard Business Review, 82(4), 74 sampai 81.</a:t>
-            </a:r>
-            <a:endParaRPr lang="en-US" sz="1200" dirty="0"/>
-          </a:p>
-          <a:p>
-            <a:pPr marL="342900" indent="-342900">
-              <a:spcAft>
-                <a:spcPts val="500"/>
-              </a:spcAft>
-              <a:buSzPct val="100000"/>
-              <a:buChar char="•"/>
-            </a:pPr>
-            <a:r>
-              <a:rPr lang="en-US" sz="1200" dirty="0">
-                <a:solidFill>
-                  <a:srgbClr val="1C1C1C"/>
-                </a:solidFill>
-                <a:latin typeface="Calibri" pitchFamily="34" charset="0"/>
-                <a:ea typeface="Calibri" pitchFamily="34" charset="-122"/>
-                <a:cs typeface="Calibri" pitchFamily="34" charset="-120"/>
-              </a:rPr>
-              <a:t>Williamson, O. E. (1991). Comparative Economic Organization: The Analysis of Discrete Structural Alternatives. Administrative Science Quarterly, 36(2), 269 sampai 296.</a:t>
-            </a:r>
-            <a:endParaRPr lang="en-US" sz="1200" dirty="0"/>
-          </a:p>
-          <a:p>
-            <a:pPr marL="342900" indent="-342900">
-              <a:spcAft>
-                <a:spcPts val="500"/>
-              </a:spcAft>
-              <a:buSzPct val="100000"/>
-              <a:buChar char="•"/>
-            </a:pPr>
-            <a:r>
-              <a:rPr lang="en-US" sz="1200" dirty="0">
-                <a:solidFill>
-                  <a:srgbClr val="1C1C1C"/>
-                </a:solidFill>
-                <a:latin typeface="Calibri" pitchFamily="34" charset="0"/>
-                <a:ea typeface="Calibri" pitchFamily="34" charset="-122"/>
-                <a:cs typeface="Calibri" pitchFamily="34" charset="-120"/>
-              </a:rPr>
-              <a:t>Handoko, T. H., Indarti, N., dan Almahendra, R. (2014). Manajemen dalam Berbagai Perspektif. Erlangga.</a:t>
-            </a:r>
-            <a:endParaRPr lang="en-US" sz="1200" dirty="0"/>
-          </a:p>
-          <a:p>
-            <a:pPr marL="342900" indent="-342900">
-              <a:spcAft>
-                <a:spcPts val="500"/>
-              </a:spcAft>
-              <a:buSzPct val="100000"/>
-              <a:buChar char="•"/>
-            </a:pPr>
-            <a:r>
-              <a:rPr lang="en-US" sz="1200" dirty="0">
-                <a:solidFill>
-                  <a:srgbClr val="1C1C1C"/>
-                </a:solidFill>
-                <a:latin typeface="Calibri" pitchFamily="34" charset="0"/>
-                <a:ea typeface="Calibri" pitchFamily="34" charset="-122"/>
-                <a:cs typeface="Calibri" pitchFamily="34" charset="-120"/>
-              </a:rPr>
-              <a:t>Buchholz, S., Fabio, N., Ileyassoff, A., Mang, L., dan Visentin, D. (2009). AirAsia: Tales from a Long-haul Low Cost Carrier. Bocconi University (sebagaimana dikutip dalam kasus).</a:t>
-            </a:r>
-            <a:endParaRPr lang="en-US" sz="1200" dirty="0"/>
-          </a:p>
-          <a:p>
-            <a:pPr marL="342900" indent="-342900">
-              <a:spcAft>
-                <a:spcPts val="500"/>
-              </a:spcAft>
-              <a:buSzPct val="100000"/>
-              <a:buChar char="•"/>
-            </a:pPr>
-            <a:r>
-              <a:rPr lang="en-US" sz="1200" dirty="0">
-                <a:solidFill>
-                  <a:srgbClr val="1C1C1C"/>
-                </a:solidFill>
-                <a:latin typeface="Calibri" pitchFamily="34" charset="0"/>
-                <a:ea typeface="Calibri" pitchFamily="34" charset="-122"/>
-                <a:cs typeface="Calibri" pitchFamily="34" charset="-120"/>
-              </a:rPr>
-              <a:t>RPKPS Strategic Management MAN 5422, FEB UGM (2026), Lampiran 3: A Guide to Teaching Case Analysis.</a:t>
-            </a:r>
-            <a:endParaRPr lang="en-US" sz="1200" dirty="0"/>
+          <a:bodyPr wrap="square" lIns="0" tIns="0" rIns="0" bIns="0" rtlCol="0" anchor="ctr"/>
+          <a:lstStyle/>
+          <a:p>
+            <a:pPr indent="0" marL="0">
+              <a:buNone/>
+            </a:pPr>
+            <a:r>
+              <a:rPr lang="en-US" sz="1800" dirty="0">
+                <a:solidFill>
+                  <a:srgbClr val="F1C7CF"/>
+                </a:solidFill>
+                <a:latin typeface="Calibri" pitchFamily="34" charset="0"/>
+                <a:ea typeface="Calibri" pitchFamily="34" charset="-122"/>
+                <a:cs typeface="Calibri" pitchFamily="34" charset="-120"/>
+              </a:rPr>
+              <a:t>Terima kasih. Kami terbuka untuk pertanyaan dan diskusi.</a:t>
+            </a:r>
+            <a:endParaRPr lang="en-US" sz="1800" dirty="0"/>
           </a:p>
         </p:txBody>
       </p:sp>
@@ -16822,8 +17595,8 @@
         </p:nvSpPr>
         <p:spPr>
           <a:xfrm>
-            <a:off x="548640" y="5715000"/>
-            <a:ext cx="11064240" cy="548640"/>
+            <a:off x="640080" y="4572000"/>
+            <a:ext cx="10058400" cy="1463040"/>
           </a:xfrm>
           <a:prstGeom prst="rect">
             <a:avLst/>
@@ -16839,17 +17612,85 @@
               <a:buNone/>
             </a:pPr>
             <a:r>
-              <a:rPr lang="en-US" sz="1050" i="1" dirty="0">
-                <a:solidFill>
-                  <a:srgbClr val="6E6E6E"/>
-                </a:solidFill>
-                <a:latin typeface="Calibri" pitchFamily="34" charset="0"/>
-                <a:ea typeface="Calibri" pitchFamily="34" charset="-122"/>
-                <a:cs typeface="Calibri" pitchFamily="34" charset="-120"/>
-              </a:rPr>
-              <a:t>Batasan analisis: seluruh data berhenti pada pertengahan 2009 sesuai kasus. Perkembangan AirAsia X setelah itu sengaja tidak dimasukkan agar analisis konsisten dengan informasi yang tersedia bagi manajemen saat keputusan harus diambil.</a:t>
-            </a:r>
-            <a:endParaRPr lang="en-US" sz="1050" dirty="0"/>
+              <a:rPr lang="en-US" sz="1400" b="1" dirty="0">
+                <a:solidFill>
+                  <a:srgbClr val="FFFFFF"/>
+                </a:solidFill>
+                <a:latin typeface="Calibri" pitchFamily="34" charset="0"/>
+                <a:ea typeface="Calibri" pitchFamily="34" charset="-122"/>
+                <a:cs typeface="Calibri" pitchFamily="34" charset="-120"/>
+              </a:rPr>
+              <a:t>Kelompok 3</a:t>
+            </a:r>
+            <a:endParaRPr lang="en-US" sz="1400" dirty="0"/>
+          </a:p>
+          <a:p>
+            <a:pPr indent="0" marL="0">
+              <a:buNone/>
+            </a:pPr>
+            <a:r>
+              <a:rPr lang="en-US" sz="1200" dirty="0">
+                <a:solidFill>
+                  <a:srgbClr val="FFFFFF"/>
+                </a:solidFill>
+                <a:latin typeface="Calibri" pitchFamily="34" charset="0"/>
+                <a:ea typeface="Calibri" pitchFamily="34" charset="-122"/>
+                <a:cs typeface="Calibri" pitchFamily="34" charset="-120"/>
+              </a:rPr>
+              <a:t>Tifani Puspita  |  Dara Astrini Rahayu K  |  Happy Dinithasari  |  Aslih Abnuri</a:t>
+            </a:r>
+            <a:endParaRPr lang="en-US" sz="1400" dirty="0"/>
+          </a:p>
+          <a:p>
+            <a:pPr indent="0" marL="0">
+              <a:buNone/>
+            </a:pPr>
+            <a:r>
+              <a:rPr lang="en-US" sz="600" dirty="0">
+                <a:solidFill>
+                  <a:srgbClr val="FFFFFF"/>
+                </a:solidFill>
+                <a:latin typeface="Calibri" pitchFamily="34" charset="0"/>
+                <a:ea typeface="Calibri" pitchFamily="34" charset="-122"/>
+                <a:cs typeface="Calibri" pitchFamily="34" charset="-120"/>
+              </a:rPr>
+              <a:t> </a:t>
+            </a:r>
+            <a:endParaRPr lang="en-US" sz="1400" dirty="0"/>
+          </a:p>
+          <a:p>
+            <a:pPr indent="0" marL="0">
+              <a:buNone/>
+            </a:pPr>
+            <a:r>
+              <a:rPr lang="en-US" sz="1100" dirty="0">
+                <a:solidFill>
+                  <a:srgbClr val="FFFFFF"/>
+                </a:solidFill>
+                <a:latin typeface="Calibri" pitchFamily="34" charset="0"/>
+                <a:ea typeface="Calibri" pitchFamily="34" charset="-122"/>
+                <a:cs typeface="Calibri" pitchFamily="34" charset="-120"/>
+              </a:rPr>
+              <a:t>Strategic Management (MAN 5422), Program Magister Manajemen, Fakultas Ekonomika dan Bisnis, Universitas Gadjah Mada</a:t>
+            </a:r>
+            <a:endParaRPr lang="en-US" sz="1400" dirty="0"/>
+          </a:p>
+          <a:p>
+            <a:pPr indent="0" marL="0">
+              <a:buNone/>
+            </a:pPr>
+            <a:r>
+              <a:rPr lang="en-US" sz="1100" dirty="0">
+                <a:solidFill>
+                  <a:srgbClr val="FFFFFF"/>
+                </a:solidFill>
+                <a:latin typeface="Calibri" pitchFamily="34" charset="0"/>
+                <a:ea typeface="Calibri" pitchFamily="34" charset="-122"/>
+                <a:cs typeface="Calibri" pitchFamily="34" charset="-120"/>
+              </a:rPr>
+              <a:t>Sumber data: Grant, R. M. (2010), AirAsia: The World's Lowest Cost Airline, Case 9, Tabel 9.1 sampai 9.5.</a:t>
+            </a:r>
+            <a:endParaRPr lang="en-US" sz="1400" dirty="0"/>
           </a:p>
         </p:txBody>
       </p:sp>
@@ -16880,7 +17721,7 @@
             <a:r>
               <a:rPr lang="en-US" sz="900" dirty="0">
                 <a:solidFill>
-                  <a:srgbClr val="6E6E6E"/>
+                  <a:srgbClr val="F1C7CF"/>
                 </a:solidFill>
                 <a:latin typeface="Calibri" pitchFamily="34" charset="0"/>
                 <a:ea typeface="Calibri" pitchFamily="34" charset="-122"/>
@@ -16919,7 +17760,7 @@
             <a:r>
               <a:rPr lang="en-US" sz="900" dirty="0">
                 <a:solidFill>
-                  <a:srgbClr val="6E6E6E"/>
+                  <a:srgbClr val="F1C7CF"/>
                 </a:solidFill>
                 <a:latin typeface="Calibri" pitchFamily="34" charset="0"/>
                 <a:ea typeface="Calibri" pitchFamily="34" charset="-122"/>
@@ -16971,8 +17812,8 @@
         </p:nvSpPr>
         <p:spPr>
           <a:xfrm>
-            <a:off x="548640" y="320040"/>
-            <a:ext cx="10972800" cy="274320"/>
+            <a:off x="548640" y="621792"/>
+            <a:ext cx="11064240" cy="640080"/>
           </a:xfrm>
           <a:prstGeom prst="rect">
             <a:avLst/>
@@ -16988,46 +17829,7 @@
               <a:buNone/>
             </a:pPr>
             <a:r>
-              <a:rPr lang="en-US" sz="1100" b="1" spc="200" kern="0" dirty="0">
-                <a:solidFill>
-                  <a:srgbClr val="C8102E"/>
-                </a:solidFill>
-                <a:latin typeface="Calibri" pitchFamily="34" charset="0"/>
-                <a:ea typeface="Calibri" pitchFamily="34" charset="-122"/>
-                <a:cs typeface="Calibri" pitchFamily="34" charset="-120"/>
-              </a:rPr>
-              <a:t>ANALYTICAL FRAMEWORK</a:t>
-            </a:r>
-            <a:endParaRPr lang="en-US" sz="1100" dirty="0"/>
-          </a:p>
-        </p:txBody>
-      </p:sp>
-      <p:sp>
-        <p:nvSpPr>
-          <p:cNvPr id="3" name="Text 1"/>
-          <p:cNvSpPr txBox="1"/>
-          <p:nvPr/>
-        </p:nvSpPr>
-        <p:spPr>
-          <a:xfrm>
-            <a:off x="548640" y="566928"/>
-            <a:ext cx="11064240" cy="731520"/>
-          </a:xfrm>
-          <a:prstGeom prst="rect">
-            <a:avLst/>
-          </a:prstGeom>
-          <a:noFill/>
-          <a:ln/>
-        </p:spPr>
-        <p:txBody>
-          <a:bodyPr wrap="square" lIns="0" tIns="0" rIns="0" bIns="0" rtlCol="0" anchor="ctr"/>
-          <a:lstStyle/>
-          <a:p>
-            <a:pPr indent="0" marL="0">
-              <a:buNone/>
-            </a:pPr>
-            <a:r>
-              <a:rPr lang="en-US" sz="2600" b="1" dirty="0">
+              <a:rPr lang="en-US" sz="3000" b="1" dirty="0">
                 <a:solidFill>
                   <a:srgbClr val="1C1C1C"/>
                 </a:solidFill>
@@ -17035,26 +17837,26 @@
                 <a:ea typeface="Cambria" pitchFamily="34" charset="-122"/>
                 <a:cs typeface="Cambria" pitchFamily="34" charset="-120"/>
               </a:rPr>
-              <a:t>Reading the word 'lowest cost' through a different lens</a:t>
-            </a:r>
-            <a:endParaRPr lang="en-US" sz="2600" dirty="0"/>
-          </a:p>
-        </p:txBody>
-      </p:sp>
-      <p:sp>
-        <p:nvSpPr>
-          <p:cNvPr id="4" name="Shape 2"/>
+              <a:t>How we read the case</a:t>
+            </a:r>
+            <a:endParaRPr lang="en-US" sz="3000" dirty="0"/>
+          </a:p>
+        </p:txBody>
+      </p:sp>
+      <p:sp>
+        <p:nvSpPr>
+          <p:cNvPr id="3" name="Shape 1"/>
           <p:cNvSpPr/>
           <p:nvPr/>
         </p:nvSpPr>
         <p:spPr>
           <a:xfrm>
             <a:off x="548640" y="1417320"/>
-            <a:ext cx="11064240" cy="914400"/>
+            <a:ext cx="11064240" cy="868680"/>
           </a:xfrm>
           <a:prstGeom prst="roundRect">
             <a:avLst>
-              <a:gd name="adj" fmla="val 8000"/>
+              <a:gd name="adj" fmla="val 8421"/>
             </a:avLst>
           </a:prstGeom>
           <a:solidFill>
@@ -17070,14 +17872,14 @@
       </p:sp>
       <p:sp>
         <p:nvSpPr>
-          <p:cNvPr id="5" name="Text 3"/>
+          <p:cNvPr id="4" name="Text 2"/>
           <p:cNvSpPr txBox="1"/>
           <p:nvPr/>
         </p:nvSpPr>
         <p:spPr>
           <a:xfrm>
             <a:off x="777240" y="1472184"/>
-            <a:ext cx="10607040" cy="804672"/>
+            <a:ext cx="10607040" cy="758952"/>
           </a:xfrm>
           <a:prstGeom prst="rect">
             <a:avLst/>
@@ -17101,7 +17903,7 @@
                 <a:ea typeface="Calibri" pitchFamily="34" charset="-122"/>
                 <a:cs typeface="Calibri" pitchFamily="34" charset="-120"/>
               </a:rPr>
-              <a:t>Reframing. </a:t>
+              <a:t>Titik berangkat. </a:t>
             </a:r>
             <a:pPr indent="0" marL="0">
               <a:buNone/>
@@ -17115,7 +17917,7 @@
                 <a:ea typeface="Calibri" pitchFamily="34" charset="-122"/>
                 <a:cs typeface="Calibri" pitchFamily="34" charset="-120"/>
               </a:rPr>
-              <a:t>Predikat lowest cost airline sering dibaca sebagai kelemahan, seolah AirAsia sekadar menjual murah. Dengan kacamata yang lebih tepat, murah adalah buah dari disiplin biaya (cost discipline) yang sistematis. Pertanyaannya bukan mengapa AirAsia murah, melainkan apakah sistem yang membuatnya murah dapat dipindahkan (transferable) ke medan yang berbeda.</a:t>
+              <a:t>Predikat lowest cost airline sering dibaca sebagai kelemahan, seolah AirAsia hanya menjual murah. Dibaca dengan tepat, murah adalah hasil dari disiplin biaya (cost discipline) yang sistematis. Pertanyaannya bukan mengapa AirAsia murah, melainkan apakah sistem yang membuatnya murah dapat dipindahkan (transferable) ke medan yang berbeda.</a:t>
             </a:r>
             <a:endParaRPr lang="en-US" sz="1150" dirty="0"/>
           </a:p>
@@ -17123,14 +17925,14 @@
       </p:sp>
       <p:sp>
         <p:nvSpPr>
-          <p:cNvPr id="6" name="Shape 4"/>
+          <p:cNvPr id="5" name="Shape 3"/>
           <p:cNvSpPr/>
           <p:nvPr/>
         </p:nvSpPr>
         <p:spPr>
           <a:xfrm>
-            <a:off x="548640" y="2560320"/>
-            <a:ext cx="2651760" cy="2880360"/>
+            <a:off x="548640" y="2514600"/>
+            <a:ext cx="2651760" cy="2743200"/>
           </a:xfrm>
           <a:prstGeom prst="roundRect">
             <a:avLst>
@@ -17150,13 +17952,13 @@
       </p:sp>
       <p:sp>
         <p:nvSpPr>
-          <p:cNvPr id="7" name="Shape 5"/>
+          <p:cNvPr id="6" name="Shape 4"/>
           <p:cNvSpPr/>
           <p:nvPr/>
         </p:nvSpPr>
         <p:spPr>
           <a:xfrm>
-            <a:off x="731520" y="2724912"/>
+            <a:off x="731520" y="2679192"/>
             <a:ext cx="384048" cy="384048"/>
           </a:xfrm>
           <a:prstGeom prst="ellipse">
@@ -17175,14 +17977,53 @@
       </p:sp>
       <p:sp>
         <p:nvSpPr>
+          <p:cNvPr id="7" name="Text 5"/>
+          <p:cNvSpPr txBox="1"/>
+          <p:nvPr/>
+        </p:nvSpPr>
+        <p:spPr>
+          <a:xfrm>
+            <a:off x="731520" y="2679192"/>
+            <a:ext cx="384048" cy="384048"/>
+          </a:xfrm>
+          <a:prstGeom prst="rect">
+            <a:avLst/>
+          </a:prstGeom>
+          <a:noFill/>
+          <a:ln/>
+        </p:spPr>
+        <p:txBody>
+          <a:bodyPr wrap="square" lIns="0" tIns="0" rIns="0" bIns="0" rtlCol="0" anchor="ctr"/>
+          <a:lstStyle/>
+          <a:p>
+            <a:pPr algn="ctr" indent="0" marL="0">
+              <a:buNone/>
+            </a:pPr>
+            <a:r>
+              <a:rPr lang="en-US" sz="1300" b="1" dirty="0">
+                <a:solidFill>
+                  <a:srgbClr val="FFFFFF"/>
+                </a:solidFill>
+                <a:latin typeface="Calibri" pitchFamily="34" charset="0"/>
+                <a:ea typeface="Calibri" pitchFamily="34" charset="-122"/>
+                <a:cs typeface="Calibri" pitchFamily="34" charset="-120"/>
+              </a:rPr>
+              <a:t>1</a:t>
+            </a:r>
+            <a:endParaRPr lang="en-US" sz="1300" dirty="0"/>
+          </a:p>
+        </p:txBody>
+      </p:sp>
+      <p:sp>
+        <p:nvSpPr>
           <p:cNvPr id="8" name="Text 6"/>
           <p:cNvSpPr txBox="1"/>
           <p:nvPr/>
         </p:nvSpPr>
         <p:spPr>
           <a:xfrm>
-            <a:off x="731520" y="2724912"/>
-            <a:ext cx="384048" cy="384048"/>
+            <a:off x="1234440" y="2651760"/>
+            <a:ext cx="1828800" cy="457200"/>
           </a:xfrm>
           <a:prstGeom prst="rect">
             <a:avLst/>
@@ -17194,21 +18035,21 @@
           <a:bodyPr wrap="square" lIns="0" tIns="0" rIns="0" bIns="0" rtlCol="0" anchor="ctr"/>
           <a:lstStyle/>
           <a:p>
-            <a:pPr algn="ctr" indent="0" marL="0">
-              <a:buNone/>
-            </a:pPr>
-            <a:r>
-              <a:rPr lang="en-US" sz="1300" b="1" dirty="0">
-                <a:solidFill>
-                  <a:srgbClr val="FFFFFF"/>
-                </a:solidFill>
-                <a:latin typeface="Calibri" pitchFamily="34" charset="0"/>
-                <a:ea typeface="Calibri" pitchFamily="34" charset="-122"/>
-                <a:cs typeface="Calibri" pitchFamily="34" charset="-120"/>
-              </a:rPr>
-              <a:t>1</a:t>
-            </a:r>
-            <a:endParaRPr lang="en-US" sz="1300" dirty="0"/>
+            <a:pPr indent="0" marL="0">
+              <a:buNone/>
+            </a:pPr>
+            <a:r>
+              <a:rPr lang="en-US" sz="1350" b="1" dirty="0">
+                <a:solidFill>
+                  <a:srgbClr val="1C1C1C"/>
+                </a:solidFill>
+                <a:latin typeface="Calibri" pitchFamily="34" charset="0"/>
+                <a:ea typeface="Calibri" pitchFamily="34" charset="-122"/>
+                <a:cs typeface="Calibri" pitchFamily="34" charset="-120"/>
+              </a:rPr>
+              <a:t>Problem</a:t>
+            </a:r>
+            <a:endParaRPr lang="en-US" sz="1350" dirty="0"/>
           </a:p>
         </p:txBody>
       </p:sp>
@@ -17220,8 +18061,8 @@
         </p:nvSpPr>
         <p:spPr>
           <a:xfrm>
-            <a:off x="1234440" y="2697480"/>
-            <a:ext cx="1828800" cy="457200"/>
+            <a:off x="749808" y="3200400"/>
+            <a:ext cx="2286000" cy="1554480"/>
           </a:xfrm>
           <a:prstGeom prst="rect">
             <a:avLst/>
@@ -17230,14 +18071,14 @@
           <a:ln/>
         </p:spPr>
         <p:txBody>
-          <a:bodyPr wrap="square" lIns="0" tIns="0" rIns="0" bIns="0" rtlCol="0" anchor="ctr"/>
-          <a:lstStyle/>
-          <a:p>
-            <a:pPr indent="0" marL="0">
-              <a:buNone/>
-            </a:pPr>
-            <a:r>
-              <a:rPr lang="en-US" sz="1350" b="1" dirty="0">
+          <a:bodyPr wrap="square" lIns="0" tIns="0" rIns="0" bIns="0" rtlCol="0" anchor="t"/>
+          <a:lstStyle/>
+          <a:p>
+            <a:pPr indent="0" marL="0">
+              <a:buNone/>
+            </a:pPr>
+            <a:r>
+              <a:rPr lang="en-US" sz="1100" dirty="0">
                 <a:solidFill>
                   <a:srgbClr val="1C1C1C"/>
                 </a:solidFill>
@@ -17245,9 +18086,9 @@
                 <a:ea typeface="Calibri" pitchFamily="34" charset="-122"/>
                 <a:cs typeface="Calibri" pitchFamily="34" charset="-120"/>
               </a:rPr>
-              <a:t>Rumusan masalah</a:t>
-            </a:r>
-            <a:endParaRPr lang="en-US" sz="1350" dirty="0"/>
+              <a:t>Tujuan (goals) yang ingin dicapai AirAsia dan hambatan (barriers) yang menghalanginya.</a:t>
+            </a:r>
+            <a:endParaRPr lang="en-US" sz="1100" dirty="0"/>
           </a:p>
         </p:txBody>
       </p:sp>
@@ -17259,8 +18100,8 @@
         </p:nvSpPr>
         <p:spPr>
           <a:xfrm>
-            <a:off x="749808" y="3246120"/>
-            <a:ext cx="2286000" cy="1600200"/>
+            <a:off x="749808" y="4754880"/>
+            <a:ext cx="2286000" cy="411480"/>
           </a:xfrm>
           <a:prstGeom prst="rect">
             <a:avLst/>
@@ -17269,45 +18110,6 @@
           <a:ln/>
         </p:spPr>
         <p:txBody>
-          <a:bodyPr wrap="square" lIns="0" tIns="0" rIns="0" bIns="0" rtlCol="0" anchor="t"/>
-          <a:lstStyle/>
-          <a:p>
-            <a:pPr indent="0" marL="0">
-              <a:buNone/>
-            </a:pPr>
-            <a:r>
-              <a:rPr lang="en-US" sz="1100" dirty="0">
-                <a:solidFill>
-                  <a:srgbClr val="1C1C1C"/>
-                </a:solidFill>
-                <a:latin typeface="Calibri" pitchFamily="34" charset="0"/>
-                <a:ea typeface="Calibri" pitchFamily="34" charset="-122"/>
-                <a:cs typeface="Calibri" pitchFamily="34" charset="-120"/>
-              </a:rPr>
-              <a:t>Tujuan (goals) yang ingin dicapai AirAsia dan hambatan (barriers) yang menghalanginya.</a:t>
-            </a:r>
-            <a:endParaRPr lang="en-US" sz="1100" dirty="0"/>
-          </a:p>
-        </p:txBody>
-      </p:sp>
-      <p:sp>
-        <p:nvSpPr>
-          <p:cNvPr id="11" name="Text 9"/>
-          <p:cNvSpPr txBox="1"/>
-          <p:nvPr/>
-        </p:nvSpPr>
-        <p:spPr>
-          <a:xfrm>
-            <a:off x="749808" y="4892040"/>
-            <a:ext cx="2286000" cy="457200"/>
-          </a:xfrm>
-          <a:prstGeom prst="rect">
-            <a:avLst/>
-          </a:prstGeom>
-          <a:noFill/>
-          <a:ln/>
-        </p:spPr>
-        <p:txBody>
           <a:bodyPr wrap="square" lIns="0" tIns="0" rIns="0" bIns="0" rtlCol="0" anchor="b"/>
           <a:lstStyle/>
           <a:p>
@@ -17323,7 +18125,7 @@
                 <a:ea typeface="Calibri" pitchFamily="34" charset="-122"/>
                 <a:cs typeface="Calibri" pitchFamily="34" charset="-120"/>
               </a:rPr>
-              <a:t>Panduan analisis kasus RPKPS</a:t>
+              <a:t>Slide 3 sampai 4</a:t>
             </a:r>
             <a:endParaRPr lang="en-US" sz="950" dirty="0"/>
           </a:p>
@@ -17331,14 +18133,14 @@
       </p:sp>
       <p:sp>
         <p:nvSpPr>
-          <p:cNvPr id="12" name="Shape 10"/>
+          <p:cNvPr id="11" name="Shape 9"/>
           <p:cNvSpPr/>
           <p:nvPr/>
         </p:nvSpPr>
         <p:spPr>
           <a:xfrm>
-            <a:off x="3383280" y="2560320"/>
-            <a:ext cx="2651760" cy="2880360"/>
+            <a:off x="3383280" y="2514600"/>
+            <a:ext cx="2651760" cy="2743200"/>
           </a:xfrm>
           <a:prstGeom prst="roundRect">
             <a:avLst>
@@ -17358,13 +18160,13 @@
       </p:sp>
       <p:sp>
         <p:nvSpPr>
-          <p:cNvPr id="13" name="Shape 11"/>
+          <p:cNvPr id="12" name="Shape 10"/>
           <p:cNvSpPr/>
           <p:nvPr/>
         </p:nvSpPr>
         <p:spPr>
           <a:xfrm>
-            <a:off x="3566160" y="2724912"/>
+            <a:off x="3566160" y="2679192"/>
             <a:ext cx="384048" cy="384048"/>
           </a:xfrm>
           <a:prstGeom prst="ellipse">
@@ -17383,14 +18185,53 @@
       </p:sp>
       <p:sp>
         <p:nvSpPr>
+          <p:cNvPr id="13" name="Text 11"/>
+          <p:cNvSpPr txBox="1"/>
+          <p:nvPr/>
+        </p:nvSpPr>
+        <p:spPr>
+          <a:xfrm>
+            <a:off x="3566160" y="2679192"/>
+            <a:ext cx="384048" cy="384048"/>
+          </a:xfrm>
+          <a:prstGeom prst="rect">
+            <a:avLst/>
+          </a:prstGeom>
+          <a:noFill/>
+          <a:ln/>
+        </p:spPr>
+        <p:txBody>
+          <a:bodyPr wrap="square" lIns="0" tIns="0" rIns="0" bIns="0" rtlCol="0" anchor="ctr"/>
+          <a:lstStyle/>
+          <a:p>
+            <a:pPr algn="ctr" indent="0" marL="0">
+              <a:buNone/>
+            </a:pPr>
+            <a:r>
+              <a:rPr lang="en-US" sz="1300" b="1" dirty="0">
+                <a:solidFill>
+                  <a:srgbClr val="FFFFFF"/>
+                </a:solidFill>
+                <a:latin typeface="Calibri" pitchFamily="34" charset="0"/>
+                <a:ea typeface="Calibri" pitchFamily="34" charset="-122"/>
+                <a:cs typeface="Calibri" pitchFamily="34" charset="-120"/>
+              </a:rPr>
+              <a:t>2</a:t>
+            </a:r>
+            <a:endParaRPr lang="en-US" sz="1300" dirty="0"/>
+          </a:p>
+        </p:txBody>
+      </p:sp>
+      <p:sp>
+        <p:nvSpPr>
           <p:cNvPr id="14" name="Text 12"/>
           <p:cNvSpPr txBox="1"/>
           <p:nvPr/>
         </p:nvSpPr>
         <p:spPr>
           <a:xfrm>
-            <a:off x="3566160" y="2724912"/>
-            <a:ext cx="384048" cy="384048"/>
+            <a:off x="4069080" y="2651760"/>
+            <a:ext cx="1828800" cy="457200"/>
           </a:xfrm>
           <a:prstGeom prst="rect">
             <a:avLst/>
@@ -17402,21 +18243,21 @@
           <a:bodyPr wrap="square" lIns="0" tIns="0" rIns="0" bIns="0" rtlCol="0" anchor="ctr"/>
           <a:lstStyle/>
           <a:p>
-            <a:pPr algn="ctr" indent="0" marL="0">
-              <a:buNone/>
-            </a:pPr>
-            <a:r>
-              <a:rPr lang="en-US" sz="1300" b="1" dirty="0">
-                <a:solidFill>
-                  <a:srgbClr val="FFFFFF"/>
-                </a:solidFill>
-                <a:latin typeface="Calibri" pitchFamily="34" charset="0"/>
-                <a:ea typeface="Calibri" pitchFamily="34" charset="-122"/>
-                <a:cs typeface="Calibri" pitchFamily="34" charset="-120"/>
-              </a:rPr>
-              <a:t>2</a:t>
-            </a:r>
-            <a:endParaRPr lang="en-US" sz="1300" dirty="0"/>
+            <a:pPr indent="0" marL="0">
+              <a:buNone/>
+            </a:pPr>
+            <a:r>
+              <a:rPr lang="en-US" sz="1350" b="1" dirty="0">
+                <a:solidFill>
+                  <a:srgbClr val="1C1C1C"/>
+                </a:solidFill>
+                <a:latin typeface="Calibri" pitchFamily="34" charset="0"/>
+                <a:ea typeface="Calibri" pitchFamily="34" charset="-122"/>
+                <a:cs typeface="Calibri" pitchFamily="34" charset="-120"/>
+              </a:rPr>
+              <a:t>External environment</a:t>
+            </a:r>
+            <a:endParaRPr lang="en-US" sz="1350" dirty="0"/>
           </a:p>
         </p:txBody>
       </p:sp>
@@ -17428,8 +18269,8 @@
         </p:nvSpPr>
         <p:spPr>
           <a:xfrm>
-            <a:off x="4069080" y="2697480"/>
-            <a:ext cx="1828800" cy="457200"/>
+            <a:off x="3584448" y="3200400"/>
+            <a:ext cx="2286000" cy="1554480"/>
           </a:xfrm>
           <a:prstGeom prst="rect">
             <a:avLst/>
@@ -17438,14 +18279,14 @@
           <a:ln/>
         </p:spPr>
         <p:txBody>
-          <a:bodyPr wrap="square" lIns="0" tIns="0" rIns="0" bIns="0" rtlCol="0" anchor="ctr"/>
-          <a:lstStyle/>
-          <a:p>
-            <a:pPr indent="0" marL="0">
-              <a:buNone/>
-            </a:pPr>
-            <a:r>
-              <a:rPr lang="en-US" sz="1350" b="1" dirty="0">
+          <a:bodyPr wrap="square" lIns="0" tIns="0" rIns="0" bIns="0" rtlCol="0" anchor="t"/>
+          <a:lstStyle/>
+          <a:p>
+            <a:pPr indent="0" marL="0">
+              <a:buNone/>
+            </a:pPr>
+            <a:r>
+              <a:rPr lang="en-US" sz="1100" dirty="0">
                 <a:solidFill>
                   <a:srgbClr val="1C1C1C"/>
                 </a:solidFill>
@@ -17453,9 +18294,9 @@
                 <a:ea typeface="Calibri" pitchFamily="34" charset="-122"/>
                 <a:cs typeface="Calibri" pitchFamily="34" charset="-120"/>
               </a:rPr>
-              <a:t>Lingkungan eksternal</a:t>
-            </a:r>
-            <a:endParaRPr lang="en-US" sz="1350" dirty="0"/>
+              <a:t>PESTEL, Five Forces dalam logika Structure Conduct Performance, kekuatan pendorong (driving forces), peta kelompok strategis, faktor kunci keberhasilan.</a:t>
+            </a:r>
+            <a:endParaRPr lang="en-US" sz="1100" dirty="0"/>
           </a:p>
         </p:txBody>
       </p:sp>
@@ -17467,8 +18308,8 @@
         </p:nvSpPr>
         <p:spPr>
           <a:xfrm>
-            <a:off x="3584448" y="3246120"/>
-            <a:ext cx="2286000" cy="1600200"/>
+            <a:off x="3584448" y="4754880"/>
+            <a:ext cx="2286000" cy="411480"/>
           </a:xfrm>
           <a:prstGeom prst="rect">
             <a:avLst/>
@@ -17477,45 +18318,6 @@
           <a:ln/>
         </p:spPr>
         <p:txBody>
-          <a:bodyPr wrap="square" lIns="0" tIns="0" rIns="0" bIns="0" rtlCol="0" anchor="t"/>
-          <a:lstStyle/>
-          <a:p>
-            <a:pPr indent="0" marL="0">
-              <a:buNone/>
-            </a:pPr>
-            <a:r>
-              <a:rPr lang="en-US" sz="1100" dirty="0">
-                <a:solidFill>
-                  <a:srgbClr val="1C1C1C"/>
-                </a:solidFill>
-                <a:latin typeface="Calibri" pitchFamily="34" charset="0"/>
-                <a:ea typeface="Calibri" pitchFamily="34" charset="-122"/>
-                <a:cs typeface="Calibri" pitchFamily="34" charset="-120"/>
-              </a:rPr>
-              <a:t>PESTEL, Five Forces dalam logika Structure Conduct Performance, kekuatan pendorong (driving forces), peta kelompok strategis, faktor kunci keberhasilan.</a:t>
-            </a:r>
-            <a:endParaRPr lang="en-US" sz="1100" dirty="0"/>
-          </a:p>
-        </p:txBody>
-      </p:sp>
-      <p:sp>
-        <p:nvSpPr>
-          <p:cNvPr id="17" name="Text 15"/>
-          <p:cNvSpPr txBox="1"/>
-          <p:nvPr/>
-        </p:nvSpPr>
-        <p:spPr>
-          <a:xfrm>
-            <a:off x="3584448" y="4892040"/>
-            <a:ext cx="2286000" cy="457200"/>
-          </a:xfrm>
-          <a:prstGeom prst="rect">
-            <a:avLst/>
-          </a:prstGeom>
-          <a:noFill/>
-          <a:ln/>
-        </p:spPr>
-        <p:txBody>
           <a:bodyPr wrap="square" lIns="0" tIns="0" rIns="0" bIns="0" rtlCol="0" anchor="b"/>
           <a:lstStyle/>
           <a:p>
@@ -17531,7 +18333,7 @@
                 <a:ea typeface="Calibri" pitchFamily="34" charset="-122"/>
                 <a:cs typeface="Calibri" pitchFamily="34" charset="-120"/>
               </a:rPr>
-              <a:t>Thompson dan Strickland Bab 3</a:t>
+              <a:t>Slide 5 sampai 8</a:t>
             </a:r>
             <a:endParaRPr lang="en-US" sz="950" dirty="0"/>
           </a:p>
@@ -17539,14 +18341,14 @@
       </p:sp>
       <p:sp>
         <p:nvSpPr>
-          <p:cNvPr id="18" name="Shape 16"/>
+          <p:cNvPr id="17" name="Shape 15"/>
           <p:cNvSpPr/>
           <p:nvPr/>
         </p:nvSpPr>
         <p:spPr>
           <a:xfrm>
-            <a:off x="6217920" y="2560320"/>
-            <a:ext cx="2651760" cy="2880360"/>
+            <a:off x="6217920" y="2514600"/>
+            <a:ext cx="2651760" cy="2743200"/>
           </a:xfrm>
           <a:prstGeom prst="roundRect">
             <a:avLst>
@@ -17566,13 +18368,13 @@
       </p:sp>
       <p:sp>
         <p:nvSpPr>
-          <p:cNvPr id="19" name="Shape 17"/>
+          <p:cNvPr id="18" name="Shape 16"/>
           <p:cNvSpPr/>
           <p:nvPr/>
         </p:nvSpPr>
         <p:spPr>
           <a:xfrm>
-            <a:off x="6400800" y="2724912"/>
+            <a:off x="6400800" y="2679192"/>
             <a:ext cx="384048" cy="384048"/>
           </a:xfrm>
           <a:prstGeom prst="ellipse">
@@ -17591,14 +18393,53 @@
       </p:sp>
       <p:sp>
         <p:nvSpPr>
+          <p:cNvPr id="19" name="Text 17"/>
+          <p:cNvSpPr txBox="1"/>
+          <p:nvPr/>
+        </p:nvSpPr>
+        <p:spPr>
+          <a:xfrm>
+            <a:off x="6400800" y="2679192"/>
+            <a:ext cx="384048" cy="384048"/>
+          </a:xfrm>
+          <a:prstGeom prst="rect">
+            <a:avLst/>
+          </a:prstGeom>
+          <a:noFill/>
+          <a:ln/>
+        </p:spPr>
+        <p:txBody>
+          <a:bodyPr wrap="square" lIns="0" tIns="0" rIns="0" bIns="0" rtlCol="0" anchor="ctr"/>
+          <a:lstStyle/>
+          <a:p>
+            <a:pPr algn="ctr" indent="0" marL="0">
+              <a:buNone/>
+            </a:pPr>
+            <a:r>
+              <a:rPr lang="en-US" sz="1300" b="1" dirty="0">
+                <a:solidFill>
+                  <a:srgbClr val="FFFFFF"/>
+                </a:solidFill>
+                <a:latin typeface="Calibri" pitchFamily="34" charset="0"/>
+                <a:ea typeface="Calibri" pitchFamily="34" charset="-122"/>
+                <a:cs typeface="Calibri" pitchFamily="34" charset="-120"/>
+              </a:rPr>
+              <a:t>3</a:t>
+            </a:r>
+            <a:endParaRPr lang="en-US" sz="1300" dirty="0"/>
+          </a:p>
+        </p:txBody>
+      </p:sp>
+      <p:sp>
+        <p:nvSpPr>
           <p:cNvPr id="20" name="Text 18"/>
           <p:cNvSpPr txBox="1"/>
           <p:nvPr/>
         </p:nvSpPr>
         <p:spPr>
           <a:xfrm>
-            <a:off x="6400800" y="2724912"/>
-            <a:ext cx="384048" cy="384048"/>
+            <a:off x="6903720" y="2651760"/>
+            <a:ext cx="1828800" cy="457200"/>
           </a:xfrm>
           <a:prstGeom prst="rect">
             <a:avLst/>
@@ -17610,21 +18451,21 @@
           <a:bodyPr wrap="square" lIns="0" tIns="0" rIns="0" bIns="0" rtlCol="0" anchor="ctr"/>
           <a:lstStyle/>
           <a:p>
-            <a:pPr algn="ctr" indent="0" marL="0">
-              <a:buNone/>
-            </a:pPr>
-            <a:r>
-              <a:rPr lang="en-US" sz="1300" b="1" dirty="0">
-                <a:solidFill>
-                  <a:srgbClr val="FFFFFF"/>
-                </a:solidFill>
-                <a:latin typeface="Calibri" pitchFamily="34" charset="0"/>
-                <a:ea typeface="Calibri" pitchFamily="34" charset="-122"/>
-                <a:cs typeface="Calibri" pitchFamily="34" charset="-120"/>
-              </a:rPr>
-              <a:t>3</a:t>
-            </a:r>
-            <a:endParaRPr lang="en-US" sz="1300" dirty="0"/>
+            <a:pPr indent="0" marL="0">
+              <a:buNone/>
+            </a:pPr>
+            <a:r>
+              <a:rPr lang="en-US" sz="1350" b="1" dirty="0">
+                <a:solidFill>
+                  <a:srgbClr val="1C1C1C"/>
+                </a:solidFill>
+                <a:latin typeface="Calibri" pitchFamily="34" charset="0"/>
+                <a:ea typeface="Calibri" pitchFamily="34" charset="-122"/>
+                <a:cs typeface="Calibri" pitchFamily="34" charset="-120"/>
+              </a:rPr>
+              <a:t>Cost position</a:t>
+            </a:r>
+            <a:endParaRPr lang="en-US" sz="1350" dirty="0"/>
           </a:p>
         </p:txBody>
       </p:sp>
@@ -17636,8 +18477,8 @@
         </p:nvSpPr>
         <p:spPr>
           <a:xfrm>
-            <a:off x="6903720" y="2697480"/>
-            <a:ext cx="1828800" cy="457200"/>
+            <a:off x="6419088" y="3200400"/>
+            <a:ext cx="2286000" cy="1554480"/>
           </a:xfrm>
           <a:prstGeom prst="rect">
             <a:avLst/>
@@ -17646,14 +18487,14 @@
           <a:ln/>
         </p:spPr>
         <p:txBody>
-          <a:bodyPr wrap="square" lIns="0" tIns="0" rIns="0" bIns="0" rtlCol="0" anchor="ctr"/>
-          <a:lstStyle/>
-          <a:p>
-            <a:pPr indent="0" marL="0">
-              <a:buNone/>
-            </a:pPr>
-            <a:r>
-              <a:rPr lang="en-US" sz="1350" b="1" dirty="0">
+          <a:bodyPr wrap="square" lIns="0" tIns="0" rIns="0" bIns="0" rtlCol="0" anchor="t"/>
+          <a:lstStyle/>
+          <a:p>
+            <a:pPr indent="0" marL="0">
+              <a:buNone/>
+            </a:pPr>
+            <a:r>
+              <a:rPr lang="en-US" sz="1100" dirty="0">
                 <a:solidFill>
                   <a:srgbClr val="1C1C1C"/>
                 </a:solidFill>
@@ -17661,9 +18502,9 @@
                 <a:ea typeface="Calibri" pitchFamily="34" charset="-122"/>
                 <a:cs typeface="Calibri" pitchFamily="34" charset="-120"/>
               </a:rPr>
-              <a:t>Posisi biaya AirAsia</a:t>
-            </a:r>
-            <a:endParaRPr lang="en-US" sz="1350" dirty="0"/>
+              <a:t>Benchmarking terhadap Malaysia Airlines, sumber keunggulan biaya, uji transferabilitas ke rute jauh, dan bukti awal di rute KL London.</a:t>
+            </a:r>
+            <a:endParaRPr lang="en-US" sz="1100" dirty="0"/>
           </a:p>
         </p:txBody>
       </p:sp>
@@ -17675,8 +18516,8 @@
         </p:nvSpPr>
         <p:spPr>
           <a:xfrm>
-            <a:off x="6419088" y="3246120"/>
-            <a:ext cx="2286000" cy="1600200"/>
+            <a:off x="6419088" y="4754880"/>
+            <a:ext cx="2286000" cy="411480"/>
           </a:xfrm>
           <a:prstGeom prst="rect">
             <a:avLst/>
@@ -17685,45 +18526,6 @@
           <a:ln/>
         </p:spPr>
         <p:txBody>
-          <a:bodyPr wrap="square" lIns="0" tIns="0" rIns="0" bIns="0" rtlCol="0" anchor="t"/>
-          <a:lstStyle/>
-          <a:p>
-            <a:pPr indent="0" marL="0">
-              <a:buNone/>
-            </a:pPr>
-            <a:r>
-              <a:rPr lang="en-US" sz="1100" dirty="0">
-                <a:solidFill>
-                  <a:srgbClr val="1C1C1C"/>
-                </a:solidFill>
-                <a:latin typeface="Calibri" pitchFamily="34" charset="0"/>
-                <a:ea typeface="Calibri" pitchFamily="34" charset="-122"/>
-                <a:cs typeface="Calibri" pitchFamily="34" charset="-120"/>
-              </a:rPr>
-              <a:t>Benchmarking terhadap Malaysia Airlines dan pesaing jarak jauh untuk menguji seberapa nyata keunggulan biaya itu, lalu uji transferabilitas.</a:t>
-            </a:r>
-            <a:endParaRPr lang="en-US" sz="1100" dirty="0"/>
-          </a:p>
-        </p:txBody>
-      </p:sp>
-      <p:sp>
-        <p:nvSpPr>
-          <p:cNvPr id="23" name="Text 21"/>
-          <p:cNvSpPr txBox="1"/>
-          <p:nvPr/>
-        </p:nvSpPr>
-        <p:spPr>
-          <a:xfrm>
-            <a:off x="6419088" y="4892040"/>
-            <a:ext cx="2286000" cy="457200"/>
-          </a:xfrm>
-          <a:prstGeom prst="rect">
-            <a:avLst/>
-          </a:prstGeom>
-          <a:noFill/>
-          <a:ln/>
-        </p:spPr>
-        <p:txBody>
           <a:bodyPr wrap="square" lIns="0" tIns="0" rIns="0" bIns="0" rtlCol="0" anchor="b"/>
           <a:lstStyle/>
           <a:p>
@@ -17739,7 +18541,7 @@
                 <a:ea typeface="Calibri" pitchFamily="34" charset="-122"/>
                 <a:cs typeface="Calibri" pitchFamily="34" charset="-120"/>
               </a:rPr>
-              <a:t>Grant Bab 4, Tabel 9.1 sampai 9.5</a:t>
+              <a:t>Slide 9 sampai 12</a:t>
             </a:r>
             <a:endParaRPr lang="en-US" sz="950" dirty="0"/>
           </a:p>
@@ -17747,14 +18549,14 @@
       </p:sp>
       <p:sp>
         <p:nvSpPr>
-          <p:cNvPr id="24" name="Shape 22"/>
+          <p:cNvPr id="23" name="Shape 21"/>
           <p:cNvSpPr/>
           <p:nvPr/>
         </p:nvSpPr>
         <p:spPr>
           <a:xfrm>
-            <a:off x="9052560" y="2560320"/>
-            <a:ext cx="2651760" cy="2880360"/>
+            <a:off x="9052560" y="2514600"/>
+            <a:ext cx="2651760" cy="2743200"/>
           </a:xfrm>
           <a:prstGeom prst="roundRect">
             <a:avLst>
@@ -17774,13 +18576,13 @@
       </p:sp>
       <p:sp>
         <p:nvSpPr>
-          <p:cNvPr id="25" name="Shape 23"/>
+          <p:cNvPr id="24" name="Shape 22"/>
           <p:cNvSpPr/>
           <p:nvPr/>
         </p:nvSpPr>
         <p:spPr>
           <a:xfrm>
-            <a:off x="9235440" y="2724912"/>
+            <a:off x="9235440" y="2679192"/>
             <a:ext cx="384048" cy="384048"/>
           </a:xfrm>
           <a:prstGeom prst="ellipse">
@@ -17799,14 +18601,53 @@
       </p:sp>
       <p:sp>
         <p:nvSpPr>
+          <p:cNvPr id="25" name="Text 23"/>
+          <p:cNvSpPr txBox="1"/>
+          <p:nvPr/>
+        </p:nvSpPr>
+        <p:spPr>
+          <a:xfrm>
+            <a:off x="9235440" y="2679192"/>
+            <a:ext cx="384048" cy="384048"/>
+          </a:xfrm>
+          <a:prstGeom prst="rect">
+            <a:avLst/>
+          </a:prstGeom>
+          <a:noFill/>
+          <a:ln/>
+        </p:spPr>
+        <p:txBody>
+          <a:bodyPr wrap="square" lIns="0" tIns="0" rIns="0" bIns="0" rtlCol="0" anchor="ctr"/>
+          <a:lstStyle/>
+          <a:p>
+            <a:pPr algn="ctr" indent="0" marL="0">
+              <a:buNone/>
+            </a:pPr>
+            <a:r>
+              <a:rPr lang="en-US" sz="1300" b="1" dirty="0">
+                <a:solidFill>
+                  <a:srgbClr val="FFFFFF"/>
+                </a:solidFill>
+                <a:latin typeface="Calibri" pitchFamily="34" charset="0"/>
+                <a:ea typeface="Calibri" pitchFamily="34" charset="-122"/>
+                <a:cs typeface="Calibri" pitchFamily="34" charset="-120"/>
+              </a:rPr>
+              <a:t>4</a:t>
+            </a:r>
+            <a:endParaRPr lang="en-US" sz="1300" dirty="0"/>
+          </a:p>
+        </p:txBody>
+      </p:sp>
+      <p:sp>
+        <p:nvSpPr>
           <p:cNvPr id="26" name="Text 24"/>
           <p:cNvSpPr txBox="1"/>
           <p:nvPr/>
         </p:nvSpPr>
         <p:spPr>
           <a:xfrm>
-            <a:off x="9235440" y="2724912"/>
-            <a:ext cx="384048" cy="384048"/>
+            <a:off x="9738360" y="2651760"/>
+            <a:ext cx="1828800" cy="457200"/>
           </a:xfrm>
           <a:prstGeom prst="rect">
             <a:avLst/>
@@ -17818,21 +18659,21 @@
           <a:bodyPr wrap="square" lIns="0" tIns="0" rIns="0" bIns="0" rtlCol="0" anchor="ctr"/>
           <a:lstStyle/>
           <a:p>
-            <a:pPr algn="ctr" indent="0" marL="0">
-              <a:buNone/>
-            </a:pPr>
-            <a:r>
-              <a:rPr lang="en-US" sz="1300" b="1" dirty="0">
-                <a:solidFill>
-                  <a:srgbClr val="FFFFFF"/>
-                </a:solidFill>
-                <a:latin typeface="Calibri" pitchFamily="34" charset="0"/>
-                <a:ea typeface="Calibri" pitchFamily="34" charset="-122"/>
-                <a:cs typeface="Calibri" pitchFamily="34" charset="-120"/>
-              </a:rPr>
-              <a:t>4</a:t>
-            </a:r>
-            <a:endParaRPr lang="en-US" sz="1300" dirty="0"/>
+            <a:pPr indent="0" marL="0">
+              <a:buNone/>
+            </a:pPr>
+            <a:r>
+              <a:rPr lang="en-US" sz="1350" b="1" dirty="0">
+                <a:solidFill>
+                  <a:srgbClr val="1C1C1C"/>
+                </a:solidFill>
+                <a:latin typeface="Calibri" pitchFamily="34" charset="0"/>
+                <a:ea typeface="Calibri" pitchFamily="34" charset="-122"/>
+                <a:cs typeface="Calibri" pitchFamily="34" charset="-120"/>
+              </a:rPr>
+              <a:t>Choice</a:t>
+            </a:r>
+            <a:endParaRPr lang="en-US" sz="1350" dirty="0"/>
           </a:p>
         </p:txBody>
       </p:sp>
@@ -17844,8 +18685,8 @@
         </p:nvSpPr>
         <p:spPr>
           <a:xfrm>
-            <a:off x="9738360" y="2697480"/>
-            <a:ext cx="1828800" cy="457200"/>
+            <a:off x="9253728" y="3200400"/>
+            <a:ext cx="2286000" cy="1554480"/>
           </a:xfrm>
           <a:prstGeom prst="rect">
             <a:avLst/>
@@ -17854,14 +18695,14 @@
           <a:ln/>
         </p:spPr>
         <p:txBody>
-          <a:bodyPr wrap="square" lIns="0" tIns="0" rIns="0" bIns="0" rtlCol="0" anchor="ctr"/>
-          <a:lstStyle/>
-          <a:p>
-            <a:pPr indent="0" marL="0">
-              <a:buNone/>
-            </a:pPr>
-            <a:r>
-              <a:rPr lang="en-US" sz="1350" b="1" dirty="0">
+          <a:bodyPr wrap="square" lIns="0" tIns="0" rIns="0" bIns="0" rtlCol="0" anchor="t"/>
+          <a:lstStyle/>
+          <a:p>
+            <a:pPr indent="0" marL="0">
+              <a:buNone/>
+            </a:pPr>
+            <a:r>
+              <a:rPr lang="en-US" sz="1100" dirty="0">
                 <a:solidFill>
                   <a:srgbClr val="1C1C1C"/>
                 </a:solidFill>
@@ -17869,9 +18710,9 @@
                 <a:ea typeface="Calibri" pitchFamily="34" charset="-122"/>
                 <a:cs typeface="Calibri" pitchFamily="34" charset="-120"/>
               </a:rPr>
-              <a:t>Isu, alternatif, rekomendasi</a:t>
-            </a:r>
-            <a:endParaRPr lang="en-US" sz="1350" dirty="0"/>
+              <a:t>Isu sebagai pertanyaan, tiga alternatif dinilai dengan kriteria yang sama, satu rekomendasi dengan KPI, waktu, penanggung jawab, dan mitigasi risiko.</a:t>
+            </a:r>
+            <a:endParaRPr lang="en-US" sz="1100" dirty="0"/>
           </a:p>
         </p:txBody>
       </p:sp>
@@ -17883,8 +18724,8 @@
         </p:nvSpPr>
         <p:spPr>
           <a:xfrm>
-            <a:off x="9253728" y="3246120"/>
-            <a:ext cx="2286000" cy="1600200"/>
+            <a:off x="9253728" y="4754880"/>
+            <a:ext cx="2286000" cy="411480"/>
           </a:xfrm>
           <a:prstGeom prst="rect">
             <a:avLst/>
@@ -17893,24 +18734,24 @@
           <a:ln/>
         </p:spPr>
         <p:txBody>
-          <a:bodyPr wrap="square" lIns="0" tIns="0" rIns="0" bIns="0" rtlCol="0" anchor="t"/>
-          <a:lstStyle/>
-          <a:p>
-            <a:pPr indent="0" marL="0">
-              <a:buNone/>
-            </a:pPr>
-            <a:r>
-              <a:rPr lang="en-US" sz="1100" dirty="0">
-                <a:solidFill>
-                  <a:srgbClr val="1C1C1C"/>
-                </a:solidFill>
-                <a:latin typeface="Calibri" pitchFamily="34" charset="0"/>
-                <a:ea typeface="Calibri" pitchFamily="34" charset="-122"/>
-                <a:cs typeface="Calibri" pitchFamily="34" charset="-120"/>
-              </a:rPr>
-              <a:t>Isu sebagai pertanyaan, alternatif dinilai dengan kriteria yang sama, satu rekomendasi dengan KPI, waktu, penanggung jawab, dan mitigasi risiko.</a:t>
-            </a:r>
-            <a:endParaRPr lang="en-US" sz="1100" dirty="0"/>
+          <a:bodyPr wrap="square" lIns="0" tIns="0" rIns="0" bIns="0" rtlCol="0" anchor="b"/>
+          <a:lstStyle/>
+          <a:p>
+            <a:pPr indent="0" marL="0">
+              <a:buNone/>
+            </a:pPr>
+            <a:r>
+              <a:rPr lang="en-US" sz="950" i="1" dirty="0">
+                <a:solidFill>
+                  <a:srgbClr val="C8102E"/>
+                </a:solidFill>
+                <a:latin typeface="Calibri" pitchFamily="34" charset="0"/>
+                <a:ea typeface="Calibri" pitchFamily="34" charset="-122"/>
+                <a:cs typeface="Calibri" pitchFamily="34" charset="-120"/>
+              </a:rPr>
+              <a:t>Slide 13 sampai 17</a:t>
+            </a:r>
+            <a:endParaRPr lang="en-US" sz="950" dirty="0"/>
           </a:p>
         </p:txBody>
       </p:sp>
@@ -17922,8 +18763,8 @@
         </p:nvSpPr>
         <p:spPr>
           <a:xfrm>
-            <a:off x="9253728" y="4892040"/>
-            <a:ext cx="2286000" cy="457200"/>
+            <a:off x="548640" y="5394960"/>
+            <a:ext cx="11064240" cy="548640"/>
           </a:xfrm>
           <a:prstGeom prst="rect">
             <a:avLst/>
@@ -17932,24 +18773,24 @@
           <a:ln/>
         </p:spPr>
         <p:txBody>
-          <a:bodyPr wrap="square" lIns="0" tIns="0" rIns="0" bIns="0" rtlCol="0" anchor="b"/>
-          <a:lstStyle/>
-          <a:p>
-            <a:pPr indent="0" marL="0">
-              <a:buNone/>
-            </a:pPr>
-            <a:r>
-              <a:rPr lang="en-US" sz="950" i="1" dirty="0">
-                <a:solidFill>
-                  <a:srgbClr val="C8102E"/>
-                </a:solidFill>
-                <a:latin typeface="Calibri" pitchFamily="34" charset="0"/>
-                <a:ea typeface="Calibri" pitchFamily="34" charset="-122"/>
-                <a:cs typeface="Calibri" pitchFamily="34" charset="-120"/>
-              </a:rPr>
-              <a:t>Lensa exploration dan exploitation</a:t>
-            </a:r>
-            <a:endParaRPr lang="en-US" sz="950" dirty="0"/>
+          <a:bodyPr wrap="square" lIns="0" tIns="0" rIns="0" bIns="0" rtlCol="0" anchor="ctr"/>
+          <a:lstStyle/>
+          <a:p>
+            <a:pPr indent="0" marL="0">
+              <a:buNone/>
+            </a:pPr>
+            <a:r>
+              <a:rPr lang="en-US" sz="1050" i="1" dirty="0">
+                <a:solidFill>
+                  <a:srgbClr val="6E6E6E"/>
+                </a:solidFill>
+                <a:latin typeface="Calibri" pitchFamily="34" charset="0"/>
+                <a:ea typeface="Calibri" pitchFamily="34" charset="-122"/>
+                <a:cs typeface="Calibri" pitchFamily="34" charset="-120"/>
+              </a:rPr>
+              <a:t>Urutan ini mengikuti logika Structure Conduct Performance: struktur industri dibaca lebih dulu, baru posisi perusahaan di dalamnya, baru pilihan strategi. Kerangka dari Thompson dan Strickland Bab 3 serta panduan analisis kasus RPKPS. Seluruh angka bersumber dari tabel dalam kasus.</a:t>
+            </a:r>
+            <a:endParaRPr lang="en-US" sz="1050" dirty="0"/>
           </a:p>
         </p:txBody>
       </p:sp>
@@ -17961,8 +18802,8 @@
         </p:nvSpPr>
         <p:spPr>
           <a:xfrm>
-            <a:off x="548640" y="5623560"/>
-            <a:ext cx="11064240" cy="548640"/>
+            <a:off x="548640" y="6016752"/>
+            <a:ext cx="11064240" cy="365760"/>
           </a:xfrm>
           <a:prstGeom prst="rect">
             <a:avLst/>
@@ -17978,7 +18819,21 @@
               <a:buNone/>
             </a:pPr>
             <a:r>
-              <a:rPr lang="en-US" sz="1100" i="1" dirty="0">
+              <a:rPr lang="en-US" sz="1050" b="1" dirty="0">
+                <a:solidFill>
+                  <a:srgbClr val="C8102E"/>
+                </a:solidFill>
+                <a:latin typeface="Calibri" pitchFamily="34" charset="0"/>
+                <a:ea typeface="Calibri" pitchFamily="34" charset="-122"/>
+                <a:cs typeface="Calibri" pitchFamily="34" charset="-120"/>
+              </a:rPr>
+              <a:t>Kaitan.  </a:t>
+            </a:r>
+            <a:pPr indent="0" marL="0">
+              <a:buNone/>
+            </a:pPr>
+            <a:r>
+              <a:rPr lang="en-US" sz="1050" i="1" dirty="0">
                 <a:solidFill>
                   <a:srgbClr val="6E6E6E"/>
                 </a:solidFill>
@@ -17986,9 +18841,9 @@
                 <a:ea typeface="Calibri" pitchFamily="34" charset="-122"/>
                 <a:cs typeface="Calibri" pitchFamily="34" charset="-120"/>
               </a:rPr>
-              <a:t>Pemahaman konseptual dari buku teks dilengkapi pemahaman kontekstual dari data kasus. Seluruh angka bersumber dari tabel dalam kasus, tanpa data tambahan dari luar.</a:t>
-            </a:r>
-            <a:endParaRPr lang="en-US" sz="1100" dirty="0"/>
+              <a:t>Tahap pertama dimulai dengan mengenal perusahaannya: seberapa besar AirAsia pada 2009 dan dari mana keberhasilannya berasal.</a:t>
+            </a:r>
+            <a:endParaRPr lang="en-US" sz="1050" dirty="0"/>
           </a:p>
         </p:txBody>
       </p:sp>
@@ -18111,7 +18966,7 @@
         <p:spPr>
           <a:xfrm>
             <a:off x="548640" y="320040"/>
-            <a:ext cx="10972800" cy="274320"/>
+            <a:ext cx="11064240" cy="274320"/>
           </a:xfrm>
           <a:prstGeom prst="rect">
             <a:avLst/>
@@ -18127,7 +18982,7 @@
               <a:buNone/>
             </a:pPr>
             <a:r>
-              <a:rPr lang="en-US" sz="1100" b="1" spc="200" kern="0" dirty="0">
+              <a:rPr lang="en-US" sz="1000" b="1" spc="150" kern="0" dirty="0">
                 <a:solidFill>
                   <a:srgbClr val="C8102E"/>
                 </a:solidFill>
@@ -18135,9 +18990,93 @@
                 <a:ea typeface="Calibri" pitchFamily="34" charset="-122"/>
                 <a:cs typeface="Calibri" pitchFamily="34" charset="-120"/>
               </a:rPr>
-              <a:t>COMPANY CONTEXT</a:t>
-            </a:r>
-            <a:endParaRPr lang="en-US" sz="1100" dirty="0"/>
+              <a:t>1  PROBLEM</a:t>
+            </a:r>
+            <a:pPr indent="0" marL="0">
+              <a:buNone/>
+            </a:pPr>
+            <a:r>
+              <a:rPr lang="en-US" sz="1000" spc="150" kern="0" dirty="0">
+                <a:solidFill>
+                  <a:srgbClr val="B5B5B5"/>
+                </a:solidFill>
+                <a:latin typeface="Calibri" pitchFamily="34" charset="0"/>
+                <a:ea typeface="Calibri" pitchFamily="34" charset="-122"/>
+                <a:cs typeface="Calibri" pitchFamily="34" charset="-120"/>
+              </a:rPr>
+              <a:t>      </a:t>
+            </a:r>
+            <a:pPr indent="0" marL="0">
+              <a:buNone/>
+            </a:pPr>
+            <a:r>
+              <a:rPr lang="en-US" sz="1000" spc="150" kern="0" dirty="0">
+                <a:solidFill>
+                  <a:srgbClr val="B5B5B5"/>
+                </a:solidFill>
+                <a:latin typeface="Calibri" pitchFamily="34" charset="0"/>
+                <a:ea typeface="Calibri" pitchFamily="34" charset="-122"/>
+                <a:cs typeface="Calibri" pitchFamily="34" charset="-120"/>
+              </a:rPr>
+              <a:t>2  EXTERNAL ENVIRONMENT</a:t>
+            </a:r>
+            <a:pPr indent="0" marL="0">
+              <a:buNone/>
+            </a:pPr>
+            <a:r>
+              <a:rPr lang="en-US" sz="1000" spc="150" kern="0" dirty="0">
+                <a:solidFill>
+                  <a:srgbClr val="B5B5B5"/>
+                </a:solidFill>
+                <a:latin typeface="Calibri" pitchFamily="34" charset="0"/>
+                <a:ea typeface="Calibri" pitchFamily="34" charset="-122"/>
+                <a:cs typeface="Calibri" pitchFamily="34" charset="-120"/>
+              </a:rPr>
+              <a:t>      </a:t>
+            </a:r>
+            <a:pPr indent="0" marL="0">
+              <a:buNone/>
+            </a:pPr>
+            <a:r>
+              <a:rPr lang="en-US" sz="1000" spc="150" kern="0" dirty="0">
+                <a:solidFill>
+                  <a:srgbClr val="B5B5B5"/>
+                </a:solidFill>
+                <a:latin typeface="Calibri" pitchFamily="34" charset="0"/>
+                <a:ea typeface="Calibri" pitchFamily="34" charset="-122"/>
+                <a:cs typeface="Calibri" pitchFamily="34" charset="-120"/>
+              </a:rPr>
+              <a:t>3  COST POSITION</a:t>
+            </a:r>
+            <a:pPr indent="0" marL="0">
+              <a:buNone/>
+            </a:pPr>
+            <a:r>
+              <a:rPr lang="en-US" sz="1000" spc="150" kern="0" dirty="0">
+                <a:solidFill>
+                  <a:srgbClr val="B5B5B5"/>
+                </a:solidFill>
+                <a:latin typeface="Calibri" pitchFamily="34" charset="0"/>
+                <a:ea typeface="Calibri" pitchFamily="34" charset="-122"/>
+                <a:cs typeface="Calibri" pitchFamily="34" charset="-120"/>
+              </a:rPr>
+              <a:t>      </a:t>
+            </a:r>
+            <a:pPr indent="0" marL="0">
+              <a:buNone/>
+            </a:pPr>
+            <a:r>
+              <a:rPr lang="en-US" sz="1000" spc="150" kern="0" dirty="0">
+                <a:solidFill>
+                  <a:srgbClr val="B5B5B5"/>
+                </a:solidFill>
+                <a:latin typeface="Calibri" pitchFamily="34" charset="0"/>
+                <a:ea typeface="Calibri" pitchFamily="34" charset="-122"/>
+                <a:cs typeface="Calibri" pitchFamily="34" charset="-120"/>
+              </a:rPr>
+              <a:t>4  CHOICE</a:t>
+            </a:r>
+            <a:endParaRPr lang="en-US" sz="1000" dirty="0"/>
           </a:p>
         </p:txBody>
       </p:sp>
@@ -18149,8 +19088,8 @@
         </p:nvSpPr>
         <p:spPr>
           <a:xfrm>
-            <a:off x="548640" y="566928"/>
-            <a:ext cx="11064240" cy="731520"/>
+            <a:off x="548640" y="621792"/>
+            <a:ext cx="11064240" cy="640080"/>
           </a:xfrm>
           <a:prstGeom prst="rect">
             <a:avLst/>
@@ -18166,7 +19105,7 @@
               <a:buNone/>
             </a:pPr>
             <a:r>
-              <a:rPr lang="en-US" sz="2600" b="1" dirty="0">
+              <a:rPr lang="en-US" sz="3000" b="1" dirty="0">
                 <a:solidFill>
                   <a:srgbClr val="1C1C1C"/>
                 </a:solidFill>
@@ -18174,9 +19113,9 @@
                 <a:ea typeface="Cambria" pitchFamily="34" charset="-122"/>
                 <a:cs typeface="Cambria" pitchFamily="34" charset="-120"/>
               </a:rPr>
-              <a:t>Seven years after the relaunch, AirAsia is Asia's most successful LCC</a:t>
-            </a:r>
-            <a:endParaRPr lang="en-US" sz="2600" dirty="0"/>
+              <a:t>AirAsia at a glance</a:t>
+            </a:r>
+            <a:endParaRPr lang="en-US" sz="3000" dirty="0"/>
           </a:p>
         </p:txBody>
       </p:sp>
@@ -18188,12 +19127,12 @@
         </p:nvSpPr>
         <p:spPr>
           <a:xfrm>
-            <a:off x="548640" y="1508760"/>
-            <a:ext cx="2651760" cy="1600200"/>
+            <a:off x="548640" y="1463040"/>
+            <a:ext cx="2651760" cy="1554480"/>
           </a:xfrm>
           <a:prstGeom prst="roundRect">
             <a:avLst>
-              <a:gd name="adj" fmla="val 4571"/>
+              <a:gd name="adj" fmla="val 4706"/>
             </a:avLst>
           </a:prstGeom>
           <a:solidFill>
@@ -18215,7 +19154,7 @@
         </p:nvSpPr>
         <p:spPr>
           <a:xfrm>
-            <a:off x="731520" y="1600200"/>
+            <a:off x="731520" y="1536192"/>
             <a:ext cx="2286000" cy="685800"/>
           </a:xfrm>
           <a:prstGeom prst="rect">
@@ -18254,7 +19193,7 @@
         </p:nvSpPr>
         <p:spPr>
           <a:xfrm>
-            <a:off x="731520" y="2331720"/>
+            <a:off x="731520" y="2240280"/>
             <a:ext cx="2286000" cy="685800"/>
           </a:xfrm>
           <a:prstGeom prst="rect">
@@ -18293,12 +19232,12 @@
         </p:nvSpPr>
         <p:spPr>
           <a:xfrm>
-            <a:off x="3383280" y="1508760"/>
-            <a:ext cx="2651760" cy="1600200"/>
+            <a:off x="3383280" y="1463040"/>
+            <a:ext cx="2651760" cy="1554480"/>
           </a:xfrm>
           <a:prstGeom prst="roundRect">
             <a:avLst>
-              <a:gd name="adj" fmla="val 4571"/>
+              <a:gd name="adj" fmla="val 4706"/>
             </a:avLst>
           </a:prstGeom>
           <a:solidFill>
@@ -18320,7 +19259,7 @@
         </p:nvSpPr>
         <p:spPr>
           <a:xfrm>
-            <a:off x="3566160" y="1600200"/>
+            <a:off x="3566160" y="1536192"/>
             <a:ext cx="2286000" cy="685800"/>
           </a:xfrm>
           <a:prstGeom prst="rect">
@@ -18359,7 +19298,7 @@
         </p:nvSpPr>
         <p:spPr>
           <a:xfrm>
-            <a:off x="3566160" y="2331720"/>
+            <a:off x="3566160" y="2240280"/>
             <a:ext cx="2286000" cy="685800"/>
           </a:xfrm>
           <a:prstGeom prst="rect">
@@ -18398,12 +19337,12 @@
         </p:nvSpPr>
         <p:spPr>
           <a:xfrm>
-            <a:off x="6217920" y="1508760"/>
-            <a:ext cx="2651760" cy="1600200"/>
+            <a:off x="6217920" y="1463040"/>
+            <a:ext cx="2651760" cy="1554480"/>
           </a:xfrm>
           <a:prstGeom prst="roundRect">
             <a:avLst>
-              <a:gd name="adj" fmla="val 4571"/>
+              <a:gd name="adj" fmla="val 4706"/>
             </a:avLst>
           </a:prstGeom>
           <a:solidFill>
@@ -18425,7 +19364,7 @@
         </p:nvSpPr>
         <p:spPr>
           <a:xfrm>
-            <a:off x="6400800" y="1600200"/>
+            <a:off x="6400800" y="1536192"/>
             <a:ext cx="2286000" cy="685800"/>
           </a:xfrm>
           <a:prstGeom prst="rect">
@@ -18464,7 +19403,7 @@
         </p:nvSpPr>
         <p:spPr>
           <a:xfrm>
-            <a:off x="6400800" y="2331720"/>
+            <a:off x="6400800" y="2240280"/>
             <a:ext cx="2286000" cy="685800"/>
           </a:xfrm>
           <a:prstGeom prst="rect">
@@ -18503,12 +19442,12 @@
         </p:nvSpPr>
         <p:spPr>
           <a:xfrm>
-            <a:off x="9052560" y="1508760"/>
-            <a:ext cx="2651760" cy="1600200"/>
+            <a:off x="9052560" y="1463040"/>
+            <a:ext cx="2651760" cy="1554480"/>
           </a:xfrm>
           <a:prstGeom prst="roundRect">
             <a:avLst>
-              <a:gd name="adj" fmla="val 4571"/>
+              <a:gd name="adj" fmla="val 4706"/>
             </a:avLst>
           </a:prstGeom>
           <a:solidFill>
@@ -18530,7 +19469,7 @@
         </p:nvSpPr>
         <p:spPr>
           <a:xfrm>
-            <a:off x="9235440" y="1600200"/>
+            <a:off x="9235440" y="1536192"/>
             <a:ext cx="2286000" cy="685800"/>
           </a:xfrm>
           <a:prstGeom prst="rect">
@@ -18569,7 +19508,7 @@
         </p:nvSpPr>
         <p:spPr>
           <a:xfrm>
-            <a:off x="9235440" y="2331720"/>
+            <a:off x="9235440" y="2240280"/>
             <a:ext cx="2286000" cy="685800"/>
           </a:xfrm>
           <a:prstGeom prst="rect">
@@ -18608,7 +19547,7 @@
         </p:nvSpPr>
         <p:spPr>
           <a:xfrm>
-            <a:off x="548640" y="3383280"/>
+            <a:off x="548640" y="3246120"/>
             <a:ext cx="4572000" cy="365760"/>
           </a:xfrm>
           <a:prstGeom prst="rect">
@@ -18647,8 +19586,8 @@
         </p:nvSpPr>
         <p:spPr>
           <a:xfrm>
-            <a:off x="548640" y="3749040"/>
-            <a:ext cx="6766560" cy="2560320"/>
+            <a:off x="548640" y="3611880"/>
+            <a:ext cx="6766560" cy="2331720"/>
           </a:xfrm>
           <a:prstGeom prst="rect">
             <a:avLst/>
@@ -18753,12 +19692,12 @@
         </p:nvSpPr>
         <p:spPr>
           <a:xfrm>
-            <a:off x="7680960" y="3383280"/>
-            <a:ext cx="3931920" cy="2880360"/>
+            <a:off x="7680960" y="3246120"/>
+            <a:ext cx="3931920" cy="2697480"/>
           </a:xfrm>
           <a:prstGeom prst="roundRect">
             <a:avLst>
-              <a:gd name="adj" fmla="val 2540"/>
+              <a:gd name="adj" fmla="val 2712"/>
             </a:avLst>
           </a:prstGeom>
           <a:solidFill>
@@ -18780,7 +19719,7 @@
         </p:nvSpPr>
         <p:spPr>
           <a:xfrm>
-            <a:off x="7909560" y="3474720"/>
+            <a:off x="7909560" y="3337560"/>
             <a:ext cx="3566160" cy="365760"/>
           </a:xfrm>
           <a:prstGeom prst="rect">
@@ -18819,8 +19758,8 @@
         </p:nvSpPr>
         <p:spPr>
           <a:xfrm>
-            <a:off x="7909560" y="3886200"/>
-            <a:ext cx="3520440" cy="2286000"/>
+            <a:off x="7909560" y="3730752"/>
+            <a:ext cx="3520440" cy="2148840"/>
           </a:xfrm>
           <a:prstGeom prst="rect">
             <a:avLst/>
@@ -18840,7 +19779,7 @@
               <a:buChar char="•"/>
             </a:pPr>
             <a:r>
-              <a:rPr lang="en-US" sz="1200" dirty="0">
+              <a:rPr lang="en-US" sz="1150" dirty="0">
                 <a:solidFill>
                   <a:srgbClr val="1C1C1C"/>
                 </a:solidFill>
@@ -18850,7 +19789,7 @@
               </a:rPr>
               <a:t>Riset UBS 2007: biaya per available seat kilometer (ASK) terendah di dunia, di bawah Southwest, JetBlue, Ryanair, dan Virgin Blue.</a:t>
             </a:r>
-            <a:endParaRPr lang="en-US" sz="1200" dirty="0"/>
+            <a:endParaRPr lang="en-US" sz="1150" dirty="0"/>
           </a:p>
           <a:p>
             <a:pPr marL="342900" indent="-342900">
@@ -18861,7 +19800,7 @@
               <a:buChar char="•"/>
             </a:pPr>
             <a:r>
-              <a:rPr lang="en-US" sz="1200" dirty="0">
+              <a:rPr lang="en-US" sz="1150" dirty="0">
                 <a:solidFill>
                   <a:srgbClr val="1C1C1C"/>
                 </a:solidFill>
@@ -18871,7 +19810,7 @@
               </a:rPr>
               <a:t>2008: imbal hasil aset (return on assets) 4 persen ketika hampir semua maskapai dunia merugi.</a:t>
             </a:r>
-            <a:endParaRPr lang="en-US" sz="1200" dirty="0"/>
+            <a:endParaRPr lang="en-US" sz="1150" dirty="0"/>
           </a:p>
           <a:p>
             <a:pPr marL="342900" indent="-342900">
@@ -18882,7 +19821,7 @@
               <a:buChar char="•"/>
             </a:pPr>
             <a:r>
-              <a:rPr lang="en-US" sz="1200" dirty="0">
+              <a:rPr lang="en-US" sz="1150" dirty="0">
                 <a:solidFill>
                   <a:srgbClr val="1C1C1C"/>
                 </a:solidFill>
@@ -18892,7 +19831,7 @@
               </a:rPr>
               <a:t>2009: Skytrax Award sebagai The World's Best Low Cost Airline.</a:t>
             </a:r>
-            <a:endParaRPr lang="en-US" sz="1200" dirty="0"/>
+            <a:endParaRPr lang="en-US" sz="1150" dirty="0"/>
           </a:p>
         </p:txBody>
       </p:sp>
@@ -18904,6 +19843,59 @@
         </p:nvSpPr>
         <p:spPr>
           <a:xfrm>
+            <a:off x="548640" y="6016752"/>
+            <a:ext cx="11064240" cy="365760"/>
+          </a:xfrm>
+          <a:prstGeom prst="rect">
+            <a:avLst/>
+          </a:prstGeom>
+          <a:noFill/>
+          <a:ln/>
+        </p:spPr>
+        <p:txBody>
+          <a:bodyPr wrap="square" lIns="0" tIns="0" rIns="0" bIns="0" rtlCol="0" anchor="ctr"/>
+          <a:lstStyle/>
+          <a:p>
+            <a:pPr indent="0" marL="0">
+              <a:buNone/>
+            </a:pPr>
+            <a:r>
+              <a:rPr lang="en-US" sz="1050" b="1" dirty="0">
+                <a:solidFill>
+                  <a:srgbClr val="C8102E"/>
+                </a:solidFill>
+                <a:latin typeface="Calibri" pitchFamily="34" charset="0"/>
+                <a:ea typeface="Calibri" pitchFamily="34" charset="-122"/>
+                <a:cs typeface="Calibri" pitchFamily="34" charset="-120"/>
+              </a:rPr>
+              <a:t>Kaitan.  </a:t>
+            </a:r>
+            <a:pPr indent="0" marL="0">
+              <a:buNone/>
+            </a:pPr>
+            <a:r>
+              <a:rPr lang="en-US" sz="1050" i="1" dirty="0">
+                <a:solidFill>
+                  <a:srgbClr val="6E6E6E"/>
+                </a:solidFill>
+                <a:latin typeface="Calibri" pitchFamily="34" charset="0"/>
+                <a:ea typeface="Calibri" pitchFamily="34" charset="-122"/>
+                <a:cs typeface="Calibri" pitchFamily="34" charset="-120"/>
+              </a:rPr>
+              <a:t>Keberhasilan ini dibangun di rute pendek. Langkah ke rute jauh pada 2007 itulah yang memunculkan masalah strategis di slide berikutnya.</a:t>
+            </a:r>
+            <a:endParaRPr lang="en-US" sz="1050" dirty="0"/>
+          </a:p>
+        </p:txBody>
+      </p:sp>
+      <p:sp>
+        <p:nvSpPr>
+          <p:cNvPr id="22" name="Text 20"/>
+          <p:cNvSpPr txBox="1"/>
+          <p:nvPr/>
+        </p:nvSpPr>
+        <p:spPr>
+          <a:xfrm>
             <a:off x="548640" y="6446520"/>
             <a:ext cx="7315200" cy="274320"/>
           </a:xfrm>
@@ -18937,7 +19929,7 @@
       </p:sp>
       <p:sp>
         <p:nvSpPr>
-          <p:cNvPr id="22" name="Text 20"/>
+          <p:cNvPr id="23" name="Text 21"/>
           <p:cNvSpPr txBox="1"/>
           <p:nvPr/>
         </p:nvSpPr>
@@ -19015,7 +20007,7 @@
         <p:spPr>
           <a:xfrm>
             <a:off x="548640" y="320040"/>
-            <a:ext cx="10972800" cy="274320"/>
+            <a:ext cx="11064240" cy="274320"/>
           </a:xfrm>
           <a:prstGeom prst="rect">
             <a:avLst/>
@@ -19031,7 +20023,7 @@
               <a:buNone/>
             </a:pPr>
             <a:r>
-              <a:rPr lang="en-US" sz="1100" b="1" spc="200" kern="0" dirty="0">
+              <a:rPr lang="en-US" sz="1000" b="1" spc="150" kern="0" dirty="0">
                 <a:solidFill>
                   <a:srgbClr val="C8102E"/>
                 </a:solidFill>
@@ -19039,9 +20031,93 @@
                 <a:ea typeface="Calibri" pitchFamily="34" charset="-122"/>
                 <a:cs typeface="Calibri" pitchFamily="34" charset="-120"/>
               </a:rPr>
-              <a:t>PROBLEM STATEMENT</a:t>
-            </a:r>
-            <a:endParaRPr lang="en-US" sz="1100" dirty="0"/>
+              <a:t>1  PROBLEM</a:t>
+            </a:r>
+            <a:pPr indent="0" marL="0">
+              <a:buNone/>
+            </a:pPr>
+            <a:r>
+              <a:rPr lang="en-US" sz="1000" spc="150" kern="0" dirty="0">
+                <a:solidFill>
+                  <a:srgbClr val="B5B5B5"/>
+                </a:solidFill>
+                <a:latin typeface="Calibri" pitchFamily="34" charset="0"/>
+                <a:ea typeface="Calibri" pitchFamily="34" charset="-122"/>
+                <a:cs typeface="Calibri" pitchFamily="34" charset="-120"/>
+              </a:rPr>
+              <a:t>      </a:t>
+            </a:r>
+            <a:pPr indent="0" marL="0">
+              <a:buNone/>
+            </a:pPr>
+            <a:r>
+              <a:rPr lang="en-US" sz="1000" spc="150" kern="0" dirty="0">
+                <a:solidFill>
+                  <a:srgbClr val="B5B5B5"/>
+                </a:solidFill>
+                <a:latin typeface="Calibri" pitchFamily="34" charset="0"/>
+                <a:ea typeface="Calibri" pitchFamily="34" charset="-122"/>
+                <a:cs typeface="Calibri" pitchFamily="34" charset="-120"/>
+              </a:rPr>
+              <a:t>2  EXTERNAL ENVIRONMENT</a:t>
+            </a:r>
+            <a:pPr indent="0" marL="0">
+              <a:buNone/>
+            </a:pPr>
+            <a:r>
+              <a:rPr lang="en-US" sz="1000" spc="150" kern="0" dirty="0">
+                <a:solidFill>
+                  <a:srgbClr val="B5B5B5"/>
+                </a:solidFill>
+                <a:latin typeface="Calibri" pitchFamily="34" charset="0"/>
+                <a:ea typeface="Calibri" pitchFamily="34" charset="-122"/>
+                <a:cs typeface="Calibri" pitchFamily="34" charset="-120"/>
+              </a:rPr>
+              <a:t>      </a:t>
+            </a:r>
+            <a:pPr indent="0" marL="0">
+              <a:buNone/>
+            </a:pPr>
+            <a:r>
+              <a:rPr lang="en-US" sz="1000" spc="150" kern="0" dirty="0">
+                <a:solidFill>
+                  <a:srgbClr val="B5B5B5"/>
+                </a:solidFill>
+                <a:latin typeface="Calibri" pitchFamily="34" charset="0"/>
+                <a:ea typeface="Calibri" pitchFamily="34" charset="-122"/>
+                <a:cs typeface="Calibri" pitchFamily="34" charset="-120"/>
+              </a:rPr>
+              <a:t>3  COST POSITION</a:t>
+            </a:r>
+            <a:pPr indent="0" marL="0">
+              <a:buNone/>
+            </a:pPr>
+            <a:r>
+              <a:rPr lang="en-US" sz="1000" spc="150" kern="0" dirty="0">
+                <a:solidFill>
+                  <a:srgbClr val="B5B5B5"/>
+                </a:solidFill>
+                <a:latin typeface="Calibri" pitchFamily="34" charset="0"/>
+                <a:ea typeface="Calibri" pitchFamily="34" charset="-122"/>
+                <a:cs typeface="Calibri" pitchFamily="34" charset="-120"/>
+              </a:rPr>
+              <a:t>      </a:t>
+            </a:r>
+            <a:pPr indent="0" marL="0">
+              <a:buNone/>
+            </a:pPr>
+            <a:r>
+              <a:rPr lang="en-US" sz="1000" spc="150" kern="0" dirty="0">
+                <a:solidFill>
+                  <a:srgbClr val="B5B5B5"/>
+                </a:solidFill>
+                <a:latin typeface="Calibri" pitchFamily="34" charset="0"/>
+                <a:ea typeface="Calibri" pitchFamily="34" charset="-122"/>
+                <a:cs typeface="Calibri" pitchFamily="34" charset="-120"/>
+              </a:rPr>
+              <a:t>4  CHOICE</a:t>
+            </a:r>
+            <a:endParaRPr lang="en-US" sz="1000" dirty="0"/>
           </a:p>
         </p:txBody>
       </p:sp>
@@ -19053,8 +20129,8 @@
         </p:nvSpPr>
         <p:spPr>
           <a:xfrm>
-            <a:off x="548640" y="566928"/>
-            <a:ext cx="11064240" cy="731520"/>
+            <a:off x="548640" y="621792"/>
+            <a:ext cx="11064240" cy="640080"/>
           </a:xfrm>
           <a:prstGeom prst="rect">
             <a:avLst/>
@@ -19070,7 +20146,7 @@
               <a:buNone/>
             </a:pPr>
             <a:r>
-              <a:rPr lang="en-US" sz="2600" b="1" dirty="0">
+              <a:rPr lang="en-US" sz="3000" b="1" dirty="0">
                 <a:solidFill>
                   <a:srgbClr val="1C1C1C"/>
                 </a:solidFill>
@@ -19078,9 +20154,9 @@
                 <a:ea typeface="Cambria" pitchFamily="34" charset="-122"/>
                 <a:cs typeface="Cambria" pitchFamily="34" charset="-120"/>
               </a:rPr>
-              <a:t>Two wings to keep in balance: exploiting short haul, exploring long haul</a:t>
-            </a:r>
-            <a:endParaRPr lang="en-US" sz="2600" dirty="0"/>
+              <a:t>The strategic problem</a:t>
+            </a:r>
+            <a:endParaRPr lang="en-US" sz="3000" dirty="0"/>
           </a:p>
         </p:txBody>
       </p:sp>
@@ -19092,12 +20168,12 @@
         </p:nvSpPr>
         <p:spPr>
           <a:xfrm>
-            <a:off x="548640" y="1508760"/>
-            <a:ext cx="5394960" cy="2514600"/>
+            <a:off x="548640" y="1463040"/>
+            <a:ext cx="5394960" cy="2423160"/>
           </a:xfrm>
           <a:prstGeom prst="roundRect">
             <a:avLst>
-              <a:gd name="adj" fmla="val 2909"/>
+              <a:gd name="adj" fmla="val 3019"/>
             </a:avLst>
           </a:prstGeom>
           <a:solidFill>
@@ -19119,7 +20195,7 @@
         </p:nvSpPr>
         <p:spPr>
           <a:xfrm>
-            <a:off x="777240" y="1627632"/>
+            <a:off x="777240" y="1572768"/>
             <a:ext cx="4937760" cy="320040"/>
           </a:xfrm>
           <a:prstGeom prst="rect">
@@ -19158,8 +20234,8 @@
         </p:nvSpPr>
         <p:spPr>
           <a:xfrm>
-            <a:off x="777240" y="1965960"/>
-            <a:ext cx="4983480" cy="2011680"/>
+            <a:off x="777240" y="1920240"/>
+            <a:ext cx="4983480" cy="1920240"/>
           </a:xfrm>
           <a:prstGeom prst="rect">
             <a:avLst/>
@@ -19243,12 +20319,12 @@
         </p:nvSpPr>
         <p:spPr>
           <a:xfrm>
-            <a:off x="6217920" y="1508760"/>
-            <a:ext cx="5394960" cy="2514600"/>
+            <a:off x="6217920" y="1463040"/>
+            <a:ext cx="5394960" cy="2423160"/>
           </a:xfrm>
           <a:prstGeom prst="roundRect">
             <a:avLst>
-              <a:gd name="adj" fmla="val 2909"/>
+              <a:gd name="adj" fmla="val 3019"/>
             </a:avLst>
           </a:prstGeom>
           <a:solidFill>
@@ -19270,7 +20346,7 @@
         </p:nvSpPr>
         <p:spPr>
           <a:xfrm>
-            <a:off x="6446520" y="1627632"/>
+            <a:off x="6446520" y="1572768"/>
             <a:ext cx="4937760" cy="320040"/>
           </a:xfrm>
           <a:prstGeom prst="rect">
@@ -19309,8 +20385,8 @@
         </p:nvSpPr>
         <p:spPr>
           <a:xfrm>
-            <a:off x="6446520" y="1965960"/>
-            <a:ext cx="4983480" cy="2011680"/>
+            <a:off x="6446520" y="1920240"/>
+            <a:ext cx="4983480" cy="1920240"/>
           </a:xfrm>
           <a:prstGeom prst="rect">
             <a:avLst/>
@@ -19338,7 +20414,7 @@
                 <a:ea typeface="Calibri" pitchFamily="34" charset="-122"/>
                 <a:cs typeface="Calibri" pitchFamily="34" charset="-120"/>
               </a:rPr>
-              <a:t>Efisiensi model LCC bertumpu pada rute pendek, satu tipe pesawat, dan layanan minimal. Rute antarbenua melanggar ketiganya.</a:t>
+              <a:t>Efisiensi model LCC bertumpu pada rute pendek, satu tipe pesawat, dan layanan minimal. Rute antarbenua tidak memenuhi ketiganya.</a:t>
             </a:r>
             <a:endParaRPr lang="en-US" sz="1200" dirty="0"/>
           </a:p>
@@ -19380,7 +20456,7 @@
                 <a:ea typeface="Calibri" pitchFamily="34" charset="-122"/>
                 <a:cs typeface="Calibri" pitchFamily="34" charset="-120"/>
               </a:rPr>
-              <a:t>Neraca 2008 rapuh: rugi bersih RM 496,6 juta, utang RM 6,69 miliar berbanding ekuitas RM 1,61 miliar, kas hanya RM 153,8 juta (Tabel 9.1).</a:t>
+              <a:t>Neraca 2008 lemah: rugi bersih RM 496,6 juta, utang RM 6,69 miliar berbanding ekuitas RM 1,61 miliar, kas RM 153,8 juta (Tabel 9.1).</a:t>
             </a:r>
             <a:endParaRPr lang="en-US" sz="1200" dirty="0"/>
           </a:p>
@@ -19394,12 +20470,12 @@
         </p:nvSpPr>
         <p:spPr>
           <a:xfrm>
-            <a:off x="548640" y="4297680"/>
-            <a:ext cx="11064240" cy="1920240"/>
+            <a:off x="548640" y="4114800"/>
+            <a:ext cx="11064240" cy="1783080"/>
           </a:xfrm>
           <a:prstGeom prst="roundRect">
             <a:avLst>
-              <a:gd name="adj" fmla="val 3810"/>
+              <a:gd name="adj" fmla="val 4103"/>
             </a:avLst>
           </a:prstGeom>
           <a:solidFill>
@@ -19421,7 +20497,7 @@
         </p:nvSpPr>
         <p:spPr>
           <a:xfrm>
-            <a:off x="822960" y="4434840"/>
+            <a:off x="822960" y="4224528"/>
             <a:ext cx="5486400" cy="320040"/>
           </a:xfrm>
           <a:prstGeom prst="rect">
@@ -19460,8 +20536,8 @@
         </p:nvSpPr>
         <p:spPr>
           <a:xfrm>
-            <a:off x="822960" y="4754880"/>
-            <a:ext cx="10515600" cy="1371600"/>
+            <a:off x="822960" y="4526280"/>
+            <a:ext cx="10515600" cy="1325880"/>
           </a:xfrm>
           <a:prstGeom prst="rect">
             <a:avLst/>
@@ -19477,7 +20553,7 @@
               <a:buNone/>
             </a:pPr>
             <a:r>
-              <a:rPr lang="en-US" sz="1600" dirty="0">
+              <a:rPr lang="en-US" sz="1550" dirty="0">
                 <a:solidFill>
                   <a:srgbClr val="FFFFFF"/>
                 </a:solidFill>
@@ -19485,16 +20561,16 @@
                 <a:ea typeface="Calibri" pitchFamily="34" charset="-122"/>
                 <a:cs typeface="Calibri" pitchFamily="34" charset="-120"/>
               </a:rPr>
-              <a:t>Apakah sumber keunggulan biaya AirAsia dapat ditransfer ke pasar jarak jauh, dan bagaimana AirAsia sebaiknya menata hubungan dengan AirAsia X agar eksplorasi (exploration) pasar baru tidak menggerus eksploitasi (exploitation) model yang sudah terbukti?</a:t>
-            </a:r>
-            <a:endParaRPr lang="en-US" sz="1600" dirty="0"/>
-          </a:p>
-          <a:p>
-            <a:pPr indent="0" marL="0">
-              <a:buNone/>
-            </a:pPr>
-            <a:r>
-              <a:rPr lang="en-US" sz="600" dirty="0">
+              <a:t>Apakah sumber keunggulan biaya AirAsia dapat ditransfer ke pasar jarak jauh, dan bagaimana AirAsia sebaiknya menata hubungan dengan AirAsia X agar eksplorasi (exploration) pasar baru tidak mengganggu eksploitasi (exploitation) model yang sudah terbukti?</a:t>
+            </a:r>
+            <a:endParaRPr lang="en-US" sz="1550" dirty="0"/>
+          </a:p>
+          <a:p>
+            <a:pPr indent="0" marL="0">
+              <a:buNone/>
+            </a:pPr>
+            <a:r>
+              <a:rPr lang="en-US" sz="500" dirty="0">
                 <a:solidFill>
                   <a:srgbClr val="000000"/>
                 </a:solidFill>
@@ -19504,14 +20580,14 @@
               </a:rPr>
               <a:t> </a:t>
             </a:r>
-            <a:endParaRPr lang="en-US" sz="1600" dirty="0"/>
-          </a:p>
-          <a:p>
-            <a:pPr indent="0" marL="0">
-              <a:buNone/>
-            </a:pPr>
-            <a:r>
-              <a:rPr lang="en-US" sz="1200" dirty="0">
+            <a:endParaRPr lang="en-US" sz="1550" dirty="0"/>
+          </a:p>
+          <a:p>
+            <a:pPr indent="0" marL="0">
+              <a:buNone/>
+            </a:pPr>
+            <a:r>
+              <a:rPr lang="en-US" sz="1150" dirty="0">
                 <a:solidFill>
                   <a:srgbClr val="F1C7CF"/>
                 </a:solidFill>
@@ -19521,7 +20597,7 @@
               </a:rPr>
               <a:t>Keputusan yang menunggu manajemen pada pertengahan 2009: merger AirAsia X ke dalam AirAsia, tetap terpisah dengan kontrak layanan, atau kembali fokus ke pasar regional.</a:t>
             </a:r>
-            <a:endParaRPr lang="en-US" sz="1600" dirty="0"/>
+            <a:endParaRPr lang="en-US" sz="1550" dirty="0"/>
           </a:p>
         </p:txBody>
       </p:sp>
@@ -19533,6 +20609,59 @@
         </p:nvSpPr>
         <p:spPr>
           <a:xfrm>
+            <a:off x="548640" y="6016752"/>
+            <a:ext cx="11064240" cy="365760"/>
+          </a:xfrm>
+          <a:prstGeom prst="rect">
+            <a:avLst/>
+          </a:prstGeom>
+          <a:noFill/>
+          <a:ln/>
+        </p:spPr>
+        <p:txBody>
+          <a:bodyPr wrap="square" lIns="0" tIns="0" rIns="0" bIns="0" rtlCol="0" anchor="ctr"/>
+          <a:lstStyle/>
+          <a:p>
+            <a:pPr indent="0" marL="0">
+              <a:buNone/>
+            </a:pPr>
+            <a:r>
+              <a:rPr lang="en-US" sz="1050" b="1" dirty="0">
+                <a:solidFill>
+                  <a:srgbClr val="C8102E"/>
+                </a:solidFill>
+                <a:latin typeface="Calibri" pitchFamily="34" charset="0"/>
+                <a:ea typeface="Calibri" pitchFamily="34" charset="-122"/>
+                <a:cs typeface="Calibri" pitchFamily="34" charset="-120"/>
+              </a:rPr>
+              <a:t>Kaitan.  </a:t>
+            </a:r>
+            <a:pPr indent="0" marL="0">
+              <a:buNone/>
+            </a:pPr>
+            <a:r>
+              <a:rPr lang="en-US" sz="1050" i="1" dirty="0">
+                <a:solidFill>
+                  <a:srgbClr val="6E6E6E"/>
+                </a:solidFill>
+                <a:latin typeface="Calibri" pitchFamily="34" charset="0"/>
+                <a:ea typeface="Calibri" pitchFamily="34" charset="-122"/>
+                <a:cs typeface="Calibri" pitchFamily="34" charset="-120"/>
+              </a:rPr>
+              <a:t>Untuk menjawab pertanyaan ini, tahap kedua membaca lingkungan eksternal lebih dulu: faktor makro, struktur industri, dinamika, dan peta pesaing.</a:t>
+            </a:r>
+            <a:endParaRPr lang="en-US" sz="1050" dirty="0"/>
+          </a:p>
+        </p:txBody>
+      </p:sp>
+      <p:sp>
+        <p:nvSpPr>
+          <p:cNvPr id="14" name="Text 12"/>
+          <p:cNvSpPr txBox="1"/>
+          <p:nvPr/>
+        </p:nvSpPr>
+        <p:spPr>
+          <a:xfrm>
             <a:off x="548640" y="6446520"/>
             <a:ext cx="7315200" cy="274320"/>
           </a:xfrm>
@@ -19566,7 +20695,7 @@
       </p:sp>
       <p:sp>
         <p:nvSpPr>
-          <p:cNvPr id="14" name="Text 12"/>
+          <p:cNvPr id="15" name="Text 13"/>
           <p:cNvSpPr txBox="1"/>
           <p:nvPr/>
         </p:nvSpPr>
@@ -19644,7 +20773,7 @@
         <p:spPr>
           <a:xfrm>
             <a:off x="548640" y="320040"/>
-            <a:ext cx="10972800" cy="274320"/>
+            <a:ext cx="11064240" cy="274320"/>
           </a:xfrm>
           <a:prstGeom prst="rect">
             <a:avLst/>
@@ -19660,7 +20789,35 @@
               <a:buNone/>
             </a:pPr>
             <a:r>
-              <a:rPr lang="en-US" sz="1100" b="1" spc="200" kern="0" dirty="0">
+              <a:rPr lang="en-US" sz="1000" spc="150" kern="0" dirty="0">
+                <a:solidFill>
+                  <a:srgbClr val="B5B5B5"/>
+                </a:solidFill>
+                <a:latin typeface="Calibri" pitchFamily="34" charset="0"/>
+                <a:ea typeface="Calibri" pitchFamily="34" charset="-122"/>
+                <a:cs typeface="Calibri" pitchFamily="34" charset="-120"/>
+              </a:rPr>
+              <a:t>1  PROBLEM</a:t>
+            </a:r>
+            <a:pPr indent="0" marL="0">
+              <a:buNone/>
+            </a:pPr>
+            <a:r>
+              <a:rPr lang="en-US" sz="1000" spc="150" kern="0" dirty="0">
+                <a:solidFill>
+                  <a:srgbClr val="B5B5B5"/>
+                </a:solidFill>
+                <a:latin typeface="Calibri" pitchFamily="34" charset="0"/>
+                <a:ea typeface="Calibri" pitchFamily="34" charset="-122"/>
+                <a:cs typeface="Calibri" pitchFamily="34" charset="-120"/>
+              </a:rPr>
+              <a:t>      </a:t>
+            </a:r>
+            <a:pPr indent="0" marL="0">
+              <a:buNone/>
+            </a:pPr>
+            <a:r>
+              <a:rPr lang="en-US" sz="1000" b="1" spc="150" kern="0" dirty="0">
                 <a:solidFill>
                   <a:srgbClr val="C8102E"/>
                 </a:solidFill>
@@ -19668,9 +20825,65 @@
                 <a:ea typeface="Calibri" pitchFamily="34" charset="-122"/>
                 <a:cs typeface="Calibri" pitchFamily="34" charset="-120"/>
               </a:rPr>
-              <a:t>MACRO ENVIRONMENT ANALYSIS</a:t>
-            </a:r>
-            <a:endParaRPr lang="en-US" sz="1100" dirty="0"/>
+              <a:t>2  EXTERNAL ENVIRONMENT</a:t>
+            </a:r>
+            <a:pPr indent="0" marL="0">
+              <a:buNone/>
+            </a:pPr>
+            <a:r>
+              <a:rPr lang="en-US" sz="1000" spc="150" kern="0" dirty="0">
+                <a:solidFill>
+                  <a:srgbClr val="B5B5B5"/>
+                </a:solidFill>
+                <a:latin typeface="Calibri" pitchFamily="34" charset="0"/>
+                <a:ea typeface="Calibri" pitchFamily="34" charset="-122"/>
+                <a:cs typeface="Calibri" pitchFamily="34" charset="-120"/>
+              </a:rPr>
+              <a:t>      </a:t>
+            </a:r>
+            <a:pPr indent="0" marL="0">
+              <a:buNone/>
+            </a:pPr>
+            <a:r>
+              <a:rPr lang="en-US" sz="1000" spc="150" kern="0" dirty="0">
+                <a:solidFill>
+                  <a:srgbClr val="B5B5B5"/>
+                </a:solidFill>
+                <a:latin typeface="Calibri" pitchFamily="34" charset="0"/>
+                <a:ea typeface="Calibri" pitchFamily="34" charset="-122"/>
+                <a:cs typeface="Calibri" pitchFamily="34" charset="-120"/>
+              </a:rPr>
+              <a:t>3  COST POSITION</a:t>
+            </a:r>
+            <a:pPr indent="0" marL="0">
+              <a:buNone/>
+            </a:pPr>
+            <a:r>
+              <a:rPr lang="en-US" sz="1000" spc="150" kern="0" dirty="0">
+                <a:solidFill>
+                  <a:srgbClr val="B5B5B5"/>
+                </a:solidFill>
+                <a:latin typeface="Calibri" pitchFamily="34" charset="0"/>
+                <a:ea typeface="Calibri" pitchFamily="34" charset="-122"/>
+                <a:cs typeface="Calibri" pitchFamily="34" charset="-120"/>
+              </a:rPr>
+              <a:t>      </a:t>
+            </a:r>
+            <a:pPr indent="0" marL="0">
+              <a:buNone/>
+            </a:pPr>
+            <a:r>
+              <a:rPr lang="en-US" sz="1000" spc="150" kern="0" dirty="0">
+                <a:solidFill>
+                  <a:srgbClr val="B5B5B5"/>
+                </a:solidFill>
+                <a:latin typeface="Calibri" pitchFamily="34" charset="0"/>
+                <a:ea typeface="Calibri" pitchFamily="34" charset="-122"/>
+                <a:cs typeface="Calibri" pitchFamily="34" charset="-120"/>
+              </a:rPr>
+              <a:t>4  CHOICE</a:t>
+            </a:r>
+            <a:endParaRPr lang="en-US" sz="1000" dirty="0"/>
           </a:p>
         </p:txBody>
       </p:sp>
@@ -19682,8 +20895,8 @@
         </p:nvSpPr>
         <p:spPr>
           <a:xfrm>
-            <a:off x="548640" y="566928"/>
-            <a:ext cx="11064240" cy="731520"/>
+            <a:off x="548640" y="621792"/>
+            <a:ext cx="11064240" cy="640080"/>
           </a:xfrm>
           <a:prstGeom prst="rect">
             <a:avLst/>
@@ -19699,7 +20912,7 @@
               <a:buNone/>
             </a:pPr>
             <a:r>
-              <a:rPr lang="en-US" sz="2600" b="1" dirty="0">
+              <a:rPr lang="en-US" sz="3000" b="1" dirty="0">
                 <a:solidFill>
                   <a:srgbClr val="1C1C1C"/>
                 </a:solidFill>
@@ -19707,9 +20920,9 @@
                 <a:ea typeface="Cambria" pitchFamily="34" charset="-122"/>
                 <a:cs typeface="Cambria" pitchFamily="34" charset="-120"/>
               </a:rPr>
-              <a:t>PESTEL: Southeast Asia opens more opportunities than it poses threats</a:t>
-            </a:r>
-            <a:endParaRPr lang="en-US" sz="2600" dirty="0"/>
+              <a:t>PESTEL analysis</a:t>
+            </a:r>
+            <a:endParaRPr lang="en-US" sz="3000" dirty="0"/>
           </a:p>
         </p:txBody>
       </p:sp>
@@ -19721,12 +20934,12 @@
         </p:nvSpPr>
         <p:spPr>
           <a:xfrm>
-            <a:off x="548640" y="1508760"/>
-            <a:ext cx="3520440" cy="2240280"/>
+            <a:off x="548640" y="1463040"/>
+            <a:ext cx="3520440" cy="2148840"/>
           </a:xfrm>
           <a:prstGeom prst="roundRect">
             <a:avLst>
-              <a:gd name="adj" fmla="val 3265"/>
+              <a:gd name="adj" fmla="val 3404"/>
             </a:avLst>
           </a:prstGeom>
           <a:solidFill>
@@ -19748,7 +20961,7 @@
         </p:nvSpPr>
         <p:spPr>
           <a:xfrm>
-            <a:off x="731520" y="1673352"/>
+            <a:off x="731520" y="1600200"/>
             <a:ext cx="457200" cy="457200"/>
           </a:xfrm>
           <a:prstGeom prst="ellipse">
@@ -19773,7 +20986,7 @@
         </p:nvSpPr>
         <p:spPr>
           <a:xfrm>
-            <a:off x="731520" y="1673352"/>
+            <a:off x="731520" y="1600200"/>
             <a:ext cx="457200" cy="457200"/>
           </a:xfrm>
           <a:prstGeom prst="rect">
@@ -19812,7 +21025,7 @@
         </p:nvSpPr>
         <p:spPr>
           <a:xfrm>
-            <a:off x="1325880" y="1673352"/>
+            <a:off x="1325880" y="1600200"/>
             <a:ext cx="2560320" cy="457200"/>
           </a:xfrm>
           <a:prstGeom prst="rect">
@@ -19851,8 +21064,8 @@
         </p:nvSpPr>
         <p:spPr>
           <a:xfrm>
-            <a:off x="749808" y="2221992"/>
-            <a:ext cx="3154680" cy="1463040"/>
+            <a:off x="749808" y="2121408"/>
+            <a:ext cx="3154680" cy="1444752"/>
           </a:xfrm>
           <a:prstGeom prst="rect">
             <a:avLst/>
@@ -19876,7 +21089,7 @@
                 <a:ea typeface="Calibri" pitchFamily="34" charset="-122"/>
                 <a:cs typeface="Calibri" pitchFamily="34" charset="-120"/>
               </a:rPr>
-              <a:t>Dukungan pemerintah Malaysia sejak akuisisi 2001. Namun rute jarak jauh menempatkan AirAsia berhadapan langsung dengan Malaysia Airlines, maskapai nasional (flag carrier). Itulah alasan AirAsia X didirikan sebagai entitas terpisah, agar relasi politik tetap terjaga.</a:t>
+              <a:t>Dukungan pemerintah Malaysia sejak akuisisi 2001. Namun rute jarak jauh menempatkan AirAsia berhadapan langsung dengan Malaysia Airlines, maskapai nasional (flag carrier). Itulah alasan AirAsia X didirikan sebagai entitas terpisah.</a:t>
             </a:r>
             <a:endParaRPr lang="en-US" sz="1050" dirty="0"/>
           </a:p>
@@ -19890,12 +21103,12 @@
         </p:nvSpPr>
         <p:spPr>
           <a:xfrm>
-            <a:off x="4251960" y="1508760"/>
-            <a:ext cx="3520440" cy="2240280"/>
+            <a:off x="4251960" y="1463040"/>
+            <a:ext cx="3520440" cy="2148840"/>
           </a:xfrm>
           <a:prstGeom prst="roundRect">
             <a:avLst>
-              <a:gd name="adj" fmla="val 3265"/>
+              <a:gd name="adj" fmla="val 3404"/>
             </a:avLst>
           </a:prstGeom>
           <a:solidFill>
@@ -19917,7 +21130,7 @@
         </p:nvSpPr>
         <p:spPr>
           <a:xfrm>
-            <a:off x="4434840" y="1673352"/>
+            <a:off x="4434840" y="1600200"/>
             <a:ext cx="457200" cy="457200"/>
           </a:xfrm>
           <a:prstGeom prst="ellipse">
@@ -19942,7 +21155,7 @@
         </p:nvSpPr>
         <p:spPr>
           <a:xfrm>
-            <a:off x="4434840" y="1673352"/>
+            <a:off x="4434840" y="1600200"/>
             <a:ext cx="457200" cy="457200"/>
           </a:xfrm>
           <a:prstGeom prst="rect">
@@ -19981,7 +21194,7 @@
         </p:nvSpPr>
         <p:spPr>
           <a:xfrm>
-            <a:off x="5029200" y="1673352"/>
+            <a:off x="5029200" y="1600200"/>
             <a:ext cx="2560320" cy="457200"/>
           </a:xfrm>
           <a:prstGeom prst="rect">
@@ -20020,8 +21233,8 @@
         </p:nvSpPr>
         <p:spPr>
           <a:xfrm>
-            <a:off x="4453128" y="2221992"/>
-            <a:ext cx="3154680" cy="1463040"/>
+            <a:off x="4453128" y="2121408"/>
+            <a:ext cx="3154680" cy="1444752"/>
           </a:xfrm>
           <a:prstGeom prst="rect">
             <a:avLst/>
@@ -20059,12 +21272,12 @@
         </p:nvSpPr>
         <p:spPr>
           <a:xfrm>
-            <a:off x="7955280" y="1508760"/>
-            <a:ext cx="3520440" cy="2240280"/>
+            <a:off x="7955280" y="1463040"/>
+            <a:ext cx="3520440" cy="2148840"/>
           </a:xfrm>
           <a:prstGeom prst="roundRect">
             <a:avLst>
-              <a:gd name="adj" fmla="val 3265"/>
+              <a:gd name="adj" fmla="val 3404"/>
             </a:avLst>
           </a:prstGeom>
           <a:solidFill>
@@ -20086,7 +21299,7 @@
         </p:nvSpPr>
         <p:spPr>
           <a:xfrm>
-            <a:off x="8138160" y="1673352"/>
+            <a:off x="8138160" y="1600200"/>
             <a:ext cx="457200" cy="457200"/>
           </a:xfrm>
           <a:prstGeom prst="ellipse">
@@ -20111,7 +21324,7 @@
         </p:nvSpPr>
         <p:spPr>
           <a:xfrm>
-            <a:off x="8138160" y="1673352"/>
+            <a:off x="8138160" y="1600200"/>
             <a:ext cx="457200" cy="457200"/>
           </a:xfrm>
           <a:prstGeom prst="rect">
@@ -20150,7 +21363,7 @@
         </p:nvSpPr>
         <p:spPr>
           <a:xfrm>
-            <a:off x="8732520" y="1673352"/>
+            <a:off x="8732520" y="1600200"/>
             <a:ext cx="2560320" cy="457200"/>
           </a:xfrm>
           <a:prstGeom prst="rect">
@@ -20189,8 +21402,8 @@
         </p:nvSpPr>
         <p:spPr>
           <a:xfrm>
-            <a:off x="8156448" y="2221992"/>
-            <a:ext cx="3154680" cy="1463040"/>
+            <a:off x="8156448" y="2121408"/>
+            <a:ext cx="3154680" cy="1444752"/>
           </a:xfrm>
           <a:prstGeom prst="rect">
             <a:avLst/>
@@ -20214,7 +21427,7 @@
                 <a:ea typeface="Calibri" pitchFamily="34" charset="-122"/>
                 <a:cs typeface="Calibri" pitchFamily="34" charset="-120"/>
               </a:rPr>
-              <a:t>Segmen wisatawan dan pebisnis berpendapatan menengah yang selama ini kurang terlayani (underserved). Slogan Now Everyone Can Fly sejatinya adalah strategi memperluas pasar (market expansion), bukan sekadar merebut pangsa.</a:t>
+              <a:t>Segmen wisatawan dan pebisnis berpendapatan menengah yang selama ini kurang terlayani (underserved). Slogan Now Everyone Can Fly pada dasarnya adalah strategi memperluas pasar (market expansion), bukan sekadar merebut pangsa.</a:t>
             </a:r>
             <a:endParaRPr lang="en-US" sz="1050" dirty="0"/>
           </a:p>
@@ -20228,12 +21441,12 @@
         </p:nvSpPr>
         <p:spPr>
           <a:xfrm>
-            <a:off x="548640" y="3931920"/>
-            <a:ext cx="3520440" cy="2240280"/>
+            <a:off x="548640" y="3749040"/>
+            <a:ext cx="3520440" cy="2148840"/>
           </a:xfrm>
           <a:prstGeom prst="roundRect">
             <a:avLst>
-              <a:gd name="adj" fmla="val 3265"/>
+              <a:gd name="adj" fmla="val 3404"/>
             </a:avLst>
           </a:prstGeom>
           <a:solidFill>
@@ -20255,7 +21468,7 @@
         </p:nvSpPr>
         <p:spPr>
           <a:xfrm>
-            <a:off x="731520" y="4096512"/>
+            <a:off x="731520" y="3886200"/>
             <a:ext cx="457200" cy="457200"/>
           </a:xfrm>
           <a:prstGeom prst="ellipse">
@@ -20280,7 +21493,7 @@
         </p:nvSpPr>
         <p:spPr>
           <a:xfrm>
-            <a:off x="731520" y="4096512"/>
+            <a:off x="731520" y="3886200"/>
             <a:ext cx="457200" cy="457200"/>
           </a:xfrm>
           <a:prstGeom prst="rect">
@@ -20319,7 +21532,7 @@
         </p:nvSpPr>
         <p:spPr>
           <a:xfrm>
-            <a:off x="1325880" y="4096512"/>
+            <a:off x="1325880" y="3886200"/>
             <a:ext cx="2560320" cy="457200"/>
           </a:xfrm>
           <a:prstGeom prst="rect">
@@ -20358,8 +21571,8 @@
         </p:nvSpPr>
         <p:spPr>
           <a:xfrm>
-            <a:off x="749808" y="4645152"/>
-            <a:ext cx="3154680" cy="1463040"/>
+            <a:off x="749808" y="4407408"/>
+            <a:ext cx="3154680" cy="1444752"/>
           </a:xfrm>
           <a:prstGeom prst="rect">
             <a:avLst/>
@@ -20383,7 +21596,7 @@
                 <a:ea typeface="Calibri" pitchFamily="34" charset="-122"/>
                 <a:cs typeface="Calibri" pitchFamily="34" charset="-120"/>
               </a:rPr>
-              <a:t>Sistem reservasi Navitaire Open Skies, yield management system, boarding pass cetak sendiri, pemesanan lewat ponsel (2006), ERP dan advanced planning system. Distribusi langsung memangkas komisi agen dan menjadi sumber biaya rendah yang sulit ditiru maskapai lama.</a:t>
+              <a:t>Sistem reservasi Navitaire Open Skies, yield management system, boarding pass cetak sendiri, pemesanan lewat ponsel (2006), ERP dan advanced planning system. Distribusi langsung memangkas komisi agen dan sulit ditiru maskapai lama.</a:t>
             </a:r>
             <a:endParaRPr lang="en-US" sz="1050" dirty="0"/>
           </a:p>
@@ -20397,12 +21610,12 @@
         </p:nvSpPr>
         <p:spPr>
           <a:xfrm>
-            <a:off x="4251960" y="3931920"/>
-            <a:ext cx="3520440" cy="2240280"/>
+            <a:off x="4251960" y="3749040"/>
+            <a:ext cx="3520440" cy="2148840"/>
           </a:xfrm>
           <a:prstGeom prst="roundRect">
             <a:avLst>
-              <a:gd name="adj" fmla="val 3265"/>
+              <a:gd name="adj" fmla="val 3404"/>
             </a:avLst>
           </a:prstGeom>
           <a:solidFill>
@@ -20424,7 +21637,7 @@
         </p:nvSpPr>
         <p:spPr>
           <a:xfrm>
-            <a:off x="4434840" y="4096512"/>
+            <a:off x="4434840" y="3886200"/>
             <a:ext cx="457200" cy="457200"/>
           </a:xfrm>
           <a:prstGeom prst="ellipse">
@@ -20449,7 +21662,7 @@
         </p:nvSpPr>
         <p:spPr>
           <a:xfrm>
-            <a:off x="4434840" y="4096512"/>
+            <a:off x="4434840" y="3886200"/>
             <a:ext cx="457200" cy="457200"/>
           </a:xfrm>
           <a:prstGeom prst="rect">
@@ -20488,7 +21701,7 @@
         </p:nvSpPr>
         <p:spPr>
           <a:xfrm>
-            <a:off x="5029200" y="4096512"/>
+            <a:off x="5029200" y="3886200"/>
             <a:ext cx="2560320" cy="457200"/>
           </a:xfrm>
           <a:prstGeom prst="rect">
@@ -20527,8 +21740,8 @@
         </p:nvSpPr>
         <p:spPr>
           <a:xfrm>
-            <a:off x="4453128" y="4645152"/>
-            <a:ext cx="3154680" cy="1463040"/>
+            <a:off x="4453128" y="4407408"/>
+            <a:ext cx="3154680" cy="1444752"/>
           </a:xfrm>
           <a:prstGeom prst="rect">
             <a:avLst/>
@@ -20552,7 +21765,7 @@
                 <a:ea typeface="Calibri" pitchFamily="34" charset="-122"/>
                 <a:cs typeface="Calibri" pitchFamily="34" charset="-120"/>
               </a:rPr>
-              <a:t>Efisiensi bahan bakar menentukan jejak biaya sekaligus jejak karbon. Armada A320 baru yang hemat bahan bakar menjadi keharusan, bukan pilihan. Di rute jauh, A340 empat mesin justru boros dibanding pesaing bermesin dua.</a:t>
+              <a:t>Efisiensi bahan bakar menentukan biaya sekaligus jejak karbon. Armada A320 baru yang hemat bahan bakar menjadi keharusan. Di rute jauh, A340 bermesin empat justru lebih boros dibanding pesaing bermesin dua.</a:t>
             </a:r>
             <a:endParaRPr lang="en-US" sz="1050" dirty="0"/>
           </a:p>
@@ -20566,12 +21779,12 @@
         </p:nvSpPr>
         <p:spPr>
           <a:xfrm>
-            <a:off x="7955280" y="3931920"/>
-            <a:ext cx="3520440" cy="2240280"/>
+            <a:off x="7955280" y="3749040"/>
+            <a:ext cx="3520440" cy="2148840"/>
           </a:xfrm>
           <a:prstGeom prst="roundRect">
             <a:avLst>
-              <a:gd name="adj" fmla="val 3265"/>
+              <a:gd name="adj" fmla="val 3404"/>
             </a:avLst>
           </a:prstGeom>
           <a:solidFill>
@@ -20593,7 +21806,7 @@
         </p:nvSpPr>
         <p:spPr>
           <a:xfrm>
-            <a:off x="8138160" y="4096512"/>
+            <a:off x="8138160" y="3886200"/>
             <a:ext cx="457200" cy="457200"/>
           </a:xfrm>
           <a:prstGeom prst="ellipse">
@@ -20618,7 +21831,7 @@
         </p:nvSpPr>
         <p:spPr>
           <a:xfrm>
-            <a:off x="8138160" y="4096512"/>
+            <a:off x="8138160" y="3886200"/>
             <a:ext cx="457200" cy="457200"/>
           </a:xfrm>
           <a:prstGeom prst="rect">
@@ -20657,7 +21870,7 @@
         </p:nvSpPr>
         <p:spPr>
           <a:xfrm>
-            <a:off x="8732520" y="4096512"/>
+            <a:off x="8732520" y="3886200"/>
             <a:ext cx="2560320" cy="457200"/>
           </a:xfrm>
           <a:prstGeom prst="rect">
@@ -20696,8 +21909,8 @@
         </p:nvSpPr>
         <p:spPr>
           <a:xfrm>
-            <a:off x="8156448" y="4645152"/>
-            <a:ext cx="3154680" cy="1463040"/>
+            <a:off x="8156448" y="4407408"/>
+            <a:ext cx="3154680" cy="1444752"/>
           </a:xfrm>
           <a:prstGeom prst="rect">
             <a:avLst/>
@@ -20735,6 +21948,59 @@
         </p:nvSpPr>
         <p:spPr>
           <a:xfrm>
+            <a:off x="548640" y="6016752"/>
+            <a:ext cx="11064240" cy="365760"/>
+          </a:xfrm>
+          <a:prstGeom prst="rect">
+            <a:avLst/>
+          </a:prstGeom>
+          <a:noFill/>
+          <a:ln/>
+        </p:spPr>
+        <p:txBody>
+          <a:bodyPr wrap="square" lIns="0" tIns="0" rIns="0" bIns="0" rtlCol="0" anchor="ctr"/>
+          <a:lstStyle/>
+          <a:p>
+            <a:pPr indent="0" marL="0">
+              <a:buNone/>
+            </a:pPr>
+            <a:r>
+              <a:rPr lang="en-US" sz="1050" b="1" dirty="0">
+                <a:solidFill>
+                  <a:srgbClr val="C8102E"/>
+                </a:solidFill>
+                <a:latin typeface="Calibri" pitchFamily="34" charset="0"/>
+                <a:ea typeface="Calibri" pitchFamily="34" charset="-122"/>
+                <a:cs typeface="Calibri" pitchFamily="34" charset="-120"/>
+              </a:rPr>
+              <a:t>Kaitan.  </a:t>
+            </a:r>
+            <a:pPr indent="0" marL="0">
+              <a:buNone/>
+            </a:pPr>
+            <a:r>
+              <a:rPr lang="en-US" sz="1050" i="1" dirty="0">
+                <a:solidFill>
+                  <a:srgbClr val="6E6E6E"/>
+                </a:solidFill>
+                <a:latin typeface="Calibri" pitchFamily="34" charset="0"/>
+                <a:ea typeface="Calibri" pitchFamily="34" charset="-122"/>
+                <a:cs typeface="Calibri" pitchFamily="34" charset="-120"/>
+              </a:rPr>
+              <a:t>Faktor makro membentuk peluang. Apakah peluang itu bisa diubah menjadi laba ditentukan oleh struktur industrinya, yang dibaca dengan Five Forces di slide berikutnya.</a:t>
+            </a:r>
+            <a:endParaRPr lang="en-US" sz="1050" dirty="0"/>
+          </a:p>
+        </p:txBody>
+      </p:sp>
+      <p:sp>
+        <p:nvSpPr>
+          <p:cNvPr id="35" name="Text 33"/>
+          <p:cNvSpPr txBox="1"/>
+          <p:nvPr/>
+        </p:nvSpPr>
+        <p:spPr>
+          <a:xfrm>
             <a:off x="548640" y="6446520"/>
             <a:ext cx="7315200" cy="274320"/>
           </a:xfrm>
@@ -20768,7 +22034,7 @@
       </p:sp>
       <p:sp>
         <p:nvSpPr>
-          <p:cNvPr id="35" name="Text 33"/>
+          <p:cNvPr id="36" name="Text 34"/>
           <p:cNvSpPr txBox="1"/>
           <p:nvPr/>
         </p:nvSpPr>
@@ -20846,7 +22112,7 @@
         <p:spPr>
           <a:xfrm>
             <a:off x="548640" y="320040"/>
-            <a:ext cx="10972800" cy="274320"/>
+            <a:ext cx="11064240" cy="274320"/>
           </a:xfrm>
           <a:prstGeom prst="rect">
             <a:avLst/>
@@ -20862,7 +22128,35 @@
               <a:buNone/>
             </a:pPr>
             <a:r>
-              <a:rPr lang="en-US" sz="1100" b="1" spc="200" kern="0" dirty="0">
+              <a:rPr lang="en-US" sz="1000" spc="150" kern="0" dirty="0">
+                <a:solidFill>
+                  <a:srgbClr val="B5B5B5"/>
+                </a:solidFill>
+                <a:latin typeface="Calibri" pitchFamily="34" charset="0"/>
+                <a:ea typeface="Calibri" pitchFamily="34" charset="-122"/>
+                <a:cs typeface="Calibri" pitchFamily="34" charset="-120"/>
+              </a:rPr>
+              <a:t>1  PROBLEM</a:t>
+            </a:r>
+            <a:pPr indent="0" marL="0">
+              <a:buNone/>
+            </a:pPr>
+            <a:r>
+              <a:rPr lang="en-US" sz="1000" spc="150" kern="0" dirty="0">
+                <a:solidFill>
+                  <a:srgbClr val="B5B5B5"/>
+                </a:solidFill>
+                <a:latin typeface="Calibri" pitchFamily="34" charset="0"/>
+                <a:ea typeface="Calibri" pitchFamily="34" charset="-122"/>
+                <a:cs typeface="Calibri" pitchFamily="34" charset="-120"/>
+              </a:rPr>
+              <a:t>      </a:t>
+            </a:r>
+            <a:pPr indent="0" marL="0">
+              <a:buNone/>
+            </a:pPr>
+            <a:r>
+              <a:rPr lang="en-US" sz="1000" b="1" spc="150" kern="0" dirty="0">
                 <a:solidFill>
                   <a:srgbClr val="C8102E"/>
                 </a:solidFill>
@@ -20870,9 +22164,65 @@
                 <a:ea typeface="Calibri" pitchFamily="34" charset="-122"/>
                 <a:cs typeface="Calibri" pitchFamily="34" charset="-120"/>
               </a:rPr>
-              <a:t>INDUSTRY AND COMPETITIVE ANALYSIS</a:t>
-            </a:r>
-            <a:endParaRPr lang="en-US" sz="1100" dirty="0"/>
+              <a:t>2  EXTERNAL ENVIRONMENT</a:t>
+            </a:r>
+            <a:pPr indent="0" marL="0">
+              <a:buNone/>
+            </a:pPr>
+            <a:r>
+              <a:rPr lang="en-US" sz="1000" spc="150" kern="0" dirty="0">
+                <a:solidFill>
+                  <a:srgbClr val="B5B5B5"/>
+                </a:solidFill>
+                <a:latin typeface="Calibri" pitchFamily="34" charset="0"/>
+                <a:ea typeface="Calibri" pitchFamily="34" charset="-122"/>
+                <a:cs typeface="Calibri" pitchFamily="34" charset="-120"/>
+              </a:rPr>
+              <a:t>      </a:t>
+            </a:r>
+            <a:pPr indent="0" marL="0">
+              <a:buNone/>
+            </a:pPr>
+            <a:r>
+              <a:rPr lang="en-US" sz="1000" spc="150" kern="0" dirty="0">
+                <a:solidFill>
+                  <a:srgbClr val="B5B5B5"/>
+                </a:solidFill>
+                <a:latin typeface="Calibri" pitchFamily="34" charset="0"/>
+                <a:ea typeface="Calibri" pitchFamily="34" charset="-122"/>
+                <a:cs typeface="Calibri" pitchFamily="34" charset="-120"/>
+              </a:rPr>
+              <a:t>3  COST POSITION</a:t>
+            </a:r>
+            <a:pPr indent="0" marL="0">
+              <a:buNone/>
+            </a:pPr>
+            <a:r>
+              <a:rPr lang="en-US" sz="1000" spc="150" kern="0" dirty="0">
+                <a:solidFill>
+                  <a:srgbClr val="B5B5B5"/>
+                </a:solidFill>
+                <a:latin typeface="Calibri" pitchFamily="34" charset="0"/>
+                <a:ea typeface="Calibri" pitchFamily="34" charset="-122"/>
+                <a:cs typeface="Calibri" pitchFamily="34" charset="-120"/>
+              </a:rPr>
+              <a:t>      </a:t>
+            </a:r>
+            <a:pPr indent="0" marL="0">
+              <a:buNone/>
+            </a:pPr>
+            <a:r>
+              <a:rPr lang="en-US" sz="1000" spc="150" kern="0" dirty="0">
+                <a:solidFill>
+                  <a:srgbClr val="B5B5B5"/>
+                </a:solidFill>
+                <a:latin typeface="Calibri" pitchFamily="34" charset="0"/>
+                <a:ea typeface="Calibri" pitchFamily="34" charset="-122"/>
+                <a:cs typeface="Calibri" pitchFamily="34" charset="-120"/>
+              </a:rPr>
+              <a:t>4  CHOICE</a:t>
+            </a:r>
+            <a:endParaRPr lang="en-US" sz="1000" dirty="0"/>
           </a:p>
         </p:txBody>
       </p:sp>
@@ -20884,8 +22234,8 @@
         </p:nvSpPr>
         <p:spPr>
           <a:xfrm>
-            <a:off x="548640" y="566928"/>
-            <a:ext cx="11064240" cy="731520"/>
+            <a:off x="548640" y="621792"/>
+            <a:ext cx="11064240" cy="640080"/>
           </a:xfrm>
           <a:prstGeom prst="rect">
             <a:avLst/>
@@ -20901,7 +22251,7 @@
               <a:buNone/>
             </a:pPr>
             <a:r>
-              <a:rPr lang="en-US" sz="2600" b="1" dirty="0">
+              <a:rPr lang="en-US" sz="3000" b="1" dirty="0">
                 <a:solidFill>
                   <a:srgbClr val="1C1C1C"/>
                 </a:solidFill>
@@ -20909,9 +22259,9 @@
                 <a:ea typeface="Cambria" pitchFamily="34" charset="-122"/>
                 <a:cs typeface="Cambria" pitchFamily="34" charset="-120"/>
               </a:rPr>
-              <a:t>Five Forces: industry structure squeezes margins, only the lowest cost operator survives</a:t>
-            </a:r>
-            <a:endParaRPr lang="en-US" sz="2600" dirty="0"/>
+              <a:t>Five Forces analysis</a:t>
+            </a:r>
+            <a:endParaRPr lang="en-US" sz="3000" dirty="0"/>
           </a:p>
         </p:txBody>
       </p:sp>
@@ -20923,12 +22273,12 @@
         </p:nvSpPr>
         <p:spPr>
           <a:xfrm>
-            <a:off x="3977640" y="3063240"/>
-            <a:ext cx="2468880" cy="1371600"/>
+            <a:off x="3977640" y="3017520"/>
+            <a:ext cx="2468880" cy="1325880"/>
           </a:xfrm>
           <a:prstGeom prst="roundRect">
             <a:avLst>
-              <a:gd name="adj" fmla="val 5333"/>
+              <a:gd name="adj" fmla="val 5517"/>
             </a:avLst>
           </a:prstGeom>
           <a:solidFill>
@@ -20950,8 +22300,8 @@
         </p:nvSpPr>
         <p:spPr>
           <a:xfrm>
-            <a:off x="4087368" y="3136392"/>
-            <a:ext cx="2249424" cy="1225296"/>
+            <a:off x="4087368" y="3090672"/>
+            <a:ext cx="2249424" cy="1179576"/>
           </a:xfrm>
           <a:prstGeom prst="rect">
             <a:avLst/>
@@ -21024,11 +22374,11 @@
         <p:spPr>
           <a:xfrm>
             <a:off x="3977640" y="1463040"/>
-            <a:ext cx="3200400" cy="1371600"/>
+            <a:ext cx="3200400" cy="1325880"/>
           </a:xfrm>
           <a:prstGeom prst="roundRect">
             <a:avLst>
-              <a:gd name="adj" fmla="val 5333"/>
+              <a:gd name="adj" fmla="val 5517"/>
             </a:avLst>
           </a:prstGeom>
           <a:solidFill>
@@ -21051,7 +22401,7 @@
         <p:spPr>
           <a:xfrm>
             <a:off x="4114800" y="1536192"/>
-            <a:ext cx="2926080" cy="1225296"/>
+            <a:ext cx="2926080" cy="1179576"/>
           </a:xfrm>
           <a:prstGeom prst="rect">
             <a:avLst/>
@@ -21120,12 +22470,12 @@
         </p:nvSpPr>
         <p:spPr>
           <a:xfrm>
-            <a:off x="3977640" y="4663440"/>
-            <a:ext cx="3200400" cy="1371600"/>
+            <a:off x="3977640" y="4572000"/>
+            <a:ext cx="3200400" cy="1325880"/>
           </a:xfrm>
           <a:prstGeom prst="roundRect">
             <a:avLst>
-              <a:gd name="adj" fmla="val 5333"/>
+              <a:gd name="adj" fmla="val 5517"/>
             </a:avLst>
           </a:prstGeom>
           <a:solidFill>
@@ -21147,8 +22497,8 @@
         </p:nvSpPr>
         <p:spPr>
           <a:xfrm>
-            <a:off x="4114800" y="4736592"/>
-            <a:ext cx="2926080" cy="1225296"/>
+            <a:off x="4114800" y="4645152"/>
+            <a:ext cx="2926080" cy="1179576"/>
           </a:xfrm>
           <a:prstGeom prst="rect">
             <a:avLst/>
@@ -21217,12 +22567,12 @@
         </p:nvSpPr>
         <p:spPr>
           <a:xfrm>
-            <a:off x="548640" y="3063240"/>
-            <a:ext cx="3200400" cy="1371600"/>
+            <a:off x="548640" y="3017520"/>
+            <a:ext cx="3200400" cy="1325880"/>
           </a:xfrm>
           <a:prstGeom prst="roundRect">
             <a:avLst>
-              <a:gd name="adj" fmla="val 5333"/>
+              <a:gd name="adj" fmla="val 5517"/>
             </a:avLst>
           </a:prstGeom>
           <a:solidFill>
@@ -21244,8 +22594,8 @@
         </p:nvSpPr>
         <p:spPr>
           <a:xfrm>
-            <a:off x="685800" y="3136392"/>
-            <a:ext cx="2926080" cy="1225296"/>
+            <a:off x="685800" y="3090672"/>
+            <a:ext cx="2926080" cy="1179576"/>
           </a:xfrm>
           <a:prstGeom prst="rect">
             <a:avLst/>
@@ -21314,12 +22664,12 @@
         </p:nvSpPr>
         <p:spPr>
           <a:xfrm>
-            <a:off x="7406640" y="3063240"/>
-            <a:ext cx="3200400" cy="1371600"/>
+            <a:off x="7406640" y="3017520"/>
+            <a:ext cx="3200400" cy="1325880"/>
           </a:xfrm>
           <a:prstGeom prst="roundRect">
             <a:avLst>
-              <a:gd name="adj" fmla="val 5333"/>
+              <a:gd name="adj" fmla="val 5517"/>
             </a:avLst>
           </a:prstGeom>
           <a:solidFill>
@@ -21341,8 +22691,8 @@
         </p:nvSpPr>
         <p:spPr>
           <a:xfrm>
-            <a:off x="7543800" y="3136392"/>
-            <a:ext cx="2926080" cy="1225296"/>
+            <a:off x="7543800" y="3090672"/>
+            <a:ext cx="2926080" cy="1179576"/>
           </a:xfrm>
           <a:prstGeom prst="rect">
             <a:avLst/>
@@ -21411,7 +22761,7 @@
         </p:nvSpPr>
         <p:spPr>
           <a:xfrm>
-            <a:off x="5212080" y="2834640"/>
+            <a:off x="5212080" y="2788920"/>
             <a:ext cx="0" cy="228600"/>
           </a:xfrm>
           <a:prstGeom prst="line">
@@ -21434,7 +22784,7 @@
         </p:nvSpPr>
         <p:spPr>
           <a:xfrm>
-            <a:off x="5212080" y="4434840"/>
+            <a:off x="5212080" y="4343400"/>
             <a:ext cx="0" cy="228600"/>
           </a:xfrm>
           <a:prstGeom prst="line">
@@ -21457,7 +22807,7 @@
         </p:nvSpPr>
         <p:spPr>
           <a:xfrm>
-            <a:off x="3749040" y="3749040"/>
+            <a:off x="3749040" y="3675888"/>
             <a:ext cx="228600" cy="0"/>
           </a:xfrm>
           <a:prstGeom prst="line">
@@ -21480,7 +22830,7 @@
         </p:nvSpPr>
         <p:spPr>
           <a:xfrm>
-            <a:off x="6446520" y="3749040"/>
+            <a:off x="6446520" y="3675888"/>
             <a:ext cx="960120" cy="0"/>
           </a:xfrm>
           <a:prstGeom prst="line">
@@ -21504,11 +22854,11 @@
         <p:spPr>
           <a:xfrm>
             <a:off x="7406640" y="1463040"/>
-            <a:ext cx="4206240" cy="1371600"/>
+            <a:ext cx="4206240" cy="1325880"/>
           </a:xfrm>
           <a:prstGeom prst="roundRect">
             <a:avLst>
-              <a:gd name="adj" fmla="val 5333"/>
+              <a:gd name="adj" fmla="val 5517"/>
             </a:avLst>
           </a:prstGeom>
           <a:solidFill>
@@ -21531,7 +22881,7 @@
         <p:spPr>
           <a:xfrm>
             <a:off x="7589520" y="1536192"/>
-            <a:ext cx="3840480" cy="1225296"/>
+            <a:ext cx="3840480" cy="1179576"/>
           </a:xfrm>
           <a:prstGeom prst="rect">
             <a:avLst/>
@@ -21572,7 +22922,7 @@
                 <a:ea typeface="Calibri" pitchFamily="34" charset="-122"/>
                 <a:cs typeface="Calibri" pitchFamily="34" charset="-120"/>
               </a:rPr>
-              <a:t>Struktur industri yang keras (pemasok dan pembeli kuat, rivalitas tinggi) memaksa perilaku (conduct) berupa disiplin biaya ekstrem. Kinerja (performance) unggul hanya lahir dari posisi biaya terendah, bukan dari diferensiasi.</a:t>
+              <a:t>Struktur industri (pemasok dan pembeli kuat, rivalitas tinggi) memaksa perilaku (conduct) berupa disiplin biaya. Kinerja (performance) unggul hanya lahir dari posisi biaya terendah, bukan dari diferensiasi.</a:t>
             </a:r>
             <a:endParaRPr lang="en-US" sz="1150" dirty="0"/>
           </a:p>
@@ -21586,12 +22936,12 @@
         </p:nvSpPr>
         <p:spPr>
           <a:xfrm>
-            <a:off x="7406640" y="4663440"/>
-            <a:ext cx="4206240" cy="1371600"/>
+            <a:off x="7406640" y="4572000"/>
+            <a:ext cx="4206240" cy="1325880"/>
           </a:xfrm>
           <a:prstGeom prst="roundRect">
             <a:avLst>
-              <a:gd name="adj" fmla="val 5333"/>
+              <a:gd name="adj" fmla="val 5517"/>
             </a:avLst>
           </a:prstGeom>
           <a:solidFill>
@@ -21613,8 +22963,8 @@
         </p:nvSpPr>
         <p:spPr>
           <a:xfrm>
-            <a:off x="7589520" y="4736592"/>
-            <a:ext cx="3840480" cy="1225296"/>
+            <a:off x="7589520" y="4645152"/>
+            <a:ext cx="3840480" cy="1179576"/>
           </a:xfrm>
           <a:prstGeom prst="rect">
             <a:avLst/>
@@ -21670,11 +23020,11 @@
         <p:spPr>
           <a:xfrm>
             <a:off x="548640" y="1463040"/>
-            <a:ext cx="3200400" cy="1371600"/>
+            <a:ext cx="3200400" cy="1325880"/>
           </a:xfrm>
           <a:prstGeom prst="roundRect">
             <a:avLst>
-              <a:gd name="adj" fmla="val 5333"/>
+              <a:gd name="adj" fmla="val 5517"/>
             </a:avLst>
           </a:prstGeom>
           <a:solidFill>
@@ -21697,7 +23047,7 @@
         <p:spPr>
           <a:xfrm>
             <a:off x="731520" y="1536192"/>
-            <a:ext cx="2834640" cy="1225296"/>
+            <a:ext cx="2834640" cy="1179576"/>
           </a:xfrm>
           <a:prstGeom prst="rect">
             <a:avLst/>
@@ -21752,12 +23102,12 @@
         </p:nvSpPr>
         <p:spPr>
           <a:xfrm>
-            <a:off x="548640" y="4663440"/>
-            <a:ext cx="3200400" cy="1371600"/>
+            <a:off x="548640" y="4572000"/>
+            <a:ext cx="3200400" cy="1325880"/>
           </a:xfrm>
           <a:prstGeom prst="roundRect">
             <a:avLst>
-              <a:gd name="adj" fmla="val 5333"/>
+              <a:gd name="adj" fmla="val 5517"/>
             </a:avLst>
           </a:prstGeom>
           <a:solidFill>
@@ -21779,8 +23129,8 @@
         </p:nvSpPr>
         <p:spPr>
           <a:xfrm>
-            <a:off x="731520" y="4736592"/>
-            <a:ext cx="2834640" cy="1225296"/>
+            <a:off x="731520" y="4645152"/>
+            <a:ext cx="2834640" cy="1179576"/>
           </a:xfrm>
           <a:prstGeom prst="rect">
             <a:avLst/>
@@ -21835,6 +23185,59 @@
         </p:nvSpPr>
         <p:spPr>
           <a:xfrm>
+            <a:off x="548640" y="6016752"/>
+            <a:ext cx="11064240" cy="365760"/>
+          </a:xfrm>
+          <a:prstGeom prst="rect">
+            <a:avLst/>
+          </a:prstGeom>
+          <a:noFill/>
+          <a:ln/>
+        </p:spPr>
+        <p:txBody>
+          <a:bodyPr wrap="square" lIns="0" tIns="0" rIns="0" bIns="0" rtlCol="0" anchor="ctr"/>
+          <a:lstStyle/>
+          <a:p>
+            <a:pPr indent="0" marL="0">
+              <a:buNone/>
+            </a:pPr>
+            <a:r>
+              <a:rPr lang="en-US" sz="1050" b="1" dirty="0">
+                <a:solidFill>
+                  <a:srgbClr val="C8102E"/>
+                </a:solidFill>
+                <a:latin typeface="Calibri" pitchFamily="34" charset="0"/>
+                <a:ea typeface="Calibri" pitchFamily="34" charset="-122"/>
+                <a:cs typeface="Calibri" pitchFamily="34" charset="-120"/>
+              </a:rPr>
+              <a:t>Kaitan.  </a:t>
+            </a:r>
+            <a:pPr indent="0" marL="0">
+              <a:buNone/>
+            </a:pPr>
+            <a:r>
+              <a:rPr lang="en-US" sz="1050" i="1" dirty="0">
+                <a:solidFill>
+                  <a:srgbClr val="6E6E6E"/>
+                </a:solidFill>
+                <a:latin typeface="Calibri" pitchFamily="34" charset="0"/>
+                <a:ea typeface="Calibri" pitchFamily="34" charset="-122"/>
+                <a:cs typeface="Calibri" pitchFamily="34" charset="-120"/>
+              </a:rPr>
+              <a:t>Struktur industri menjelaskan mengapa laba langka. Slide berikutnya melihat apa yang sedang mengubah struktur itu dan faktor apa yang menentukan siapa yang menang.</a:t>
+            </a:r>
+            <a:endParaRPr lang="en-US" sz="1050" dirty="0"/>
+          </a:p>
+        </p:txBody>
+      </p:sp>
+      <p:sp>
+        <p:nvSpPr>
+          <p:cNvPr id="27" name="Text 25"/>
+          <p:cNvSpPr txBox="1"/>
+          <p:nvPr/>
+        </p:nvSpPr>
+        <p:spPr>
+          <a:xfrm>
             <a:off x="548640" y="6446520"/>
             <a:ext cx="7315200" cy="274320"/>
           </a:xfrm>
@@ -21868,7 +23271,7 @@
       </p:sp>
       <p:sp>
         <p:nvSpPr>
-          <p:cNvPr id="27" name="Text 25"/>
+          <p:cNvPr id="28" name="Text 26"/>
           <p:cNvSpPr txBox="1"/>
           <p:nvPr/>
         </p:nvSpPr>
@@ -21946,7 +23349,7 @@
         <p:spPr>
           <a:xfrm>
             <a:off x="548640" y="320040"/>
-            <a:ext cx="10972800" cy="274320"/>
+            <a:ext cx="11064240" cy="274320"/>
           </a:xfrm>
           <a:prstGeom prst="rect">
             <a:avLst/>
@@ -21962,7 +23365,35 @@
               <a:buNone/>
             </a:pPr>
             <a:r>
-              <a:rPr lang="en-US" sz="1100" b="1" spc="200" kern="0" dirty="0">
+              <a:rPr lang="en-US" sz="1000" spc="150" kern="0" dirty="0">
+                <a:solidFill>
+                  <a:srgbClr val="B5B5B5"/>
+                </a:solidFill>
+                <a:latin typeface="Calibri" pitchFamily="34" charset="0"/>
+                <a:ea typeface="Calibri" pitchFamily="34" charset="-122"/>
+                <a:cs typeface="Calibri" pitchFamily="34" charset="-120"/>
+              </a:rPr>
+              <a:t>1  PROBLEM</a:t>
+            </a:r>
+            <a:pPr indent="0" marL="0">
+              <a:buNone/>
+            </a:pPr>
+            <a:r>
+              <a:rPr lang="en-US" sz="1000" spc="150" kern="0" dirty="0">
+                <a:solidFill>
+                  <a:srgbClr val="B5B5B5"/>
+                </a:solidFill>
+                <a:latin typeface="Calibri" pitchFamily="34" charset="0"/>
+                <a:ea typeface="Calibri" pitchFamily="34" charset="-122"/>
+                <a:cs typeface="Calibri" pitchFamily="34" charset="-120"/>
+              </a:rPr>
+              <a:t>      </a:t>
+            </a:r>
+            <a:pPr indent="0" marL="0">
+              <a:buNone/>
+            </a:pPr>
+            <a:r>
+              <a:rPr lang="en-US" sz="1000" b="1" spc="150" kern="0" dirty="0">
                 <a:solidFill>
                   <a:srgbClr val="C8102E"/>
                 </a:solidFill>
@@ -21970,9 +23401,65 @@
                 <a:ea typeface="Calibri" pitchFamily="34" charset="-122"/>
                 <a:cs typeface="Calibri" pitchFamily="34" charset="-120"/>
               </a:rPr>
-              <a:t>INDUSTRY DYNAMICS</a:t>
-            </a:r>
-            <a:endParaRPr lang="en-US" sz="1100" dirty="0"/>
+              <a:t>2  EXTERNAL ENVIRONMENT</a:t>
+            </a:r>
+            <a:pPr indent="0" marL="0">
+              <a:buNone/>
+            </a:pPr>
+            <a:r>
+              <a:rPr lang="en-US" sz="1000" spc="150" kern="0" dirty="0">
+                <a:solidFill>
+                  <a:srgbClr val="B5B5B5"/>
+                </a:solidFill>
+                <a:latin typeface="Calibri" pitchFamily="34" charset="0"/>
+                <a:ea typeface="Calibri" pitchFamily="34" charset="-122"/>
+                <a:cs typeface="Calibri" pitchFamily="34" charset="-120"/>
+              </a:rPr>
+              <a:t>      </a:t>
+            </a:r>
+            <a:pPr indent="0" marL="0">
+              <a:buNone/>
+            </a:pPr>
+            <a:r>
+              <a:rPr lang="en-US" sz="1000" spc="150" kern="0" dirty="0">
+                <a:solidFill>
+                  <a:srgbClr val="B5B5B5"/>
+                </a:solidFill>
+                <a:latin typeface="Calibri" pitchFamily="34" charset="0"/>
+                <a:ea typeface="Calibri" pitchFamily="34" charset="-122"/>
+                <a:cs typeface="Calibri" pitchFamily="34" charset="-120"/>
+              </a:rPr>
+              <a:t>3  COST POSITION</a:t>
+            </a:r>
+            <a:pPr indent="0" marL="0">
+              <a:buNone/>
+            </a:pPr>
+            <a:r>
+              <a:rPr lang="en-US" sz="1000" spc="150" kern="0" dirty="0">
+                <a:solidFill>
+                  <a:srgbClr val="B5B5B5"/>
+                </a:solidFill>
+                <a:latin typeface="Calibri" pitchFamily="34" charset="0"/>
+                <a:ea typeface="Calibri" pitchFamily="34" charset="-122"/>
+                <a:cs typeface="Calibri" pitchFamily="34" charset="-120"/>
+              </a:rPr>
+              <a:t>      </a:t>
+            </a:r>
+            <a:pPr indent="0" marL="0">
+              <a:buNone/>
+            </a:pPr>
+            <a:r>
+              <a:rPr lang="en-US" sz="1000" spc="150" kern="0" dirty="0">
+                <a:solidFill>
+                  <a:srgbClr val="B5B5B5"/>
+                </a:solidFill>
+                <a:latin typeface="Calibri" pitchFamily="34" charset="0"/>
+                <a:ea typeface="Calibri" pitchFamily="34" charset="-122"/>
+                <a:cs typeface="Calibri" pitchFamily="34" charset="-120"/>
+              </a:rPr>
+              <a:t>4  CHOICE</a:t>
+            </a:r>
+            <a:endParaRPr lang="en-US" sz="1000" dirty="0"/>
           </a:p>
         </p:txBody>
       </p:sp>
@@ -21984,8 +23471,8 @@
         </p:nvSpPr>
         <p:spPr>
           <a:xfrm>
-            <a:off x="548640" y="566928"/>
-            <a:ext cx="11064240" cy="731520"/>
+            <a:off x="548640" y="621792"/>
+            <a:ext cx="11064240" cy="640080"/>
           </a:xfrm>
           <a:prstGeom prst="rect">
             <a:avLst/>
@@ -22001,7 +23488,7 @@
               <a:buNone/>
             </a:pPr>
             <a:r>
-              <a:rPr lang="en-US" sz="2600" b="1" dirty="0">
+              <a:rPr lang="en-US" sz="3000" b="1" dirty="0">
                 <a:solidFill>
                   <a:srgbClr val="1C1C1C"/>
                 </a:solidFill>
@@ -22009,9 +23496,9 @@
                 <a:ea typeface="Cambria" pitchFamily="34" charset="-122"/>
                 <a:cs typeface="Cambria" pitchFamily="34" charset="-120"/>
               </a:rPr>
-              <a:t>Driving forces change the rules of the game; key success factors decide who wins</a:t>
-            </a:r>
-            <a:endParaRPr lang="en-US" sz="2600" dirty="0"/>
+              <a:t>Driving forces and key success factors</a:t>
+            </a:r>
+            <a:endParaRPr lang="en-US" sz="3000" dirty="0"/>
           </a:p>
         </p:txBody>
       </p:sp>
@@ -22023,7 +23510,7 @@
         </p:nvSpPr>
         <p:spPr>
           <a:xfrm>
-            <a:off x="548640" y="1463040"/>
+            <a:off x="548640" y="1417320"/>
             <a:ext cx="5486400" cy="365760"/>
           </a:xfrm>
           <a:prstGeom prst="rect">
@@ -22062,7 +23549,7 @@
         </p:nvSpPr>
         <p:spPr>
           <a:xfrm>
-            <a:off x="548640" y="1920240"/>
+            <a:off x="548640" y="1874520"/>
             <a:ext cx="365760" cy="365760"/>
           </a:xfrm>
           <a:prstGeom prst="ellipse">
@@ -22087,7 +23574,7 @@
         </p:nvSpPr>
         <p:spPr>
           <a:xfrm>
-            <a:off x="548640" y="1920240"/>
+            <a:off x="548640" y="1874520"/>
             <a:ext cx="365760" cy="365760"/>
           </a:xfrm>
           <a:prstGeom prst="rect">
@@ -22126,7 +23613,7 @@
         </p:nvSpPr>
         <p:spPr>
           <a:xfrm>
-            <a:off x="1051560" y="1874520"/>
+            <a:off x="1051560" y="1828800"/>
             <a:ext cx="4754880" cy="731520"/>
           </a:xfrm>
           <a:prstGeom prst="rect">
@@ -22182,7 +23669,7 @@
         </p:nvSpPr>
         <p:spPr>
           <a:xfrm>
-            <a:off x="548640" y="2706624"/>
+            <a:off x="548640" y="2660904"/>
             <a:ext cx="365760" cy="365760"/>
           </a:xfrm>
           <a:prstGeom prst="ellipse">
@@ -22207,7 +23694,7 @@
         </p:nvSpPr>
         <p:spPr>
           <a:xfrm>
-            <a:off x="548640" y="2706624"/>
+            <a:off x="548640" y="2660904"/>
             <a:ext cx="365760" cy="365760"/>
           </a:xfrm>
           <a:prstGeom prst="rect">
@@ -22246,7 +23733,7 @@
         </p:nvSpPr>
         <p:spPr>
           <a:xfrm>
-            <a:off x="1051560" y="2660904"/>
+            <a:off x="1051560" y="2615184"/>
             <a:ext cx="4754880" cy="731520"/>
           </a:xfrm>
           <a:prstGeom prst="rect">
@@ -22302,7 +23789,7 @@
         </p:nvSpPr>
         <p:spPr>
           <a:xfrm>
-            <a:off x="548640" y="3493008"/>
+            <a:off x="548640" y="3447288"/>
             <a:ext cx="365760" cy="365760"/>
           </a:xfrm>
           <a:prstGeom prst="ellipse">
@@ -22327,7 +23814,7 @@
         </p:nvSpPr>
         <p:spPr>
           <a:xfrm>
-            <a:off x="548640" y="3493008"/>
+            <a:off x="548640" y="3447288"/>
             <a:ext cx="365760" cy="365760"/>
           </a:xfrm>
           <a:prstGeom prst="rect">
@@ -22366,7 +23853,7 @@
         </p:nvSpPr>
         <p:spPr>
           <a:xfrm>
-            <a:off x="1051560" y="3447288"/>
+            <a:off x="1051560" y="3401568"/>
             <a:ext cx="4754880" cy="731520"/>
           </a:xfrm>
           <a:prstGeom prst="rect">
@@ -22408,7 +23895,7 @@
                 <a:ea typeface="Calibri" pitchFamily="34" charset="-122"/>
                 <a:cs typeface="Calibri" pitchFamily="34" charset="-120"/>
               </a:rPr>
-              <a:t>Kenaikan lalu penurunan tajam pada 2008 menghukum maskapai yang salah posisi lindung nilai (hedging), termasuk AirAsia.</a:t>
+              <a:t>Kenaikan lalu penurunan tajam pada 2008 merugikan maskapai yang salah posisi lindung nilai (hedging), termasuk AirAsia.</a:t>
             </a:r>
             <a:endParaRPr lang="en-US" sz="1200" dirty="0"/>
           </a:p>
@@ -22422,7 +23909,7 @@
         </p:nvSpPr>
         <p:spPr>
           <a:xfrm>
-            <a:off x="548640" y="4279392"/>
+            <a:off x="548640" y="4233672"/>
             <a:ext cx="365760" cy="365760"/>
           </a:xfrm>
           <a:prstGeom prst="ellipse">
@@ -22447,7 +23934,7 @@
         </p:nvSpPr>
         <p:spPr>
           <a:xfrm>
-            <a:off x="548640" y="4279392"/>
+            <a:off x="548640" y="4233672"/>
             <a:ext cx="365760" cy="365760"/>
           </a:xfrm>
           <a:prstGeom prst="rect">
@@ -22486,7 +23973,7 @@
         </p:nvSpPr>
         <p:spPr>
           <a:xfrm>
-            <a:off x="1051560" y="4233672"/>
+            <a:off x="1051560" y="4187952"/>
             <a:ext cx="4754880" cy="731520"/>
           </a:xfrm>
           <a:prstGeom prst="rect">
@@ -22542,7 +24029,7 @@
         </p:nvSpPr>
         <p:spPr>
           <a:xfrm>
-            <a:off x="548640" y="5065776"/>
+            <a:off x="548640" y="5020056"/>
             <a:ext cx="365760" cy="365760"/>
           </a:xfrm>
           <a:prstGeom prst="ellipse">
@@ -22567,7 +24054,7 @@
         </p:nvSpPr>
         <p:spPr>
           <a:xfrm>
-            <a:off x="548640" y="5065776"/>
+            <a:off x="548640" y="5020056"/>
             <a:ext cx="365760" cy="365760"/>
           </a:xfrm>
           <a:prstGeom prst="rect">
@@ -22606,7 +24093,7 @@
         </p:nvSpPr>
         <p:spPr>
           <a:xfrm>
-            <a:off x="1051560" y="5020056"/>
+            <a:off x="1051560" y="4974336"/>
             <a:ext cx="4754880" cy="731520"/>
           </a:xfrm>
           <a:prstGeom prst="rect">
@@ -22662,12 +24149,12 @@
         </p:nvSpPr>
         <p:spPr>
           <a:xfrm>
-            <a:off x="6309360" y="1463040"/>
-            <a:ext cx="5303520" cy="4297680"/>
+            <a:off x="6309360" y="1417320"/>
+            <a:ext cx="5303520" cy="4480560"/>
           </a:xfrm>
           <a:prstGeom prst="roundRect">
             <a:avLst>
-              <a:gd name="adj" fmla="val 1702"/>
+              <a:gd name="adj" fmla="val 1633"/>
             </a:avLst>
           </a:prstGeom>
           <a:solidFill>
@@ -22689,7 +24176,7 @@
         </p:nvSpPr>
         <p:spPr>
           <a:xfrm>
-            <a:off x="6537960" y="1572768"/>
+            <a:off x="6537960" y="1527048"/>
             <a:ext cx="4846320" cy="365760"/>
           </a:xfrm>
           <a:prstGeom prst="rect">
@@ -22728,8 +24215,8 @@
         </p:nvSpPr>
         <p:spPr>
           <a:xfrm>
-            <a:off x="6537960" y="2103120"/>
-            <a:ext cx="2331720" cy="1097280"/>
+            <a:off x="6537960" y="2057400"/>
+            <a:ext cx="2331720" cy="1143000"/>
           </a:xfrm>
           <a:prstGeom prst="rect">
             <a:avLst/>
@@ -22784,8 +24271,8 @@
         </p:nvSpPr>
         <p:spPr>
           <a:xfrm>
-            <a:off x="9052560" y="2103120"/>
-            <a:ext cx="2331720" cy="1097280"/>
+            <a:off x="9052560" y="2057400"/>
+            <a:ext cx="2331720" cy="1143000"/>
           </a:xfrm>
           <a:prstGeom prst="rect">
             <a:avLst/>
@@ -22841,7 +24328,7 @@
         <p:spPr>
           <a:xfrm>
             <a:off x="6537960" y="3291840"/>
-            <a:ext cx="2331720" cy="1097280"/>
+            <a:ext cx="2331720" cy="1143000"/>
           </a:xfrm>
           <a:prstGeom prst="rect">
             <a:avLst/>
@@ -22897,7 +24384,7 @@
         <p:spPr>
           <a:xfrm>
             <a:off x="9052560" y="3291840"/>
-            <a:ext cx="2331720" cy="1097280"/>
+            <a:ext cx="2331720" cy="1143000"/>
           </a:xfrm>
           <a:prstGeom prst="rect">
             <a:avLst/>
@@ -22952,8 +24439,8 @@
         </p:nvSpPr>
         <p:spPr>
           <a:xfrm>
-            <a:off x="6537960" y="4480560"/>
-            <a:ext cx="2331720" cy="1097280"/>
+            <a:off x="6537960" y="4526280"/>
+            <a:ext cx="2331720" cy="1143000"/>
           </a:xfrm>
           <a:prstGeom prst="rect">
             <a:avLst/>
@@ -23008,8 +24495,8 @@
         </p:nvSpPr>
         <p:spPr>
           <a:xfrm>
-            <a:off x="9052560" y="4480560"/>
-            <a:ext cx="2331720" cy="1097280"/>
+            <a:off x="9052560" y="4526280"/>
+            <a:ext cx="2331720" cy="1143000"/>
           </a:xfrm>
           <a:prstGeom prst="rect">
             <a:avLst/>
@@ -23064,8 +24551,8 @@
         </p:nvSpPr>
         <p:spPr>
           <a:xfrm>
-            <a:off x="6309360" y="5852160"/>
-            <a:ext cx="5303520" cy="457200"/>
+            <a:off x="548640" y="6016752"/>
+            <a:ext cx="11064240" cy="365760"/>
           </a:xfrm>
           <a:prstGeom prst="rect">
             <a:avLst/>
@@ -23089,21 +24576,21 @@
                 <a:ea typeface="Calibri" pitchFamily="34" charset="-122"/>
                 <a:cs typeface="Calibri" pitchFamily="34" charset="-120"/>
               </a:rPr>
-              <a:t>Benang merah. </a:t>
-            </a:r>
-            <a:pPr indent="0" marL="0">
-              <a:buNone/>
-            </a:pPr>
-            <a:r>
-              <a:rPr lang="en-US" sz="1050" dirty="0">
-                <a:solidFill>
-                  <a:srgbClr val="1C1C1C"/>
-                </a:solidFill>
-                <a:latin typeface="Calibri" pitchFamily="34" charset="0"/>
-                <a:ea typeface="Calibri" pitchFamily="34" charset="-122"/>
-                <a:cs typeface="Calibri" pitchFamily="34" charset="-120"/>
-              </a:rPr>
-              <a:t>Apabila pembeli peka harga dan pemasok kuat, maka faktor penentu kemenangan adalah biaya, utilisasi, dan load factor. Slide berikutnya menguji apakah AirAsia memenuhi ketiganya dibanding Malaysia Airlines.</a:t>
+              <a:t>Kaitan.  </a:t>
+            </a:r>
+            <a:pPr indent="0" marL="0">
+              <a:buNone/>
+            </a:pPr>
+            <a:r>
+              <a:rPr lang="en-US" sz="1050" i="1" dirty="0">
+                <a:solidFill>
+                  <a:srgbClr val="6E6E6E"/>
+                </a:solidFill>
+                <a:latin typeface="Calibri" pitchFamily="34" charset="0"/>
+                <a:ea typeface="Calibri" pitchFamily="34" charset="-122"/>
+                <a:cs typeface="Calibri" pitchFamily="34" charset="-120"/>
+              </a:rPr>
+              <a:t>Faktor kunci ini menjadi tolok ukur. Sebelum mengukur AirAsia terhadapnya, slide berikutnya memetakan di kelompok pesaing mana AirAsia dan AirAsia X berada.</a:t>
             </a:r>
             <a:endParaRPr lang="en-US" sz="1050" dirty="0"/>
           </a:p>
@@ -23228,7 +24715,7 @@
         <p:spPr>
           <a:xfrm>
             <a:off x="548640" y="320040"/>
-            <a:ext cx="10972800" cy="274320"/>
+            <a:ext cx="11064240" cy="274320"/>
           </a:xfrm>
           <a:prstGeom prst="rect">
             <a:avLst/>
@@ -23244,7 +24731,35 @@
               <a:buNone/>
             </a:pPr>
             <a:r>
-              <a:rPr lang="en-US" sz="1100" b="1" spc="200" kern="0" dirty="0">
+              <a:rPr lang="en-US" sz="1000" spc="150" kern="0" dirty="0">
+                <a:solidFill>
+                  <a:srgbClr val="B5B5B5"/>
+                </a:solidFill>
+                <a:latin typeface="Calibri" pitchFamily="34" charset="0"/>
+                <a:ea typeface="Calibri" pitchFamily="34" charset="-122"/>
+                <a:cs typeface="Calibri" pitchFamily="34" charset="-120"/>
+              </a:rPr>
+              <a:t>1  PROBLEM</a:t>
+            </a:r>
+            <a:pPr indent="0" marL="0">
+              <a:buNone/>
+            </a:pPr>
+            <a:r>
+              <a:rPr lang="en-US" sz="1000" spc="150" kern="0" dirty="0">
+                <a:solidFill>
+                  <a:srgbClr val="B5B5B5"/>
+                </a:solidFill>
+                <a:latin typeface="Calibri" pitchFamily="34" charset="0"/>
+                <a:ea typeface="Calibri" pitchFamily="34" charset="-122"/>
+                <a:cs typeface="Calibri" pitchFamily="34" charset="-120"/>
+              </a:rPr>
+              <a:t>      </a:t>
+            </a:r>
+            <a:pPr indent="0" marL="0">
+              <a:buNone/>
+            </a:pPr>
+            <a:r>
+              <a:rPr lang="en-US" sz="1000" b="1" spc="150" kern="0" dirty="0">
                 <a:solidFill>
                   <a:srgbClr val="C8102E"/>
                 </a:solidFill>
@@ -23252,9 +24767,65 @@
                 <a:ea typeface="Calibri" pitchFamily="34" charset="-122"/>
                 <a:cs typeface="Calibri" pitchFamily="34" charset="-120"/>
               </a:rPr>
-              <a:t>STRATEGIC GROUP MAP</a:t>
-            </a:r>
-            <a:endParaRPr lang="en-US" sz="1100" dirty="0"/>
+              <a:t>2  EXTERNAL ENVIRONMENT</a:t>
+            </a:r>
+            <a:pPr indent="0" marL="0">
+              <a:buNone/>
+            </a:pPr>
+            <a:r>
+              <a:rPr lang="en-US" sz="1000" spc="150" kern="0" dirty="0">
+                <a:solidFill>
+                  <a:srgbClr val="B5B5B5"/>
+                </a:solidFill>
+                <a:latin typeface="Calibri" pitchFamily="34" charset="0"/>
+                <a:ea typeface="Calibri" pitchFamily="34" charset="-122"/>
+                <a:cs typeface="Calibri" pitchFamily="34" charset="-120"/>
+              </a:rPr>
+              <a:t>      </a:t>
+            </a:r>
+            <a:pPr indent="0" marL="0">
+              <a:buNone/>
+            </a:pPr>
+            <a:r>
+              <a:rPr lang="en-US" sz="1000" spc="150" kern="0" dirty="0">
+                <a:solidFill>
+                  <a:srgbClr val="B5B5B5"/>
+                </a:solidFill>
+                <a:latin typeface="Calibri" pitchFamily="34" charset="0"/>
+                <a:ea typeface="Calibri" pitchFamily="34" charset="-122"/>
+                <a:cs typeface="Calibri" pitchFamily="34" charset="-120"/>
+              </a:rPr>
+              <a:t>3  COST POSITION</a:t>
+            </a:r>
+            <a:pPr indent="0" marL="0">
+              <a:buNone/>
+            </a:pPr>
+            <a:r>
+              <a:rPr lang="en-US" sz="1000" spc="150" kern="0" dirty="0">
+                <a:solidFill>
+                  <a:srgbClr val="B5B5B5"/>
+                </a:solidFill>
+                <a:latin typeface="Calibri" pitchFamily="34" charset="0"/>
+                <a:ea typeface="Calibri" pitchFamily="34" charset="-122"/>
+                <a:cs typeface="Calibri" pitchFamily="34" charset="-120"/>
+              </a:rPr>
+              <a:t>      </a:t>
+            </a:r>
+            <a:pPr indent="0" marL="0">
+              <a:buNone/>
+            </a:pPr>
+            <a:r>
+              <a:rPr lang="en-US" sz="1000" spc="150" kern="0" dirty="0">
+                <a:solidFill>
+                  <a:srgbClr val="B5B5B5"/>
+                </a:solidFill>
+                <a:latin typeface="Calibri" pitchFamily="34" charset="0"/>
+                <a:ea typeface="Calibri" pitchFamily="34" charset="-122"/>
+                <a:cs typeface="Calibri" pitchFamily="34" charset="-120"/>
+              </a:rPr>
+              <a:t>4  CHOICE</a:t>
+            </a:r>
+            <a:endParaRPr lang="en-US" sz="1000" dirty="0"/>
           </a:p>
         </p:txBody>
       </p:sp>
@@ -23266,8 +24837,8 @@
         </p:nvSpPr>
         <p:spPr>
           <a:xfrm>
-            <a:off x="548640" y="566928"/>
-            <a:ext cx="11064240" cy="731520"/>
+            <a:off x="548640" y="621792"/>
+            <a:ext cx="11064240" cy="640080"/>
           </a:xfrm>
           <a:prstGeom prst="rect">
             <a:avLst/>
@@ -23283,7 +24854,7 @@
               <a:buNone/>
             </a:pPr>
             <a:r>
-              <a:rPr lang="en-US" sz="2600" b="1" dirty="0">
+              <a:rPr lang="en-US" sz="3000" b="1" dirty="0">
                 <a:solidFill>
                   <a:srgbClr val="1C1C1C"/>
                 </a:solidFill>
@@ -23291,9 +24862,9 @@
                 <a:ea typeface="Cambria" pitchFamily="34" charset="-122"/>
                 <a:cs typeface="Cambria" pitchFamily="34" charset="-120"/>
               </a:rPr>
-              <a:t>AirAsia X enters a nearly empty space: low cost on long haul routes</a:t>
-            </a:r>
-            <a:endParaRPr lang="en-US" sz="2600" dirty="0"/>
+              <a:t>Strategic group map</a:t>
+            </a:r>
+            <a:endParaRPr lang="en-US" sz="3000" dirty="0"/>
           </a:p>
         </p:txBody>
       </p:sp>
@@ -23305,8 +24876,8 @@
         </p:nvSpPr>
         <p:spPr>
           <a:xfrm>
-            <a:off x="1097280" y="1554480"/>
-            <a:ext cx="6675120" cy="4480560"/>
+            <a:off x="1097280" y="1463040"/>
+            <a:ext cx="6675120" cy="4160520"/>
           </a:xfrm>
           <a:prstGeom prst="rect">
             <a:avLst/>
@@ -23330,7 +24901,7 @@
         </p:nvSpPr>
         <p:spPr>
           <a:xfrm>
-            <a:off x="1097280" y="3794760"/>
+            <a:off x="1097280" y="3543300"/>
             <a:ext cx="6675120" cy="0"/>
           </a:xfrm>
           <a:prstGeom prst="line">
@@ -23353,8 +24924,8 @@
         </p:nvSpPr>
         <p:spPr>
           <a:xfrm>
-            <a:off x="4434840" y="1554480"/>
-            <a:ext cx="0" cy="4480560"/>
+            <a:off x="4434840" y="1463040"/>
+            <a:ext cx="0" cy="4160520"/>
           </a:xfrm>
           <a:prstGeom prst="line">
             <a:avLst/>
@@ -23376,7 +24947,7 @@
         </p:nvSpPr>
         <p:spPr>
           <a:xfrm>
-            <a:off x="1097280" y="6080760"/>
+            <a:off x="1097280" y="5650992"/>
             <a:ext cx="6675120" cy="274320"/>
           </a:xfrm>
           <a:prstGeom prst="rect">
@@ -23415,7 +24986,7 @@
         </p:nvSpPr>
         <p:spPr>
           <a:xfrm>
-            <a:off x="502920" y="1554480"/>
+            <a:off x="502920" y="1463040"/>
             <a:ext cx="548640" cy="822960"/>
           </a:xfrm>
           <a:prstGeom prst="rect">
@@ -23454,7 +25025,7 @@
         </p:nvSpPr>
         <p:spPr>
           <a:xfrm>
-            <a:off x="502920" y="5212080"/>
+            <a:off x="502920" y="4800600"/>
             <a:ext cx="548640" cy="822960"/>
           </a:xfrm>
           <a:prstGeom prst="rect">
@@ -23493,8 +25064,8 @@
         </p:nvSpPr>
         <p:spPr>
           <a:xfrm>
-            <a:off x="4937760" y="1783080"/>
-            <a:ext cx="2560320" cy="1371600"/>
+            <a:off x="4937760" y="1645920"/>
+            <a:ext cx="2560320" cy="1325880"/>
           </a:xfrm>
           <a:prstGeom prst="ellipse">
             <a:avLst/>
@@ -23518,8 +25089,8 @@
         </p:nvSpPr>
         <p:spPr>
           <a:xfrm>
-            <a:off x="5212080" y="1874520"/>
-            <a:ext cx="2011680" cy="1188720"/>
+            <a:off x="5212080" y="1737360"/>
+            <a:ext cx="2011680" cy="1143000"/>
           </a:xfrm>
           <a:prstGeom prst="rect">
             <a:avLst/>
@@ -23574,8 +25145,8 @@
         </p:nvSpPr>
         <p:spPr>
           <a:xfrm>
-            <a:off x="1325880" y="2194560"/>
-            <a:ext cx="2468880" cy="1143000"/>
+            <a:off x="1325880" y="2011680"/>
+            <a:ext cx="2468880" cy="1097280"/>
           </a:xfrm>
           <a:prstGeom prst="ellipse">
             <a:avLst/>
@@ -23599,8 +25170,8 @@
         </p:nvSpPr>
         <p:spPr>
           <a:xfrm>
-            <a:off x="1600200" y="2286000"/>
-            <a:ext cx="1920240" cy="960120"/>
+            <a:off x="1600200" y="2103120"/>
+            <a:ext cx="1920240" cy="914400"/>
           </a:xfrm>
           <a:prstGeom prst="rect">
             <a:avLst/>
@@ -23655,7 +25226,7 @@
         </p:nvSpPr>
         <p:spPr>
           <a:xfrm>
-            <a:off x="1325880" y="4480560"/>
+            <a:off x="1325880" y="4114800"/>
             <a:ext cx="2468880" cy="1280160"/>
           </a:xfrm>
           <a:prstGeom prst="ellipse">
@@ -23680,7 +25251,7 @@
         </p:nvSpPr>
         <p:spPr>
           <a:xfrm>
-            <a:off x="1600200" y="4572000"/>
+            <a:off x="1600200" y="4206240"/>
             <a:ext cx="1920240" cy="1097280"/>
           </a:xfrm>
           <a:prstGeom prst="rect">
@@ -23736,7 +25307,7 @@
         </p:nvSpPr>
         <p:spPr>
           <a:xfrm>
-            <a:off x="4937760" y="4343400"/>
+            <a:off x="4937760" y="4023360"/>
             <a:ext cx="2560320" cy="1417320"/>
           </a:xfrm>
           <a:prstGeom prst="ellipse">
@@ -23761,7 +25332,7 @@
         </p:nvSpPr>
         <p:spPr>
           <a:xfrm>
-            <a:off x="5212080" y="4434840"/>
+            <a:off x="5212080" y="4114800"/>
             <a:ext cx="2011680" cy="1234440"/>
           </a:xfrm>
           <a:prstGeom prst="rect">
@@ -23817,7 +25388,7 @@
         </p:nvSpPr>
         <p:spPr>
           <a:xfrm>
-            <a:off x="3886200" y="4892040"/>
+            <a:off x="3886200" y="4553712"/>
             <a:ext cx="960120" cy="365760"/>
           </a:xfrm>
           <a:prstGeom prst="rightArrow">
@@ -23842,8 +25413,8 @@
         </p:nvSpPr>
         <p:spPr>
           <a:xfrm>
-            <a:off x="8138160" y="1554480"/>
-            <a:ext cx="3474720" cy="4480560"/>
+            <a:off x="8138160" y="1463040"/>
+            <a:ext cx="3474720" cy="4434840"/>
           </a:xfrm>
           <a:prstGeom prst="roundRect">
             <a:avLst>
@@ -23869,7 +25440,7 @@
         </p:nvSpPr>
         <p:spPr>
           <a:xfrm>
-            <a:off x="8366760" y="1691640"/>
+            <a:off x="8366760" y="1572768"/>
             <a:ext cx="3017520" cy="365760"/>
           </a:xfrm>
           <a:prstGeom prst="rect">
@@ -23908,7 +25479,7 @@
         </p:nvSpPr>
         <p:spPr>
           <a:xfrm>
-            <a:off x="8366760" y="2103120"/>
+            <a:off x="8366760" y="1965960"/>
             <a:ext cx="3063240" cy="3840480"/>
           </a:xfrm>
           <a:prstGeom prst="rect">
@@ -23979,7 +25550,7 @@
                 <a:ea typeface="Calibri" pitchFamily="34" charset="-122"/>
                 <a:cs typeface="Calibri" pitchFamily="34" charset="-120"/>
               </a:rPr>
-              <a:t>AirAsia X mencoba masuk dengan membawa aset dari kelompok asal: merek, sistem reservasi, SDM, dan disiplin biaya. Pertanyaannya, cukupkah itu.</a:t>
+              <a:t>AirAsia X masuk dengan membawa aset dari kelompok asal: merek, sistem reservasi, SDM, dan disiplin biaya.</a:t>
             </a:r>
             <a:endParaRPr lang="en-US" sz="1100" dirty="0"/>
           </a:p>
@@ -24014,6 +25585,59 @@
         </p:nvSpPr>
         <p:spPr>
           <a:xfrm>
+            <a:off x="548640" y="6016752"/>
+            <a:ext cx="11064240" cy="365760"/>
+          </a:xfrm>
+          <a:prstGeom prst="rect">
+            <a:avLst/>
+          </a:prstGeom>
+          <a:noFill/>
+          <a:ln/>
+        </p:spPr>
+        <p:txBody>
+          <a:bodyPr wrap="square" lIns="0" tIns="0" rIns="0" bIns="0" rtlCol="0" anchor="ctr"/>
+          <a:lstStyle/>
+          <a:p>
+            <a:pPr indent="0" marL="0">
+              <a:buNone/>
+            </a:pPr>
+            <a:r>
+              <a:rPr lang="en-US" sz="1050" b="1" dirty="0">
+                <a:solidFill>
+                  <a:srgbClr val="C8102E"/>
+                </a:solidFill>
+                <a:latin typeface="Calibri" pitchFamily="34" charset="0"/>
+                <a:ea typeface="Calibri" pitchFamily="34" charset="-122"/>
+                <a:cs typeface="Calibri" pitchFamily="34" charset="-120"/>
+              </a:rPr>
+              <a:t>Kaitan.  </a:t>
+            </a:r>
+            <a:pPr indent="0" marL="0">
+              <a:buNone/>
+            </a:pPr>
+            <a:r>
+              <a:rPr lang="en-US" sz="1050" i="1" dirty="0">
+                <a:solidFill>
+                  <a:srgbClr val="6E6E6E"/>
+                </a:solidFill>
+                <a:latin typeface="Calibri" pitchFamily="34" charset="0"/>
+                <a:ea typeface="Calibri" pitchFamily="34" charset="-122"/>
+                <a:cs typeface="Calibri" pitchFamily="34" charset="-120"/>
+              </a:rPr>
+              <a:t>Tahap kedua selesai: industri sulit, pesaing di rute jauh berbeda modelnya. Tahap ketiga menguji seberapa kuat posisi biaya AirAsia sendiri, dimulai dari benchmarking.</a:t>
+            </a:r>
+            <a:endParaRPr lang="en-US" sz="1050" dirty="0"/>
+          </a:p>
+        </p:txBody>
+      </p:sp>
+      <p:sp>
+        <p:nvSpPr>
+          <p:cNvPr id="23" name="Text 21"/>
+          <p:cNvSpPr txBox="1"/>
+          <p:nvPr/>
+        </p:nvSpPr>
+        <p:spPr>
+          <a:xfrm>
             <a:off x="548640" y="6446520"/>
             <a:ext cx="7315200" cy="274320"/>
           </a:xfrm>
@@ -24047,7 +25671,7 @@
       </p:sp>
       <p:sp>
         <p:nvSpPr>
-          <p:cNvPr id="23" name="Text 21"/>
+          <p:cNvPr id="24" name="Text 22"/>
           <p:cNvSpPr txBox="1"/>
           <p:nvPr/>
         </p:nvSpPr>
@@ -24125,7 +25749,7 @@
         <p:spPr>
           <a:xfrm>
             <a:off x="548640" y="320040"/>
-            <a:ext cx="10972800" cy="274320"/>
+            <a:ext cx="11064240" cy="274320"/>
           </a:xfrm>
           <a:prstGeom prst="rect">
             <a:avLst/>
@@ -24141,7 +25765,63 @@
               <a:buNone/>
             </a:pPr>
             <a:r>
-              <a:rPr lang="en-US" sz="1100" b="1" spc="200" kern="0" dirty="0">
+              <a:rPr lang="en-US" sz="1000" spc="150" kern="0" dirty="0">
+                <a:solidFill>
+                  <a:srgbClr val="B5B5B5"/>
+                </a:solidFill>
+                <a:latin typeface="Calibri" pitchFamily="34" charset="0"/>
+                <a:ea typeface="Calibri" pitchFamily="34" charset="-122"/>
+                <a:cs typeface="Calibri" pitchFamily="34" charset="-120"/>
+              </a:rPr>
+              <a:t>1  PROBLEM</a:t>
+            </a:r>
+            <a:pPr indent="0" marL="0">
+              <a:buNone/>
+            </a:pPr>
+            <a:r>
+              <a:rPr lang="en-US" sz="1000" spc="150" kern="0" dirty="0">
+                <a:solidFill>
+                  <a:srgbClr val="B5B5B5"/>
+                </a:solidFill>
+                <a:latin typeface="Calibri" pitchFamily="34" charset="0"/>
+                <a:ea typeface="Calibri" pitchFamily="34" charset="-122"/>
+                <a:cs typeface="Calibri" pitchFamily="34" charset="-120"/>
+              </a:rPr>
+              <a:t>      </a:t>
+            </a:r>
+            <a:pPr indent="0" marL="0">
+              <a:buNone/>
+            </a:pPr>
+            <a:r>
+              <a:rPr lang="en-US" sz="1000" spc="150" kern="0" dirty="0">
+                <a:solidFill>
+                  <a:srgbClr val="B5B5B5"/>
+                </a:solidFill>
+                <a:latin typeface="Calibri" pitchFamily="34" charset="0"/>
+                <a:ea typeface="Calibri" pitchFamily="34" charset="-122"/>
+                <a:cs typeface="Calibri" pitchFamily="34" charset="-120"/>
+              </a:rPr>
+              <a:t>2  EXTERNAL ENVIRONMENT</a:t>
+            </a:r>
+            <a:pPr indent="0" marL="0">
+              <a:buNone/>
+            </a:pPr>
+            <a:r>
+              <a:rPr lang="en-US" sz="1000" spc="150" kern="0" dirty="0">
+                <a:solidFill>
+                  <a:srgbClr val="B5B5B5"/>
+                </a:solidFill>
+                <a:latin typeface="Calibri" pitchFamily="34" charset="0"/>
+                <a:ea typeface="Calibri" pitchFamily="34" charset="-122"/>
+                <a:cs typeface="Calibri" pitchFamily="34" charset="-120"/>
+              </a:rPr>
+              <a:t>      </a:t>
+            </a:r>
+            <a:pPr indent="0" marL="0">
+              <a:buNone/>
+            </a:pPr>
+            <a:r>
+              <a:rPr lang="en-US" sz="1000" b="1" spc="150" kern="0" dirty="0">
                 <a:solidFill>
                   <a:srgbClr val="C8102E"/>
                 </a:solidFill>
@@ -24149,9 +25829,37 @@
                 <a:ea typeface="Calibri" pitchFamily="34" charset="-122"/>
                 <a:cs typeface="Calibri" pitchFamily="34" charset="-120"/>
               </a:rPr>
-              <a:t>COMPANY COST POSITION</a:t>
-            </a:r>
-            <a:endParaRPr lang="en-US" sz="1100" dirty="0"/>
+              <a:t>3  COST POSITION</a:t>
+            </a:r>
+            <a:pPr indent="0" marL="0">
+              <a:buNone/>
+            </a:pPr>
+            <a:r>
+              <a:rPr lang="en-US" sz="1000" spc="150" kern="0" dirty="0">
+                <a:solidFill>
+                  <a:srgbClr val="B5B5B5"/>
+                </a:solidFill>
+                <a:latin typeface="Calibri" pitchFamily="34" charset="0"/>
+                <a:ea typeface="Calibri" pitchFamily="34" charset="-122"/>
+                <a:cs typeface="Calibri" pitchFamily="34" charset="-120"/>
+              </a:rPr>
+              <a:t>      </a:t>
+            </a:r>
+            <a:pPr indent="0" marL="0">
+              <a:buNone/>
+            </a:pPr>
+            <a:r>
+              <a:rPr lang="en-US" sz="1000" spc="150" kern="0" dirty="0">
+                <a:solidFill>
+                  <a:srgbClr val="B5B5B5"/>
+                </a:solidFill>
+                <a:latin typeface="Calibri" pitchFamily="34" charset="0"/>
+                <a:ea typeface="Calibri" pitchFamily="34" charset="-122"/>
+                <a:cs typeface="Calibri" pitchFamily="34" charset="-120"/>
+              </a:rPr>
+              <a:t>4  CHOICE</a:t>
+            </a:r>
+            <a:endParaRPr lang="en-US" sz="1000" dirty="0"/>
           </a:p>
         </p:txBody>
       </p:sp>
@@ -24163,8 +25871,8 @@
         </p:nvSpPr>
         <p:spPr>
           <a:xfrm>
-            <a:off x="548640" y="566928"/>
-            <a:ext cx="11064240" cy="731520"/>
+            <a:off x="548640" y="621792"/>
+            <a:ext cx="11064240" cy="640080"/>
           </a:xfrm>
           <a:prstGeom prst="rect">
             <a:avLst/>
@@ -24180,7 +25888,7 @@
               <a:buNone/>
             </a:pPr>
             <a:r>
-              <a:rPr lang="en-US" sz="2600" b="1" dirty="0">
+              <a:rPr lang="en-US" sz="3000" b="1" dirty="0">
                 <a:solidFill>
                   <a:srgbClr val="1C1C1C"/>
                 </a:solidFill>
@@ -24188,9 +25896,9 @@
                 <a:ea typeface="Cambria" pitchFamily="34" charset="-122"/>
                 <a:cs typeface="Cambria" pitchFamily="34" charset="-120"/>
               </a:rPr>
-              <a:t>Benchmarking 2008: AirAsia's cost per ASK is half of Malaysia Airlines'</a:t>
-            </a:r>
-            <a:endParaRPr lang="en-US" sz="2600" dirty="0"/>
+              <a:t>Cost benchmarking</a:t>
+            </a:r>
+            <a:endParaRPr lang="en-US" sz="3000" dirty="0"/>
           </a:p>
         </p:txBody>
       </p:sp>
@@ -24201,8 +25909,8 @@
           <p:nvPr/>
         </p:nvGraphicFramePr>
         <p:xfrm>
-          <a:off x="548640" y="1463040"/>
-          <a:ext cx="6035040" cy="3840480"/>
+          <a:off x="548640" y="1417320"/>
+          <a:ext cx="6035040" cy="3749040"/>
         </p:xfrm>
         <a:graphic xmlns:a="http://schemas.openxmlformats.org/drawingml/2006/main">
           <a:graphicData uri="http://schemas.openxmlformats.org/drawingml/2006/chart">
@@ -24218,7 +25926,7 @@
         </p:nvSpPr>
         <p:spPr>
           <a:xfrm>
-            <a:off x="548640" y="5349240"/>
+            <a:off x="548640" y="5212080"/>
             <a:ext cx="6035040" cy="457200"/>
           </a:xfrm>
           <a:prstGeom prst="rect">
@@ -24257,12 +25965,12 @@
         </p:nvSpPr>
         <p:spPr>
           <a:xfrm>
-            <a:off x="6858000" y="1463040"/>
-            <a:ext cx="2286000" cy="1280160"/>
+            <a:off x="6858000" y="1417320"/>
+            <a:ext cx="2286000" cy="1234440"/>
           </a:xfrm>
           <a:prstGeom prst="roundRect">
             <a:avLst>
-              <a:gd name="adj" fmla="val 5714"/>
+              <a:gd name="adj" fmla="val 5926"/>
             </a:avLst>
           </a:prstGeom>
           <a:solidFill>
@@ -24284,7 +25992,7 @@
         </p:nvSpPr>
         <p:spPr>
           <a:xfrm>
-            <a:off x="6995160" y="1554480"/>
+            <a:off x="6995160" y="1490472"/>
             <a:ext cx="2011680" cy="502920"/>
           </a:xfrm>
           <a:prstGeom prst="rect">
@@ -24323,7 +26031,7 @@
         </p:nvSpPr>
         <p:spPr>
           <a:xfrm>
-            <a:off x="6995160" y="2084832"/>
+            <a:off x="6995160" y="2011680"/>
             <a:ext cx="2011680" cy="594360"/>
           </a:xfrm>
           <a:prstGeom prst="rect">
@@ -24362,12 +26070,12 @@
         </p:nvSpPr>
         <p:spPr>
           <a:xfrm>
-            <a:off x="9281160" y="1463040"/>
-            <a:ext cx="2286000" cy="1280160"/>
+            <a:off x="9281160" y="1417320"/>
+            <a:ext cx="2286000" cy="1234440"/>
           </a:xfrm>
           <a:prstGeom prst="roundRect">
             <a:avLst>
-              <a:gd name="adj" fmla="val 5714"/>
+              <a:gd name="adj" fmla="val 5926"/>
             </a:avLst>
           </a:prstGeom>
           <a:solidFill>
@@ -24389,7 +26097,7 @@
         </p:nvSpPr>
         <p:spPr>
           <a:xfrm>
-            <a:off x="9418320" y="1554480"/>
+            <a:off x="9418320" y="1490472"/>
             <a:ext cx="2011680" cy="502920"/>
           </a:xfrm>
           <a:prstGeom prst="rect">
@@ -24428,7 +26136,7 @@
         </p:nvSpPr>
         <p:spPr>
           <a:xfrm>
-            <a:off x="9418320" y="2084832"/>
+            <a:off x="9418320" y="2011680"/>
             <a:ext cx="2011680" cy="594360"/>
           </a:xfrm>
           <a:prstGeom prst="rect">
@@ -24467,12 +26175,12 @@
         </p:nvSpPr>
         <p:spPr>
           <a:xfrm>
-            <a:off x="6858000" y="2880360"/>
-            <a:ext cx="2286000" cy="1280160"/>
+            <a:off x="6858000" y="2788920"/>
+            <a:ext cx="2286000" cy="1234440"/>
           </a:xfrm>
           <a:prstGeom prst="roundRect">
             <a:avLst>
-              <a:gd name="adj" fmla="val 5714"/>
+              <a:gd name="adj" fmla="val 5926"/>
             </a:avLst>
           </a:prstGeom>
           <a:solidFill>
@@ -24494,7 +26202,7 @@
         </p:nvSpPr>
         <p:spPr>
           <a:xfrm>
-            <a:off x="6995160" y="2971800"/>
+            <a:off x="6995160" y="2862072"/>
             <a:ext cx="2011680" cy="502920"/>
           </a:xfrm>
           <a:prstGeom prst="rect">
@@ -24533,7 +26241,7 @@
         </p:nvSpPr>
         <p:spPr>
           <a:xfrm>
-            <a:off x="6995160" y="3502152"/>
+            <a:off x="6995160" y="3383280"/>
             <a:ext cx="2011680" cy="594360"/>
           </a:xfrm>
           <a:prstGeom prst="rect">
@@ -24572,12 +26280,12 @@
         </p:nvSpPr>
         <p:spPr>
           <a:xfrm>
-            <a:off x="9281160" y="2880360"/>
-            <a:ext cx="2286000" cy="1280160"/>
+            <a:off x="9281160" y="2788920"/>
+            <a:ext cx="2286000" cy="1234440"/>
           </a:xfrm>
           <a:prstGeom prst="roundRect">
             <a:avLst>
-              <a:gd name="adj" fmla="val 5714"/>
+              <a:gd name="adj" fmla="val 5926"/>
             </a:avLst>
           </a:prstGeom>
           <a:solidFill>
@@ -24599,7 +26307,7 @@
         </p:nvSpPr>
         <p:spPr>
           <a:xfrm>
-            <a:off x="9418320" y="2971800"/>
+            <a:off x="9418320" y="2862072"/>
             <a:ext cx="2011680" cy="502920"/>
           </a:xfrm>
           <a:prstGeom prst="rect">
@@ -24638,7 +26346,7 @@
         </p:nvSpPr>
         <p:spPr>
           <a:xfrm>
-            <a:off x="9418320" y="3502152"/>
+            <a:off x="9418320" y="3383280"/>
             <a:ext cx="2011680" cy="594360"/>
           </a:xfrm>
           <a:prstGeom prst="rect">
@@ -24677,12 +26385,12 @@
         </p:nvSpPr>
         <p:spPr>
           <a:xfrm>
-            <a:off x="6858000" y="4389120"/>
-            <a:ext cx="4709160" cy="1828800"/>
+            <a:off x="6858000" y="4251960"/>
+            <a:ext cx="4709160" cy="1645920"/>
           </a:xfrm>
           <a:prstGeom prst="roundRect">
             <a:avLst>
-              <a:gd name="adj" fmla="val 4000"/>
+              <a:gd name="adj" fmla="val 4444"/>
             </a:avLst>
           </a:prstGeom>
           <a:solidFill>
@@ -24704,8 +26412,8 @@
         </p:nvSpPr>
         <p:spPr>
           <a:xfrm>
-            <a:off x="7040880" y="4480560"/>
-            <a:ext cx="4389120" cy="1645920"/>
+            <a:off x="7040880" y="4325112"/>
+            <a:ext cx="4389120" cy="1508760"/>
           </a:xfrm>
           <a:prstGeom prst="rect">
             <a:avLst/>
@@ -24721,7 +26429,7 @@
               <a:buNone/>
             </a:pPr>
             <a:r>
-              <a:rPr lang="en-US" sz="1100" b="1" dirty="0">
+              <a:rPr lang="en-US" sz="1050" b="1" dirty="0">
                 <a:solidFill>
                   <a:srgbClr val="C8102E"/>
                 </a:solidFill>
@@ -24729,13 +26437,13 @@
                 <a:ea typeface="Calibri" pitchFamily="34" charset="-122"/>
                 <a:cs typeface="Calibri" pitchFamily="34" charset="-120"/>
               </a:rPr>
-              <a:t>Catatan kritis. </a:t>
-            </a:r>
-            <a:pPr indent="0" marL="0">
-              <a:buNone/>
-            </a:pPr>
-            <a:r>
-              <a:rPr lang="en-US" sz="1100" dirty="0">
+              <a:t>Catatan. </a:t>
+            </a:r>
+            <a:pPr indent="0" marL="0">
+              <a:buNone/>
+            </a:pPr>
+            <a:r>
+              <a:rPr lang="en-US" sz="1050" dirty="0">
                 <a:solidFill>
                   <a:srgbClr val="1C1C1C"/>
                 </a:solidFill>
@@ -24743,9 +26451,9 @@
                 <a:ea typeface="Calibri" pitchFamily="34" charset="-122"/>
                 <a:cs typeface="Calibri" pitchFamily="34" charset="-120"/>
               </a:rPr>
-              <a:t>Rugi 2008 (RM 496,6 juta) bukan karena operasi, melainkan karena keputusan Fernandes melepas kontrak berjangka bahan bakar (rugi RM 830,2 juta). Tanpa pos itu, operasi tetap menghasilkan laba. Namun neraca yang sarat utang pesawat (RM 6,69 miliar) membuat ruang untuk kesalahan berikutnya sangat sempit.</a:t>
-            </a:r>
-            <a:endParaRPr lang="en-US" sz="1100" dirty="0"/>
+              <a:t>Rugi 2008 (RM 496,6 juta) bukan karena operasi, melainkan karena keputusan melepas kontrak berjangka bahan bakar (rugi RM 830,2 juta). Tanpa pos itu, operasi tetap menghasilkan laba. Namun neraca yang sarat utang pesawat (RM 6,69 miliar) membuat ruang untuk kesalahan berikutnya sempit.</a:t>
+            </a:r>
+            <a:endParaRPr lang="en-US" sz="1050" dirty="0"/>
           </a:p>
         </p:txBody>
       </p:sp>
@@ -24757,6 +26465,59 @@
         </p:nvSpPr>
         <p:spPr>
           <a:xfrm>
+            <a:off x="548640" y="6016752"/>
+            <a:ext cx="11064240" cy="365760"/>
+          </a:xfrm>
+          <a:prstGeom prst="rect">
+            <a:avLst/>
+          </a:prstGeom>
+          <a:noFill/>
+          <a:ln/>
+        </p:spPr>
+        <p:txBody>
+          <a:bodyPr wrap="square" lIns="0" tIns="0" rIns="0" bIns="0" rtlCol="0" anchor="ctr"/>
+          <a:lstStyle/>
+          <a:p>
+            <a:pPr indent="0" marL="0">
+              <a:buNone/>
+            </a:pPr>
+            <a:r>
+              <a:rPr lang="en-US" sz="1050" b="1" dirty="0">
+                <a:solidFill>
+                  <a:srgbClr val="C8102E"/>
+                </a:solidFill>
+                <a:latin typeface="Calibri" pitchFamily="34" charset="0"/>
+                <a:ea typeface="Calibri" pitchFamily="34" charset="-122"/>
+                <a:cs typeface="Calibri" pitchFamily="34" charset="-120"/>
+              </a:rPr>
+              <a:t>Kaitan.  </a:t>
+            </a:r>
+            <a:pPr indent="0" marL="0">
+              <a:buNone/>
+            </a:pPr>
+            <a:r>
+              <a:rPr lang="en-US" sz="1050" i="1" dirty="0">
+                <a:solidFill>
+                  <a:srgbClr val="6E6E6E"/>
+                </a:solidFill>
+                <a:latin typeface="Calibri" pitchFamily="34" charset="0"/>
+                <a:ea typeface="Calibri" pitchFamily="34" charset="-122"/>
+                <a:cs typeface="Calibri" pitchFamily="34" charset="-120"/>
+              </a:rPr>
+              <a:t>Keunggulan biaya AirAsia terbukti nyata: separuh biaya MAS. Slide berikutnya membedah dari mana keunggulan itu berasal, karena itulah yang akan diuji transferabilitasnya.</a:t>
+            </a:r>
+            <a:endParaRPr lang="en-US" sz="1050" dirty="0"/>
+          </a:p>
+        </p:txBody>
+      </p:sp>
+      <p:sp>
+        <p:nvSpPr>
+          <p:cNvPr id="21" name="Text 18"/>
+          <p:cNvSpPr txBox="1"/>
+          <p:nvPr/>
+        </p:nvSpPr>
+        <p:spPr>
+          <a:xfrm>
             <a:off x="548640" y="6446520"/>
             <a:ext cx="7315200" cy="274320"/>
           </a:xfrm>
@@ -24790,7 +26551,7 @@
       </p:sp>
       <p:sp>
         <p:nvSpPr>
-          <p:cNvPr id="21" name="Text 18"/>
+          <p:cNvPr id="22" name="Text 19"/>
           <p:cNvSpPr txBox="1"/>
           <p:nvPr/>
         </p:nvSpPr>

--- a/strategic-management/airasia-case/SMJKT_Group 3_Aslih_Case AirAsia.pptx
+++ b/strategic-management/airasia-case/SMJKT_Group 3_Aslih_Case AirAsia.pptx
@@ -609,7 +609,7 @@
           <a:p>
             <a:r>
               <a:rPr lang="en-US" dirty="0"/>
-              <a:t>Sumber Tabel 9.1. Karyawan per pesawat: 3.799/78 vs 19.094/109. Turnaround 25 menit. Rugi 2008 (RM 496,6 juta) karena keputusan melepas kontrak berjangka bahan bakar (rugi RM 830,2 juta). Tanpa pos itu operasi tetap laba, tetapi neraca yang sarat utang pesawat membuat ruang untuk kesalahan berikutnya sempit.</a:t>
+              <a:t>Sumber Tabel 9.1. Biaya per ASK 11,66 sen = Rp 340 (Rp 670 nilai 2026); MAS 22,80 sen = Rp 660 (Rp 1.300). Karyawan per pesawat: 3.799/78 vs 19.094/109. Rugi 2008 RM 496,6 juta (Rp 1,4 triliun) karena melepas kontrak berjangka bahan bakar, rugi RM 830,2 juta (Rp 2,4 triliun; Rp 4,8 triliun nilai 2026). Kas MAS RM 3,57 miliar (Rp 10,4 triliun) berbanding AirAsia RM 153,8 juta (Rp 447 miliar). Tanpa pos itu operasi tetap laba, tetapi neraca yang sarat utang pesawat membuat ruang untuk kesalahan berikutnya sempit.</a:t>
             </a:r>
             <a:endParaRPr lang="en-US" dirty="0"/>
           </a:p>
@@ -873,7 +873,7 @@
           <a:p>
             <a:r>
               <a:rPr lang="en-US" dirty="0"/>
-              <a:t>Tabel 9.4 tidak termasuk perawatan, depresiasi, katering, dan gaji kru. AirAsia X membawa 286 penumpang per penerbangan, pesaing 337 sampai 360. Bahan bakar per penerbangan US$79.299 vs US$159.522 untuk B747. Tarif pulang pergi KL London AirAsia X US$433,96 vs rata-rata tarif terendah pesaing US$683,68 (Tabel 9.3). Load factor jaringan lima periode (Tabel 9.5): AirAsia 77, 75, 78, 80, 75,5; Emirates 73,4 sampai 79,8; BA 67,6 sampai 71,2; MAS 69 sampai 67,8.</a:t>
+              <a:t>Tabel 9.4 tidak termasuk perawatan, depresiasi, katering, dan gaji kru. AirAsia X membawa 286 penumpang per penerbangan, pesaing 337 sampai 360. Bahan bakar per penerbangan US$79.299 (Rp 824 juta, kurs 2009) vs US$159.522 (Rp 1,66 miliar) untuk B747. Tarif pulang pergi KL London AirAsia X US$433,96 (Rp 4,5 juta saat itu, Rp 8,6 juta nilai 2026) vs rata-rata tarif terendah pesaing US$683,68 (Rp 7,1 juta; Rp 13,5 juta) (Tabel 9.3). Biaya per penumpang US$373 = Rp 3,9 juta (Rp 7,4 juta nilai 2026). Load factor jaringan lima periode (Tabel 9.5): AirAsia 77, 75, 78, 80, 75,5; Emirates 73,4 sampai 79,8; BA 67,6 sampai 71,2; MAS 69 sampai 67,8.</a:t>
             </a:r>
             <a:endParaRPr lang="en-US" dirty="0"/>
           </a:p>
@@ -961,7 +961,7 @@
           <a:p>
             <a:r>
               <a:rPr lang="en-US" dirty="0"/>
-              <a:t>Isu 1: di rute regional AirAsia menciptakan pasar baru; di KL London ia merebut penumpang dari enam maskapai mapan. Isu 2: Emirates, BA, dan MAS memperoleh laba dari kelas premium dan mampu menurunkan tarif ekonomi. Isu 3: utang RM 6,69 miliar, ekuitas RM 1,61 miliar, kas RM 153,8 juta, pesanan 10 A350. Isu 4: literatur ambidexterity (O'Reilly dan Tushman) menyebut pemisahan struktural atau paduan kontekstual. Isu 5: AirAsia 16 persen (opsi 30 persen), Aero Ventures 48 persen, Virgin 16 persen, Manara dan Orix 20 persen; tata kelola hibrida khas portofolio aliansi.</a:t>
+              <a:t>Isu 1: di rute regional AirAsia menciptakan pasar baru; di KL London ia merebut penumpang dari enam maskapai mapan. Isu 2: Emirates, BA, dan MAS memperoleh laba dari kelas premium dan mampu menurunkan tarif ekonomi. Isu 3: utang RM 6,69 miliar (Rp 19,5 triliun), ekuitas RM 1,61 miliar (Rp 4,7 triliun), kas RM 153,8 juta (Rp 447 miliar), pesanan 10 A350. Isu 4: literatur ambidexterity (O'Reilly dan Tushman) menyebut pemisahan struktural atau paduan kontekstual. Isu 5: AirAsia 16 persen (opsi 30 persen), Aero Ventures 48 persen, Virgin 16 persen, Manara dan Orix 20 persen; tata kelola hibrida khas portofolio aliansi.</a:t>
             </a:r>
             <a:endParaRPr lang="en-US" dirty="0"/>
           </a:p>
@@ -1665,7 +1665,7 @@
           <a:p>
             <a:r>
               <a:rPr lang="en-US" dirty="0"/>
-              <a:t>Dari 2 pesawat dan 200 ribu penumpang (Januari 2002) menjadi 79 pesawat dan 11,8 juta penumpang (Maret 2009). Hub di KL, Bangkok, dan Jakarta. Akuisisi 2001 seharga RM 1 dengan warisan utang RM 40 juta. Riset UBS 2007: biaya per ASK terendah di dunia. ROA 2008 sebesar 4 persen ketika hampir semua maskapai dunia merugi.</a:t>
+              <a:t>Dari 2 pesawat dan 200 ribu penumpang (Januari 2002) menjadi 79 pesawat dan 11,8 juta penumpang (Maret 2009). Hub di KL, Bangkok, dan Jakarta. Akuisisi 2001 seharga RM 1 (sekitar Rp 2.700 saat itu, Rp 10.000 nilai 2026) dengan warisan utang RM 40 juta (Rp 108 miliar saat itu, Rp 400 miliar nilai 2026). IPO 2004 RM 717 juta (Rp 1,7 triliun saat itu, Rp 4,9 triliun nilai 2026). Kurs: RM 1 = Rp 2.700 (2001), Rp 2.350 (2004), Rp 2.900 (2008), Rp 2.950 (2009); inflasi Indonesia 2009 ke 2026 sekitar 1,9 kali. Riset UBS 2007: biaya per ASK terendah di dunia. ROA 2008 sebesar 4 persen ketika hampir semua maskapai dunia merugi.</a:t>
             </a:r>
             <a:endParaRPr lang="en-US" dirty="0"/>
           </a:p>
@@ -1753,7 +1753,7 @@
           <a:p>
             <a:r>
               <a:rPr lang="en-US" dirty="0"/>
-              <a:t>Mengikuti panduan RPKPS: masalah adalah tujuan yang terhalang. Angka neraca dari Tabel 9.1: rugi bersih RM 496,6 juta, utang RM 6,69 miliar berbanding ekuitas RM 1,61 miliar, kas RM 153,8 juta. Azran Osman-Rani (CEO AirAsia X): rute gemuk jarak jauh adalah sumber lalu lintas berikutnya.</a:t>
+              <a:t>Mengikuti panduan RPKPS: masalah adalah tujuan yang terhalang. Angka neraca dari Tabel 9.1: rugi bersih RM 496,6 juta (Rp 1,4 triliun saat itu, Rp 2,9 triliun nilai 2026), utang RM 6,69 miliar (Rp 19,5 triliun; Rp 39 triliun nilai 2026) berbanding ekuitas RM 1,61 miliar (Rp 4,7 triliun; Rp 9,3 triliun), kas RM 153,8 juta (Rp 447 miliar; Rp 0,9 triliun). Azran Osman-Rani (CEO AirAsia X): rute gemuk jarak jauh adalah sumber lalu lintas berikutnya.</a:t>
             </a:r>
             <a:endParaRPr lang="en-US" dirty="0"/>
           </a:p>
@@ -3467,7 +3467,7 @@
                 <a:ea typeface="Poppins" pitchFamily="34" charset="-122"/>
                 <a:cs typeface="Poppins" pitchFamily="34" charset="-120"/>
               </a:rPr>
-              <a:t>sen ringgit biaya per available seat kilometer</a:t>
+              <a:t>sen ringgit biaya per ASK (Rp 340 vs Rp 660)</a:t>
             </a:r>
             <a:endParaRPr lang="en-US" sz="1400" dirty="0"/>
           </a:p>
@@ -3629,7 +3629,7 @@
                 <a:ea typeface="Poppins" pitchFamily="34" charset="-122"/>
                 <a:cs typeface="Poppins" pitchFamily="34" charset="-120"/>
               </a:rPr>
-              <a:t>sen ringgit pendapatan per ASK</a:t>
+              <a:t>sen ringgit pendapatan per ASK (Rp 410 vs Rp 600)</a:t>
             </a:r>
             <a:endParaRPr lang="en-US" sz="1400" dirty="0"/>
           </a:p>
@@ -6574,8 +6574,8 @@
         </p:nvSpPr>
         <p:spPr>
           <a:xfrm>
-            <a:off x="7635240" y="5120640"/>
-            <a:ext cx="4114800" cy="1371600"/>
+            <a:off x="7635240" y="5074920"/>
+            <a:ext cx="4114800" cy="1737360"/>
           </a:xfrm>
           <a:prstGeom prst="rect">
             <a:avLst/>
@@ -6605,7 +6605,7 @@
                 <a:ea typeface="Poppins" pitchFamily="34" charset="-122"/>
                 <a:cs typeface="Poppins" pitchFamily="34" charset="-120"/>
               </a:rPr>
-              <a:t>Selisih nyata, tetapi lebih tipis dari yang terlihat: Tabel 9.4 belum memuat kru, perawatan, dan katering yang justru membesar di rute jauh.</a:t>
+              <a:t>Kurs 2009: US$373 sekitar Rp 3,9 juta, US$610 sekitar Rp 6,3 juta. Selisih nyata, tetapi lebih tipis dari yang terlihat: Tabel 9.4 belum memuat kru, perawatan, dan katering.</a:t>
             </a:r>
             <a:endParaRPr lang="en-US" sz="1400" dirty="0"/>
           </a:p>
@@ -15104,7 +15104,7 @@
                 <a:ea typeface="Poppins" pitchFamily="34" charset="-122"/>
                 <a:cs typeface="Poppins" pitchFamily="34" charset="-120"/>
               </a:rPr>
-              <a:t>harga akuisisi 2001</a:t>
+              <a:t>harga akuisisi 2001, sekitar Rp 2.700</a:t>
             </a:r>
             <a:endParaRPr lang="en-US" sz="1400" dirty="0"/>
           </a:p>
@@ -15243,6 +15243,23 @@
               </a:rPr>
               <a:t>RM 1</a:t>
             </a:r>
+            <a:pPr algn="l" indent="0" marL="0">
+              <a:lnSpc>
+                <a:spcPct val="120000"/>
+              </a:lnSpc>
+              <a:buNone/>
+            </a:pPr>
+            <a:r>
+              <a:rPr lang="en-US" sz="1400" dirty="0">
+                <a:solidFill>
+                  <a:srgbClr val="2A2A2A"/>
+                </a:solidFill>
+                <a:latin typeface="Poppins" pitchFamily="34" charset="0"/>
+                <a:ea typeface="Poppins" pitchFamily="34" charset="-122"/>
+                <a:cs typeface="Poppins" pitchFamily="34" charset="-120"/>
+              </a:rPr>
+              <a:t> (Rp 2.700)</a:t>
+            </a:r>
             <a:endParaRPr lang="en-US" sz="1400" dirty="0"/>
           </a:p>
         </p:txBody>
@@ -15420,7 +15437,7 @@
                 <a:ea typeface="Poppins" pitchFamily="34" charset="-122"/>
                 <a:cs typeface="Poppins" pitchFamily="34" charset="-120"/>
               </a:rPr>
-              <a:t>Rute internasional pertama; IPO RM 717 juta</a:t>
+              <a:t>Rute internasional pertama; IPO RM 717 juta (Rp 1,7 triliun)</a:t>
             </a:r>
             <a:endParaRPr lang="en-US" sz="1400" dirty="0"/>
           </a:p>
@@ -16223,7 +16240,7 @@
                 <a:ea typeface="Poppins" pitchFamily="34" charset="-122"/>
                 <a:cs typeface="Poppins" pitchFamily="34" charset="-120"/>
               </a:rPr>
-              <a:t>, kas </a:t>
+              <a:t> (Rp 19,5 triliun), kas </a:t>
             </a:r>
             <a:pPr algn="l" indent="0" marL="0">
               <a:lnSpc>
@@ -16245,31 +16262,6 @@
               </a:rPr>
               <a:t>RM 153,8 juta</a:t>
             </a:r>
-            <a:endParaRPr lang="en-US" sz="1400" dirty="0"/>
-          </a:p>
-        </p:txBody>
-      </p:sp>
-      <p:sp>
-        <p:nvSpPr>
-          <p:cNvPr id="10" name="Text 7"/>
-          <p:cNvSpPr txBox="1"/>
-          <p:nvPr/>
-        </p:nvSpPr>
-        <p:spPr>
-          <a:xfrm>
-            <a:off x="640080" y="5212080"/>
-            <a:ext cx="4023360" cy="731520"/>
-          </a:xfrm>
-          <a:prstGeom prst="rect">
-            <a:avLst/>
-          </a:prstGeom>
-          <a:noFill/>
-          <a:ln/>
-        </p:spPr>
-        <p:txBody>
-          <a:bodyPr wrap="square" lIns="0" tIns="0" rIns="0" bIns="0" rtlCol="0" anchor="t"/>
-          <a:lstStyle/>
-          <a:p>
             <a:pPr algn="l" indent="0" marL="0">
               <a:lnSpc>
                 <a:spcPct val="120000"/>
@@ -16282,6 +16274,51 @@
             <a:r>
               <a:rPr lang="en-US" sz="1400" dirty="0">
                 <a:solidFill>
+                  <a:srgbClr val="2A2A2A"/>
+                </a:solidFill>
+                <a:latin typeface="Poppins" pitchFamily="34" charset="0"/>
+                <a:ea typeface="Poppins" pitchFamily="34" charset="-122"/>
+                <a:cs typeface="Poppins" pitchFamily="34" charset="-120"/>
+              </a:rPr>
+              <a:t> (Rp 447 miliar)</a:t>
+            </a:r>
+            <a:endParaRPr lang="en-US" sz="1400" dirty="0"/>
+          </a:p>
+        </p:txBody>
+      </p:sp>
+      <p:sp>
+        <p:nvSpPr>
+          <p:cNvPr id="10" name="Text 7"/>
+          <p:cNvSpPr txBox="1"/>
+          <p:nvPr/>
+        </p:nvSpPr>
+        <p:spPr>
+          <a:xfrm>
+            <a:off x="640080" y="5212080"/>
+            <a:ext cx="4023360" cy="731520"/>
+          </a:xfrm>
+          <a:prstGeom prst="rect">
+            <a:avLst/>
+          </a:prstGeom>
+          <a:noFill/>
+          <a:ln/>
+        </p:spPr>
+        <p:txBody>
+          <a:bodyPr wrap="square" lIns="0" tIns="0" rIns="0" bIns="0" rtlCol="0" anchor="t"/>
+          <a:lstStyle/>
+          <a:p>
+            <a:pPr algn="l" indent="0" marL="0">
+              <a:lnSpc>
+                <a:spcPct val="120000"/>
+              </a:lnSpc>
+              <a:spcAft>
+                <a:spcPts val="600"/>
+              </a:spcAft>
+              <a:buNone/>
+            </a:pPr>
+            <a:r>
+              <a:rPr lang="en-US" sz="1400" dirty="0">
+                <a:solidFill>
                   <a:srgbClr val="7A7069"/>
                 </a:solidFill>
                 <a:latin typeface="Poppins" pitchFamily="34" charset="0"/>
@@ -16289,6 +16326,51 @@
                 <a:cs typeface="Poppins" pitchFamily="34" charset="-120"/>
               </a:rPr>
               <a:t>A320 rute pendek dan A330 rute jauh: dua pesawat, dua model bisnis.</a:t>
+            </a:r>
+            <a:endParaRPr lang="en-US" sz="1400" dirty="0"/>
+          </a:p>
+        </p:txBody>
+      </p:sp>
+      <p:sp>
+        <p:nvSpPr>
+          <p:cNvPr id="11" name="Text 8"/>
+          <p:cNvSpPr txBox="1"/>
+          <p:nvPr/>
+        </p:nvSpPr>
+        <p:spPr>
+          <a:xfrm>
+            <a:off x="7360920" y="6263640"/>
+            <a:ext cx="3931920" cy="548640"/>
+          </a:xfrm>
+          <a:prstGeom prst="rect">
+            <a:avLst/>
+          </a:prstGeom>
+          <a:noFill/>
+          <a:ln/>
+        </p:spPr>
+        <p:txBody>
+          <a:bodyPr wrap="square" lIns="0" tIns="0" rIns="0" bIns="0" rtlCol="0" anchor="t"/>
+          <a:lstStyle/>
+          <a:p>
+            <a:pPr algn="l" indent="0" marL="0">
+              <a:lnSpc>
+                <a:spcPct val="120000"/>
+              </a:lnSpc>
+              <a:spcAft>
+                <a:spcPts val="600"/>
+              </a:spcAft>
+              <a:buNone/>
+            </a:pPr>
+            <a:r>
+              <a:rPr lang="en-US" sz="1400" dirty="0">
+                <a:solidFill>
+                  <a:srgbClr val="7A7069"/>
+                </a:solidFill>
+                <a:latin typeface="Poppins" pitchFamily="34" charset="0"/>
+                <a:ea typeface="Poppins" pitchFamily="34" charset="-122"/>
+                <a:cs typeface="Poppins" pitchFamily="34" charset="-120"/>
+              </a:rPr>
+              <a:t>Kurs 2008: RM 1 sekitar Rp 2.900; nilai 2026 kira-kira dua kali lipat.</a:t>
             </a:r>
             <a:endParaRPr lang="en-US" sz="1400" dirty="0"/>
           </a:p>

--- a/strategic-management/airasia-case/SMJKT_Group 3_Aslih_Case AirAsia.pptx
+++ b/strategic-management/airasia-case/SMJKT_Group 3_Aslih_Case AirAsia.pptx
@@ -2193,7 +2193,7 @@
           <a:p>
             <a:r>
               <a:rPr lang="en-US" dirty="0"/>
-              <a:t>Ruang LCC jarak jauh nyaris kosong karena rute jauh butuh pesawat berbadan lebar, kru bermalam, dan penumpang transit dari jaringan pengumpan. AirAsia X masuk membawa merek, sistem reservasi, SDM, dan disiplin biaya dari kelompok asal.</a:t>
+              <a:t>Ruang LCC jarak jauh nyaris kosong karena rute jauh butuh pesawat berbadan lebar, kru bermalam, dan penumpang transit dari jaringan pengumpan. AirAsia X masuk membawa merek, sistem reservasi, SDM, dan disiplin biaya dari kelompok asal. Hambatan mobilitas bukan hanya modal; yang sulit ditiru adalah budaya biaya rendah dan operasi sederhana. Prediksi langkah pesaing adalah inferensi kelompok dari Tabel 9.3 dan 9.5, bukan pernyataan kasus.</a:t>
             </a:r>
             <a:endParaRPr lang="en-US" dirty="0"/>
           </a:p>
@@ -2568,7 +2568,7 @@
       </p:grpSpPr>
       <p:pic>
         <p:nvPicPr>
-          <p:cNvPr id="2" name="Image 0" descr="/tmp/claude-0/-home-user-Dom-Manipulation/a70c4110-05d8-512e-ae11-d08dee025a7a/scratchpad/img7/crops/aa_fleet_8.10x7.50_0.45-0.5.jpg">    </p:cNvPr>
+          <p:cNvPr id="2" name="Image 0" descr="/home/user/Dom-Manipulation/strategic-management/airasia-case/img/crops/aa_fleet_8.10x7.50_0.45-0.5.jpg">    </p:cNvPr>
           <p:cNvPicPr>
             <a:picLocks noChangeAspect="1"/>
           </p:cNvPicPr>
@@ -2748,7 +2748,7 @@
       </p:sp>
       <p:pic>
         <p:nvPicPr>
-          <p:cNvPr id="8" name="Image 1" descr="/tmp/claude-0/-home-user-Dom-Manipulation/a70c4110-05d8-512e-ae11-d08dee025a7a/scratchpad/img7/sil_red.png">    </p:cNvPr>
+          <p:cNvPr id="8" name="Image 1" descr="/home/user/Dom-Manipulation/strategic-management/airasia-case/img/sil_red.png">    </p:cNvPr>
           <p:cNvPicPr>
             <a:picLocks noChangeAspect="1"/>
           </p:cNvPicPr>
@@ -4077,7 +4077,7 @@
       </p:sp>
       <p:pic>
         <p:nvPicPr>
-          <p:cNvPr id="23" name="Image 0" descr="/tmp/claude-0/-home-user-Dom-Manipulation/a70c4110-05d8-512e-ae11-d08dee025a7a/scratchpad/img7/aa_crew.png">    </p:cNvPr>
+          <p:cNvPr id="23" name="Image 0" descr="/home/user/Dom-Manipulation/strategic-management/airasia-case/img/aa_crew.png">    </p:cNvPr>
           <p:cNvPicPr>
             <a:picLocks noChangeAspect="1"/>
           </p:cNvPicPr>
@@ -4526,7 +4526,7 @@
       </p:sp>
       <p:pic>
         <p:nvPicPr>
-          <p:cNvPr id="9" name="Image 0" descr="/tmp/claude-0/-home-user-Dom-Manipulation/a70c4110-05d8-512e-ae11-d08dee025a7a/scratchpad/img7/crops/bw_hangar_2.45x2.85_0.5-0.5.jpg">    </p:cNvPr>
+          <p:cNvPr id="9" name="Image 0" descr="/home/user/Dom-Manipulation/strategic-management/airasia-case/img/crops/bw_hangar_2.45x2.85_0.5-0.5.jpg">    </p:cNvPr>
           <p:cNvPicPr>
             <a:picLocks noChangeAspect="1"/>
           </p:cNvPicPr>
@@ -4639,7 +4639,7 @@
       </p:sp>
       <p:pic>
         <p:nvPicPr>
-          <p:cNvPr id="13" name="Image 1" descr="/tmp/claude-0/-home-user-Dom-Manipulation/a70c4110-05d8-512e-ae11-d08dee025a7a/scratchpad/img7/aa_crew.png">    </p:cNvPr>
+          <p:cNvPr id="13" name="Image 1" descr="/home/user/Dom-Manipulation/strategic-management/airasia-case/img/aa_crew.png">    </p:cNvPr>
           <p:cNvPicPr>
             <a:picLocks noChangeAspect="1"/>
           </p:cNvPicPr>
@@ -4752,7 +4752,7 @@
       </p:sp>
       <p:pic>
         <p:nvPicPr>
-          <p:cNvPr id="17" name="Image 2" descr="/tmp/claude-0/-home-user-Dom-Manipulation/a70c4110-05d8-512e-ae11-d08dee025a7a/scratchpad/img7/aa_a320.png">    </p:cNvPr>
+          <p:cNvPr id="17" name="Image 2" descr="/home/user/Dom-Manipulation/strategic-management/airasia-case/img/aa_a320.png">    </p:cNvPr>
           <p:cNvPicPr>
             <a:picLocks noChangeAspect="1"/>
           </p:cNvPicPr>
@@ -5031,7 +5031,7 @@
       </p:sp>
       <p:pic>
         <p:nvPicPr>
-          <p:cNvPr id="9" name="Image 0" descr="/tmp/claude-0/-home-user-Dom-Manipulation/a70c4110-05d8-512e-ae11-d08dee025a7a/scratchpad/img7/aa_pair.png">    </p:cNvPr>
+          <p:cNvPr id="9" name="Image 0" descr="/home/user/Dom-Manipulation/strategic-management/airasia-case/img/aa_pair.png">    </p:cNvPr>
           <p:cNvPicPr>
             <a:picLocks noChangeAspect="1"/>
           </p:cNvPicPr>
@@ -5625,7 +5625,7 @@
       </p:grpSpPr>
       <p:pic>
         <p:nvPicPr>
-          <p:cNvPr id="2" name="Image 0" descr="/tmp/claude-0/-home-user-Dom-Manipulation/a70c4110-05d8-512e-ae11-d08dee025a7a/scratchpad/img7/crops/aa_london_7.90x7.50_0.5-0.5.jpg">    </p:cNvPr>
+          <p:cNvPr id="2" name="Image 0" descr="/home/user/Dom-Manipulation/strategic-management/airasia-case/img/crops/aa_london_7.90x7.50_0.5-0.5.jpg">    </p:cNvPr>
           <p:cNvPicPr>
             <a:picLocks noChangeAspect="1"/>
           </p:cNvPicPr>
@@ -6054,7 +6054,7 @@
       </p:sp>
       <p:pic>
         <p:nvPicPr>
-          <p:cNvPr id="13" name="Image 1" descr="/tmp/claude-0/-home-user-Dom-Manipulation/a70c4110-05d8-512e-ae11-d08dee025a7a/scratchpad/img7/sil_red.png">    </p:cNvPr>
+          <p:cNvPr id="13" name="Image 1" descr="/home/user/Dom-Manipulation/strategic-management/airasia-case/img/sil_red.png">    </p:cNvPr>
           <p:cNvPicPr>
             <a:picLocks noChangeAspect="1"/>
           </p:cNvPicPr>
@@ -6645,7 +6645,7 @@
       </p:grpSpPr>
       <p:pic>
         <p:nvPicPr>
-          <p:cNvPr id="2" name="Image 0" descr="/tmp/claude-0/-home-user-Dom-Manipulation/a70c4110-05d8-512e-ae11-d08dee025a7a/scratchpad/img7/crops/aa_board_13.33x3.10_0.5-0.45.jpg">    </p:cNvPr>
+          <p:cNvPr id="2" name="Image 0" descr="/home/user/Dom-Manipulation/strategic-management/airasia-case/img/crops/aa_board_13.33x3.10_0.5-0.45.jpg">    </p:cNvPr>
           <p:cNvPicPr>
             <a:picLocks noChangeAspect="1"/>
           </p:cNvPicPr>
@@ -7802,7 +7802,7 @@
       </p:sp>
       <p:pic>
         <p:nvPicPr>
-          <p:cNvPr id="6" name="Image 0" descr="/tmp/claude-0/-home-user-Dom-Manipulation/a70c4110-05d8-512e-ae11-d08dee025a7a/scratchpad/img7/aa_a320.png">    </p:cNvPr>
+          <p:cNvPr id="6" name="Image 0" descr="/home/user/Dom-Manipulation/strategic-management/airasia-case/img/aa_a320.png">    </p:cNvPr>
           <p:cNvPicPr>
             <a:picLocks noChangeAspect="1"/>
           </p:cNvPicPr>
@@ -8099,7 +8099,7 @@
       </p:sp>
       <p:pic>
         <p:nvPicPr>
-          <p:cNvPr id="12" name="Image 1" descr="/tmp/claude-0/-home-user-Dom-Manipulation/a70c4110-05d8-512e-ae11-d08dee025a7a/scratchpad/img7/aa_pair.png">    </p:cNvPr>
+          <p:cNvPr id="12" name="Image 1" descr="/home/user/Dom-Manipulation/strategic-management/airasia-case/img/aa_pair.png">    </p:cNvPr>
           <p:cNvPicPr>
             <a:picLocks noChangeAspect="1"/>
           </p:cNvPicPr>
@@ -8336,7 +8336,7 @@
       </p:sp>
       <p:pic>
         <p:nvPicPr>
-          <p:cNvPr id="18" name="Image 2" descr="/tmp/claude-0/-home-user-Dom-Manipulation/a70c4110-05d8-512e-ae11-d08dee025a7a/scratchpad/img7/aa_a330.png">    </p:cNvPr>
+          <p:cNvPr id="18" name="Image 2" descr="/home/user/Dom-Manipulation/strategic-management/airasia-case/img/aa_a330.png">    </p:cNvPr>
           <p:cNvPicPr>
             <a:picLocks noChangeAspect="1"/>
           </p:cNvPicPr>
@@ -10620,7 +10620,7 @@
       </p:sp>
       <p:pic>
         <p:nvPicPr>
-          <p:cNvPr id="4" name="Image 0" descr="/tmp/claude-0/-home-user-Dom-Manipulation/a70c4110-05d8-512e-ae11-d08dee025a7a/scratchpad/img7/aa_captain.png">    </p:cNvPr>
+          <p:cNvPr id="4" name="Image 0" descr="/home/user/Dom-Manipulation/strategic-management/airasia-case/img/aa_captain.png">    </p:cNvPr>
           <p:cNvPicPr>
             <a:picLocks noChangeAspect="1"/>
           </p:cNvPicPr>
@@ -11190,7 +11190,7 @@
       </p:sp>
       <p:pic>
         <p:nvPicPr>
-          <p:cNvPr id="9" name="Image 0" descr="/tmp/claude-0/-home-user-Dom-Manipulation/a70c4110-05d8-512e-ae11-d08dee025a7a/scratchpad/img7/crops/aa_tower_4.60x4.90_0.45-0.5.jpg">    </p:cNvPr>
+          <p:cNvPr id="9" name="Image 0" descr="/home/user/Dom-Manipulation/strategic-management/airasia-case/img/crops/aa_tower_4.60x4.90_0.45-0.5.jpg">    </p:cNvPr>
           <p:cNvPicPr>
             <a:picLocks noChangeAspect="1"/>
           </p:cNvPicPr>
@@ -13470,7 +13470,7 @@
       </p:sp>
       <p:pic>
         <p:nvPicPr>
-          <p:cNvPr id="18" name="Image 0" descr="/tmp/claude-0/-home-user-Dom-Manipulation/a70c4110-05d8-512e-ae11-d08dee025a7a/scratchpad/img7/bw_meeting.png">    </p:cNvPr>
+          <p:cNvPr id="18" name="Image 0" descr="/home/user/Dom-Manipulation/strategic-management/airasia-case/img/bw_meeting.png">    </p:cNvPr>
           <p:cNvPicPr>
             <a:picLocks noChangeAspect="1"/>
           </p:cNvPicPr>
@@ -13717,7 +13717,7 @@
       </p:sp>
       <p:pic>
         <p:nvPicPr>
-          <p:cNvPr id="5" name="Image 0" descr="/tmp/claude-0/-home-user-Dom-Manipulation/a70c4110-05d8-512e-ae11-d08dee025a7a/scratchpad/img7/sil_red.png">    </p:cNvPr>
+          <p:cNvPr id="5" name="Image 0" descr="/home/user/Dom-Manipulation/strategic-management/airasia-case/img/sil_red.png">    </p:cNvPr>
           <p:cNvPicPr>
             <a:picLocks noChangeAspect="1"/>
           </p:cNvPicPr>
@@ -14568,7 +14568,7 @@
       </p:sp>
       <p:pic>
         <p:nvPicPr>
-          <p:cNvPr id="6" name="Image 0" descr="/tmp/claude-0/-home-user-Dom-Manipulation/a70c4110-05d8-512e-ae11-d08dee025a7a/scratchpad/img7/aa_a320.png">    </p:cNvPr>
+          <p:cNvPr id="6" name="Image 0" descr="/home/user/Dom-Manipulation/strategic-management/airasia-case/img/aa_a320.png">    </p:cNvPr>
           <p:cNvPicPr>
             <a:picLocks noChangeAspect="1"/>
           </p:cNvPicPr>
@@ -14663,7 +14663,7 @@
       </p:grpSpPr>
       <p:pic>
         <p:nvPicPr>
-          <p:cNvPr id="2" name="Image 0" descr="/tmp/claude-0/-home-user-Dom-Manipulation/a70c4110-05d8-512e-ae11-d08dee025a7a/scratchpad/img7/crops/aa_tower_4.45x3.20_0.5-0.55.jpg">    </p:cNvPr>
+          <p:cNvPr id="2" name="Image 0" descr="/home/user/Dom-Manipulation/strategic-management/airasia-case/img/crops/aa_tower_4.45x3.20_0.5-0.55.jpg">    </p:cNvPr>
           <p:cNvPicPr>
             <a:picLocks noChangeAspect="1"/>
           </p:cNvPicPr>
@@ -14687,7 +14687,7 @@
       </p:pic>
       <p:pic>
         <p:nvPicPr>
-          <p:cNvPr id="3" name="Image 1" descr="/tmp/claude-0/-home-user-Dom-Manipulation/a70c4110-05d8-512e-ae11-d08dee025a7a/scratchpad/img7/crops/aa_fuel_4.44x3.20_0.5-0.5.jpg">    </p:cNvPr>
+          <p:cNvPr id="3" name="Image 1" descr="/home/user/Dom-Manipulation/strategic-management/airasia-case/img/crops/aa_fuel_4.44x3.20_0.5-0.5.jpg">    </p:cNvPr>
           <p:cNvPicPr>
             <a:picLocks noChangeAspect="1"/>
           </p:cNvPicPr>
@@ -14711,7 +14711,7 @@
       </p:pic>
       <p:pic>
         <p:nvPicPr>
-          <p:cNvPr id="4" name="Image 2" descr="/tmp/claude-0/-home-user-Dom-Manipulation/a70c4110-05d8-512e-ae11-d08dee025a7a/scratchpad/img7/crops/aa_board_4.44x3.20_0.5-0.5.jpg">    </p:cNvPr>
+          <p:cNvPr id="4" name="Image 2" descr="/home/user/Dom-Manipulation/strategic-management/airasia-case/img/crops/aa_board_4.44x3.20_0.5-0.5.jpg">    </p:cNvPr>
           <p:cNvPicPr>
             <a:picLocks noChangeAspect="1"/>
           </p:cNvPicPr>
@@ -15698,7 +15698,7 @@
       </p:sp>
       <p:pic>
         <p:nvPicPr>
-          <p:cNvPr id="3" name="Image 0" descr="/tmp/claude-0/-home-user-Dom-Manipulation/a70c4110-05d8-512e-ae11-d08dee025a7a/scratchpad/img7/crops/aa_transfer_7.50x5.40_0.5-0.55.jpg">    </p:cNvPr>
+          <p:cNvPr id="3" name="Image 0" descr="/home/user/Dom-Manipulation/strategic-management/airasia-case/img/crops/aa_transfer_7.50x5.40_0.5-0.55.jpg">    </p:cNvPr>
           <p:cNvPicPr>
             <a:picLocks noChangeAspect="1"/>
           </p:cNvPicPr>
@@ -16485,7 +16485,7 @@
       </p:sp>
       <p:pic>
         <p:nvPicPr>
-          <p:cNvPr id="5" name="Image 0" descr="/tmp/claude-0/-home-user-Dom-Manipulation/a70c4110-05d8-512e-ae11-d08dee025a7a/scratchpad/img7/aa_a330.png">    </p:cNvPr>
+          <p:cNvPr id="5" name="Image 0" descr="/home/user/Dom-Manipulation/strategic-management/airasia-case/img/aa_a330.png">    </p:cNvPr>
           <p:cNvPicPr>
             <a:picLocks noChangeAspect="1"/>
           </p:cNvPicPr>
@@ -18246,7 +18246,7 @@
       </p:sp>
       <p:pic>
         <p:nvPicPr>
-          <p:cNvPr id="34" name="Image 0" descr="/tmp/claude-0/-home-user-Dom-Manipulation/a70c4110-05d8-512e-ae11-d08dee025a7a/scratchpad/img7/sil_red.png">    </p:cNvPr>
+          <p:cNvPr id="34" name="Image 0" descr="/home/user/Dom-Manipulation/strategic-management/airasia-case/img/sil_red.png">    </p:cNvPr>
           <p:cNvPicPr>
             <a:picLocks noChangeAspect="1"/>
           </p:cNvPicPr>
@@ -19221,7 +19221,7 @@
       </p:sp>
       <p:pic>
         <p:nvPicPr>
-          <p:cNvPr id="10" name="Image 0" descr="/tmp/claude-0/-home-user-Dom-Manipulation/a70c4110-05d8-512e-ae11-d08dee025a7a/scratchpad/img7/crops/aa_turnaround_6.93x4.50_0.5-0.6.jpg">    </p:cNvPr>
+          <p:cNvPr id="10" name="Image 0" descr="/home/user/Dom-Manipulation/strategic-management/airasia-case/img/crops/aa_turnaround_6.93x4.50_0.5-0.6.jpg">    </p:cNvPr>
           <p:cNvPicPr>
             <a:picLocks noChangeAspect="1"/>
           </p:cNvPicPr>
@@ -20460,7 +20460,7 @@
       </p:sp>
       <p:pic>
         <p:nvPicPr>
-          <p:cNvPr id="18" name="Image 0" descr="/tmp/claude-0/-home-user-Dom-Manipulation/a70c4110-05d8-512e-ae11-d08dee025a7a/scratchpad/img7/sil_red.png">    </p:cNvPr>
+          <p:cNvPr id="18" name="Image 0" descr="/home/user/Dom-Manipulation/strategic-management/airasia-case/img/sil_red.png">    </p:cNvPr>
           <p:cNvPicPr>
             <a:picLocks noChangeAspect="1"/>
           </p:cNvPicPr>
@@ -20636,7 +20636,46 @@
         <p:spPr>
           <a:xfrm>
             <a:off x="8138160" y="3840480"/>
-            <a:ext cx="3474720" cy="1645920"/>
+            <a:ext cx="3474720" cy="292608"/>
+          </a:xfrm>
+          <a:prstGeom prst="rect">
+            <a:avLst/>
+          </a:prstGeom>
+          <a:noFill/>
+          <a:ln/>
+        </p:spPr>
+        <p:txBody>
+          <a:bodyPr wrap="square" lIns="0" tIns="0" rIns="0" bIns="0" rtlCol="0" anchor="ctr"/>
+          <a:lstStyle/>
+          <a:p>
+            <a:pPr algn="l" indent="0" marL="0">
+              <a:buNone/>
+            </a:pPr>
+            <a:r>
+              <a:rPr lang="en-US" sz="1200" spc="150" kern="0" dirty="0">
+                <a:solidFill>
+                  <a:srgbClr val="E4002B"/>
+                </a:solidFill>
+                <a:latin typeface="Poppins SemiBold" pitchFamily="34" charset="0"/>
+                <a:ea typeface="Poppins SemiBold" pitchFamily="34" charset="-122"/>
+                <a:cs typeface="Poppins SemiBold" pitchFamily="34" charset="-120"/>
+              </a:rPr>
+              <a:t>LANGKAH PESAING BERIKUTNYA</a:t>
+            </a:r>
+            <a:endParaRPr lang="en-US" sz="1200" dirty="0"/>
+          </a:p>
+        </p:txBody>
+      </p:sp>
+      <p:sp>
+        <p:nvSpPr>
+          <p:cNvPr id="21" name="Text 18"/>
+          <p:cNvSpPr txBox="1"/>
+          <p:nvPr/>
+        </p:nvSpPr>
+        <p:spPr>
+          <a:xfrm>
+            <a:off x="8138160" y="4206240"/>
+            <a:ext cx="3474720" cy="2011680"/>
           </a:xfrm>
           <a:prstGeom prst="rect">
             <a:avLst/>
@@ -20658,15 +20697,75 @@
               <a:buNone/>
             </a:pPr>
             <a:r>
+              <a:rPr lang="en-US" sz="1400" b="1" dirty="0">
+                <a:solidFill>
+                  <a:srgbClr val="2A2A2A"/>
+                </a:solidFill>
+                <a:latin typeface="Poppins" pitchFamily="34" charset="0"/>
+                <a:ea typeface="Poppins" pitchFamily="34" charset="-122"/>
+                <a:cs typeface="Poppins" pitchFamily="34" charset="-120"/>
+              </a:rPr>
+              <a:t>Emirates dan BA</a:t>
+            </a:r>
+            <a:pPr algn="l" indent="0" marL="0">
+              <a:lnSpc>
+                <a:spcPct val="120000"/>
+              </a:lnSpc>
+              <a:spcAft>
+                <a:spcPts val="600"/>
+              </a:spcAft>
+              <a:buNone/>
+            </a:pPr>
+            <a:r>
               <a:rPr lang="en-US" sz="1400" dirty="0">
                 <a:solidFill>
-                  <a:srgbClr val="7A7069"/>
-                </a:solidFill>
-                <a:latin typeface="Poppins" pitchFamily="34" charset="0"/>
-                <a:ea typeface="Poppins" pitchFamily="34" charset="-122"/>
-                <a:cs typeface="Poppins" pitchFamily="34" charset="-120"/>
-              </a:rPr>
-              <a:t>Hambatan mobilitas antar kelompok bukan hanya modal. Yang sulit ditiru adalah budaya biaya rendah dan sistem operasi sederhana.</a:t>
+                  <a:srgbClr val="2A2A2A"/>
+                </a:solidFill>
+                <a:latin typeface="Poppins" pitchFamily="34" charset="0"/>
+                <a:ea typeface="Poppins" pitchFamily="34" charset="-122"/>
+                <a:cs typeface="Poppins" pitchFamily="34" charset="-120"/>
+              </a:rPr>
+              <a:t> menurunkan tarif ekonomi di rute yang sama. </a:t>
+            </a:r>
+            <a:pPr algn="l" indent="0" marL="0">
+              <a:lnSpc>
+                <a:spcPct val="120000"/>
+              </a:lnSpc>
+              <a:spcAft>
+                <a:spcPts val="600"/>
+              </a:spcAft>
+              <a:buNone/>
+            </a:pPr>
+            <a:r>
+              <a:rPr lang="en-US" sz="1400" b="1" dirty="0">
+                <a:solidFill>
+                  <a:srgbClr val="2A2A2A"/>
+                </a:solidFill>
+                <a:latin typeface="Poppins" pitchFamily="34" charset="0"/>
+                <a:ea typeface="Poppins" pitchFamily="34" charset="-122"/>
+                <a:cs typeface="Poppins" pitchFamily="34" charset="-120"/>
+              </a:rPr>
+              <a:t>MAS</a:t>
+            </a:r>
+            <a:pPr algn="l" indent="0" marL="0">
+              <a:lnSpc>
+                <a:spcPct val="120000"/>
+              </a:lnSpc>
+              <a:spcAft>
+                <a:spcPts val="600"/>
+              </a:spcAft>
+              <a:buNone/>
+            </a:pPr>
+            <a:r>
+              <a:rPr lang="en-US" sz="1400" dirty="0">
+                <a:solidFill>
+                  <a:srgbClr val="2A2A2A"/>
+                </a:solidFill>
+                <a:latin typeface="Poppins" pitchFamily="34" charset="0"/>
+                <a:ea typeface="Poppins" pitchFamily="34" charset="-122"/>
+                <a:cs typeface="Poppins" pitchFamily="34" charset="-120"/>
+              </a:rPr>
+              <a:t> menahan slot dan menekan di domestik. LCC regional lain menyusul ke rute jauh bila AirAsia X terbukti laba.</a:t>
             </a:r>
             <a:endParaRPr lang="en-US" sz="1400" dirty="0"/>
           </a:p>
